--- a/PPTs/Ch12_13_Fixed_Floating_Point_Numbers.pptx
+++ b/PPTs/Ch12_13_Fixed_Floating_Point_Numbers.pptx
@@ -160,7 +160,7 @@
 <file path=ppt/revisionInfo.xml><?xml version="1.0" encoding="utf-8"?>
 <p1510:revInfo xmlns:a="http://schemas.openxmlformats.org/drawingml/2006/main" xmlns:r="http://schemas.openxmlformats.org/officeDocument/2006/relationships" xmlns:p1510="http://schemas.microsoft.com/office/powerpoint/2015/10/main">
   <p1510:revLst>
-    <p1510:client id="{67564324-3CBA-4E84-95E9-F69DCA3B5F12}" v="568" dt="2025-11-02T15:18:19.595"/>
+    <p1510:client id="{907C7E2D-7A4C-461C-9DD3-5482D875EE2C}" v="183" dt="2026-04-28T15:02:30.208"/>
   </p1510:revLst>
 </p1510:revInfo>
 </file>
@@ -170,147 +170,156 @@
   <pc:docChgLst>
     <pc:chgData name="Zonghua Gu" userId="9a7e1853e1951ef5" providerId="LiveId" clId="{CF1FAA12-072C-4ED5-BA76-0FFFAEFDB88A}"/>
     <pc:docChg chg="undo redo custSel addSld delSld modSld sldOrd">
-      <pc:chgData name="Zonghua Gu" userId="9a7e1853e1951ef5" providerId="LiveId" clId="{CF1FAA12-072C-4ED5-BA76-0FFFAEFDB88A}" dt="2025-11-15T01:06:04.191" v="1428" actId="20577"/>
+      <pc:chgData name="Zonghua Gu" userId="9a7e1853e1951ef5" providerId="LiveId" clId="{CF1FAA12-072C-4ED5-BA76-0FFFAEFDB88A}" dt="2026-04-28T15:02:30.206" v="1715" actId="20577"/>
       <pc:docMkLst>
         <pc:docMk/>
       </pc:docMkLst>
-      <pc:sldChg chg="modSp add mod">
-        <pc:chgData name="Zonghua Gu" userId="9a7e1853e1951ef5" providerId="LiveId" clId="{CF1FAA12-072C-4ED5-BA76-0FFFAEFDB88A}" dt="2025-11-02T15:24:54.877" v="1426" actId="1076"/>
+      <pc:sldChg chg="delSp modSp mod">
+        <pc:chgData name="Zonghua Gu" userId="9a7e1853e1951ef5" providerId="LiveId" clId="{CF1FAA12-072C-4ED5-BA76-0FFFAEFDB88A}" dt="2026-04-28T14:33:36.779" v="1440" actId="478"/>
         <pc:sldMkLst>
           <pc:docMk/>
-          <pc:sldMk cId="2669434976" sldId="261"/>
+          <pc:sldMk cId="905681104" sldId="257"/>
         </pc:sldMkLst>
-        <pc:spChg chg="mod">
-          <ac:chgData name="Zonghua Gu" userId="9a7e1853e1951ef5" providerId="LiveId" clId="{CF1FAA12-072C-4ED5-BA76-0FFFAEFDB88A}" dt="2025-11-02T15:24:54.877" v="1426" actId="1076"/>
+        <pc:spChg chg="del mod">
+          <ac:chgData name="Zonghua Gu" userId="9a7e1853e1951ef5" providerId="LiveId" clId="{CF1FAA12-072C-4ED5-BA76-0FFFAEFDB88A}" dt="2026-04-28T14:33:36.779" v="1440" actId="478"/>
           <ac:spMkLst>
             <pc:docMk/>
-            <pc:sldMk cId="2669434976" sldId="261"/>
-            <ac:spMk id="5" creationId="{00000000-0000-0000-0000-000000000000}"/>
+            <pc:sldMk cId="905681104" sldId="257"/>
+            <ac:spMk id="4" creationId="{00000000-0000-0000-0000-000000000000}"/>
           </ac:spMkLst>
         </pc:spChg>
-      </pc:sldChg>
-      <pc:sldChg chg="addSp modSp add mod ord">
-        <pc:chgData name="Zonghua Gu" userId="9a7e1853e1951ef5" providerId="LiveId" clId="{CF1FAA12-072C-4ED5-BA76-0FFFAEFDB88A}" dt="2025-11-02T14:59:33.253" v="1204" actId="1076"/>
-        <pc:sldMkLst>
-          <pc:docMk/>
-          <pc:sldMk cId="2690786522" sldId="263"/>
-        </pc:sldMkLst>
-        <pc:spChg chg="add mod">
-          <ac:chgData name="Zonghua Gu" userId="9a7e1853e1951ef5" providerId="LiveId" clId="{CF1FAA12-072C-4ED5-BA76-0FFFAEFDB88A}" dt="2025-11-02T14:59:33.253" v="1204" actId="1076"/>
+        <pc:spChg chg="del mod">
+          <ac:chgData name="Zonghua Gu" userId="9a7e1853e1951ef5" providerId="LiveId" clId="{CF1FAA12-072C-4ED5-BA76-0FFFAEFDB88A}" dt="2026-04-28T14:33:36.779" v="1440" actId="478"/>
           <ac:spMkLst>
             <pc:docMk/>
-            <pc:sldMk cId="2690786522" sldId="263"/>
-            <ac:spMk id="9" creationId="{E1728BAD-20A6-C549-3961-871A98BB8BD5}"/>
+            <pc:sldMk cId="905681104" sldId="257"/>
+            <ac:spMk id="6" creationId="{00000000-0000-0000-0000-000000000000}"/>
           </ac:spMkLst>
         </pc:spChg>
-        <pc:spChg chg="add mod">
-          <ac:chgData name="Zonghua Gu" userId="9a7e1853e1951ef5" providerId="LiveId" clId="{CF1FAA12-072C-4ED5-BA76-0FFFAEFDB88A}" dt="2025-11-02T14:59:33.253" v="1204" actId="1076"/>
+        <pc:spChg chg="del mod">
+          <ac:chgData name="Zonghua Gu" userId="9a7e1853e1951ef5" providerId="LiveId" clId="{CF1FAA12-072C-4ED5-BA76-0FFFAEFDB88A}" dt="2026-04-28T14:33:36.779" v="1440" actId="478"/>
           <ac:spMkLst>
             <pc:docMk/>
-            <pc:sldMk cId="2690786522" sldId="263"/>
-            <ac:spMk id="10" creationId="{A48B9F24-9B86-C996-2235-D44777E997D0}"/>
+            <pc:sldMk cId="905681104" sldId="257"/>
+            <ac:spMk id="7" creationId="{00000000-0000-0000-0000-000000000000}"/>
           </ac:spMkLst>
         </pc:spChg>
+        <pc:picChg chg="del">
+          <ac:chgData name="Zonghua Gu" userId="9a7e1853e1951ef5" providerId="LiveId" clId="{CF1FAA12-072C-4ED5-BA76-0FFFAEFDB88A}" dt="2026-04-28T14:32:28.283" v="1429" actId="478"/>
+          <ac:picMkLst>
+            <pc:docMk/>
+            <pc:sldMk cId="905681104" sldId="257"/>
+            <ac:picMk id="1028" creationId="{00000000-0000-0000-0000-000000000000}"/>
+          </ac:picMkLst>
+        </pc:picChg>
       </pc:sldChg>
       <pc:sldChg chg="modSp mod">
-        <pc:chgData name="Zonghua Gu" userId="9a7e1853e1951ef5" providerId="LiveId" clId="{CF1FAA12-072C-4ED5-BA76-0FFFAEFDB88A}" dt="2025-11-02T15:03:21.949" v="1271" actId="20577"/>
+        <pc:chgData name="Zonghua Gu" userId="9a7e1853e1951ef5" providerId="LiveId" clId="{CF1FAA12-072C-4ED5-BA76-0FFFAEFDB88A}" dt="2026-04-28T14:50:11.242" v="1641" actId="20577"/>
         <pc:sldMkLst>
           <pc:docMk/>
           <pc:sldMk cId="1922114052" sldId="264"/>
         </pc:sldMkLst>
         <pc:spChg chg="mod">
-          <ac:chgData name="Zonghua Gu" userId="9a7e1853e1951ef5" providerId="LiveId" clId="{CF1FAA12-072C-4ED5-BA76-0FFFAEFDB88A}" dt="2025-11-02T15:02:34.666" v="1248" actId="20577"/>
+          <ac:chgData name="Zonghua Gu" userId="9a7e1853e1951ef5" providerId="LiveId" clId="{CF1FAA12-072C-4ED5-BA76-0FFFAEFDB88A}" dt="2026-04-28T14:50:11.242" v="1641" actId="20577"/>
           <ac:spMkLst>
             <pc:docMk/>
             <pc:sldMk cId="1922114052" sldId="264"/>
             <ac:spMk id="4" creationId="{00000000-0000-0000-0000-000000000000}"/>
           </ac:spMkLst>
         </pc:spChg>
-        <pc:spChg chg="mod">
-          <ac:chgData name="Zonghua Gu" userId="9a7e1853e1951ef5" providerId="LiveId" clId="{CF1FAA12-072C-4ED5-BA76-0FFFAEFDB88A}" dt="2025-11-02T15:03:21.949" v="1271" actId="20577"/>
-          <ac:spMkLst>
-            <pc:docMk/>
-            <pc:sldMk cId="1922114052" sldId="264"/>
-            <ac:spMk id="5" creationId="{00000000-0000-0000-0000-000000000000}"/>
-          </ac:spMkLst>
-        </pc:spChg>
       </pc:sldChg>
-      <pc:sldChg chg="modSp mod">
-        <pc:chgData name="Zonghua Gu" userId="9a7e1853e1951ef5" providerId="LiveId" clId="{CF1FAA12-072C-4ED5-BA76-0FFFAEFDB88A}" dt="2025-11-02T15:03:18.690" v="1270" actId="14100"/>
+      <pc:sldChg chg="modSp">
+        <pc:chgData name="Zonghua Gu" userId="9a7e1853e1951ef5" providerId="LiveId" clId="{CF1FAA12-072C-4ED5-BA76-0FFFAEFDB88A}" dt="2026-04-28T14:51:53.751" v="1644" actId="6549"/>
         <pc:sldMkLst>
           <pc:docMk/>
           <pc:sldMk cId="3002516707" sldId="265"/>
         </pc:sldMkLst>
         <pc:spChg chg="mod">
-          <ac:chgData name="Zonghua Gu" userId="9a7e1853e1951ef5" providerId="LiveId" clId="{CF1FAA12-072C-4ED5-BA76-0FFFAEFDB88A}" dt="2025-11-02T15:02:40.849" v="1250" actId="20577"/>
+          <ac:chgData name="Zonghua Gu" userId="9a7e1853e1951ef5" providerId="LiveId" clId="{CF1FAA12-072C-4ED5-BA76-0FFFAEFDB88A}" dt="2026-04-28T14:51:53.751" v="1644" actId="6549"/>
           <ac:spMkLst>
             <pc:docMk/>
             <pc:sldMk cId="3002516707" sldId="265"/>
             <ac:spMk id="4" creationId="{00000000-0000-0000-0000-000000000000}"/>
           </ac:spMkLst>
         </pc:spChg>
+      </pc:sldChg>
+      <pc:sldChg chg="modSp mod modAnim">
+        <pc:chgData name="Zonghua Gu" userId="9a7e1853e1951ef5" providerId="LiveId" clId="{CF1FAA12-072C-4ED5-BA76-0FFFAEFDB88A}" dt="2026-04-28T14:38:54.452" v="1474" actId="20577"/>
+        <pc:sldMkLst>
+          <pc:docMk/>
+          <pc:sldMk cId="2303640266" sldId="270"/>
+        </pc:sldMkLst>
         <pc:spChg chg="mod">
-          <ac:chgData name="Zonghua Gu" userId="9a7e1853e1951ef5" providerId="LiveId" clId="{CF1FAA12-072C-4ED5-BA76-0FFFAEFDB88A}" dt="2025-11-02T15:03:18.690" v="1270" actId="14100"/>
+          <ac:chgData name="Zonghua Gu" userId="9a7e1853e1951ef5" providerId="LiveId" clId="{CF1FAA12-072C-4ED5-BA76-0FFFAEFDB88A}" dt="2026-04-28T14:38:52.524" v="1473" actId="20577"/>
           <ac:spMkLst>
             <pc:docMk/>
-            <pc:sldMk cId="3002516707" sldId="265"/>
-            <ac:spMk id="5" creationId="{00000000-0000-0000-0000-000000000000}"/>
+            <pc:sldMk cId="2303640266" sldId="270"/>
+            <ac:spMk id="7" creationId="{DCD33914-E4FD-5A40-A0B8-5F8EF15AFA79}"/>
           </ac:spMkLst>
         </pc:spChg>
       </pc:sldChg>
-      <pc:sldChg chg="modSp add mod ord">
-        <pc:chgData name="Zonghua Gu" userId="9a7e1853e1951ef5" providerId="LiveId" clId="{CF1FAA12-072C-4ED5-BA76-0FFFAEFDB88A}" dt="2025-11-02T15:06:54.689" v="1278" actId="20578"/>
+      <pc:sldChg chg="addSp modSp mod modAnim">
+        <pc:chgData name="Zonghua Gu" userId="9a7e1853e1951ef5" providerId="LiveId" clId="{CF1FAA12-072C-4ED5-BA76-0FFFAEFDB88A}" dt="2026-04-28T14:44:30.584" v="1578"/>
+        <pc:sldMkLst>
+          <pc:docMk/>
+          <pc:sldMk cId="685413091" sldId="271"/>
+        </pc:sldMkLst>
+        <pc:spChg chg="add mod">
+          <ac:chgData name="Zonghua Gu" userId="9a7e1853e1951ef5" providerId="LiveId" clId="{CF1FAA12-072C-4ED5-BA76-0FFFAEFDB88A}" dt="2026-04-28T14:42:37.055" v="1486" actId="767"/>
+          <ac:spMkLst>
+            <pc:docMk/>
+            <pc:sldMk cId="685413091" sldId="271"/>
+            <ac:spMk id="11" creationId="{EF001A72-F383-2B1A-1051-D5D48B0A7920}"/>
+          </ac:spMkLst>
+        </pc:spChg>
+        <pc:spChg chg="add">
+          <ac:chgData name="Zonghua Gu" userId="9a7e1853e1951ef5" providerId="LiveId" clId="{CF1FAA12-072C-4ED5-BA76-0FFFAEFDB88A}" dt="2026-04-28T14:42:31.706" v="1485"/>
+          <ac:spMkLst>
+            <pc:docMk/>
+            <pc:sldMk cId="685413091" sldId="271"/>
+            <ac:spMk id="14" creationId="{41A88AFE-102C-9A89-15EF-D4F0FC0FDFAE}"/>
+          </ac:spMkLst>
+        </pc:spChg>
+        <pc:spChg chg="mod">
+          <ac:chgData name="Zonghua Gu" userId="9a7e1853e1951ef5" providerId="LiveId" clId="{CF1FAA12-072C-4ED5-BA76-0FFFAEFDB88A}" dt="2026-04-28T14:39:21.897" v="1483" actId="1035"/>
+          <ac:spMkLst>
+            <pc:docMk/>
+            <pc:sldMk cId="685413091" sldId="271"/>
+            <ac:spMk id="17" creationId="{AFE825E6-FF9D-4C4C-BAD6-B7F97262EE21}"/>
+          </ac:spMkLst>
+        </pc:spChg>
+        <pc:spChg chg="add mod">
+          <ac:chgData name="Zonghua Gu" userId="9a7e1853e1951ef5" providerId="LiveId" clId="{CF1FAA12-072C-4ED5-BA76-0FFFAEFDB88A}" dt="2026-04-28T14:44:21.149" v="1577" actId="14100"/>
+          <ac:spMkLst>
+            <pc:docMk/>
+            <pc:sldMk cId="685413091" sldId="271"/>
+            <ac:spMk id="19" creationId="{6E77B0E7-C438-952B-F568-302321E6DD25}"/>
+          </ac:spMkLst>
+        </pc:spChg>
+      </pc:sldChg>
+      <pc:sldChg chg="modSp">
+        <pc:chgData name="Zonghua Gu" userId="9a7e1853e1951ef5" providerId="LiveId" clId="{CF1FAA12-072C-4ED5-BA76-0FFFAEFDB88A}" dt="2026-04-28T15:02:30.206" v="1715" actId="20577"/>
         <pc:sldMkLst>
           <pc:docMk/>
           <pc:sldMk cId="3761897037" sldId="281"/>
         </pc:sldMkLst>
         <pc:spChg chg="mod">
-          <ac:chgData name="Zonghua Gu" userId="9a7e1853e1951ef5" providerId="LiveId" clId="{CF1FAA12-072C-4ED5-BA76-0FFFAEFDB88A}" dt="2025-10-26T16:50:30.808" v="1183" actId="113"/>
+          <ac:chgData name="Zonghua Gu" userId="9a7e1853e1951ef5" providerId="LiveId" clId="{CF1FAA12-072C-4ED5-BA76-0FFFAEFDB88A}" dt="2026-04-28T15:02:30.206" v="1715" actId="20577"/>
           <ac:spMkLst>
             <pc:docMk/>
             <pc:sldMk cId="3761897037" sldId="281"/>
-            <ac:spMk id="2" creationId="{375475F4-E526-1473-6263-AB10E888210F}"/>
+            <ac:spMk id="4" creationId="{234DA398-7598-5E3A-A505-43A059F4F4D1}"/>
           </ac:spMkLst>
         </pc:spChg>
       </pc:sldChg>
-      <pc:sldChg chg="modSp add mod">
-        <pc:chgData name="Zonghua Gu" userId="9a7e1853e1951ef5" providerId="LiveId" clId="{CF1FAA12-072C-4ED5-BA76-0FFFAEFDB88A}" dt="2025-10-26T16:50:33.152" v="1184" actId="113"/>
-        <pc:sldMkLst>
-          <pc:docMk/>
-          <pc:sldMk cId="1065607407" sldId="282"/>
-        </pc:sldMkLst>
-        <pc:spChg chg="mod">
-          <ac:chgData name="Zonghua Gu" userId="9a7e1853e1951ef5" providerId="LiveId" clId="{CF1FAA12-072C-4ED5-BA76-0FFFAEFDB88A}" dt="2025-10-26T16:50:33.152" v="1184" actId="113"/>
-          <ac:spMkLst>
-            <pc:docMk/>
-            <pc:sldMk cId="1065607407" sldId="282"/>
-            <ac:spMk id="2" creationId="{1F000EC5-11FF-B40D-E96F-A868D391149B}"/>
-          </ac:spMkLst>
-        </pc:spChg>
-      </pc:sldChg>
-      <pc:sldChg chg="modSp add mod">
-        <pc:chgData name="Zonghua Gu" userId="9a7e1853e1951ef5" providerId="LiveId" clId="{CF1FAA12-072C-4ED5-BA76-0FFFAEFDB88A}" dt="2025-10-26T16:50:35.425" v="1185" actId="113"/>
-        <pc:sldMkLst>
-          <pc:docMk/>
-          <pc:sldMk cId="2683607622" sldId="284"/>
-        </pc:sldMkLst>
-        <pc:spChg chg="mod">
-          <ac:chgData name="Zonghua Gu" userId="9a7e1853e1951ef5" providerId="LiveId" clId="{CF1FAA12-072C-4ED5-BA76-0FFFAEFDB88A}" dt="2025-10-26T16:50:35.425" v="1185" actId="113"/>
-          <ac:spMkLst>
-            <pc:docMk/>
-            <pc:sldMk cId="2683607622" sldId="284"/>
-            <ac:spMk id="2" creationId="{9A89A2AC-1EFE-50A9-F487-AFE87D1F70FC}"/>
-          </ac:spMkLst>
-        </pc:spChg>
-      </pc:sldChg>
-      <pc:sldChg chg="modSp new mod">
-        <pc:chgData name="Zonghua Gu" userId="9a7e1853e1951ef5" providerId="LiveId" clId="{CF1FAA12-072C-4ED5-BA76-0FFFAEFDB88A}" dt="2025-11-02T15:11:14.203" v="1317" actId="20577"/>
+      <pc:sldChg chg="modSp">
+        <pc:chgData name="Zonghua Gu" userId="9a7e1853e1951ef5" providerId="LiveId" clId="{CF1FAA12-072C-4ED5-BA76-0FFFAEFDB88A}" dt="2026-04-28T14:46:12.366" v="1579" actId="6549"/>
         <pc:sldMkLst>
           <pc:docMk/>
           <pc:sldMk cId="3161310983" sldId="735"/>
         </pc:sldMkLst>
         <pc:spChg chg="mod">
-          <ac:chgData name="Zonghua Gu" userId="9a7e1853e1951ef5" providerId="LiveId" clId="{CF1FAA12-072C-4ED5-BA76-0FFFAEFDB88A}" dt="2025-11-02T15:11:14.203" v="1317" actId="20577"/>
+          <ac:chgData name="Zonghua Gu" userId="9a7e1853e1951ef5" providerId="LiveId" clId="{CF1FAA12-072C-4ED5-BA76-0FFFAEFDB88A}" dt="2026-04-28T14:46:12.366" v="1579" actId="6549"/>
           <ac:spMkLst>
             <pc:docMk/>
             <pc:sldMk cId="3161310983" sldId="735"/>
@@ -318,102 +327,18 @@
           </ac:spMkLst>
         </pc:spChg>
       </pc:sldChg>
-      <pc:sldChg chg="addSp delSp modSp add mod">
-        <pc:chgData name="Zonghua Gu" userId="9a7e1853e1951ef5" providerId="LiveId" clId="{CF1FAA12-072C-4ED5-BA76-0FFFAEFDB88A}" dt="2025-11-02T15:18:19.595" v="1375" actId="20577"/>
+      <pc:sldChg chg="modSp mod">
+        <pc:chgData name="Zonghua Gu" userId="9a7e1853e1951ef5" providerId="LiveId" clId="{CF1FAA12-072C-4ED5-BA76-0FFFAEFDB88A}" dt="2026-04-28T15:01:37.062" v="1712" actId="6549"/>
         <pc:sldMkLst>
           <pc:docMk/>
           <pc:sldMk cId="2896628209" sldId="736"/>
         </pc:sldMkLst>
         <pc:spChg chg="mod">
-          <ac:chgData name="Zonghua Gu" userId="9a7e1853e1951ef5" providerId="LiveId" clId="{CF1FAA12-072C-4ED5-BA76-0FFFAEFDB88A}" dt="2025-10-26T16:50:28.602" v="1182" actId="113"/>
-          <ac:spMkLst>
-            <pc:docMk/>
-            <pc:sldMk cId="2896628209" sldId="736"/>
-            <ac:spMk id="2" creationId="{00000000-0000-0000-0000-000000000000}"/>
-          </ac:spMkLst>
-        </pc:spChg>
-        <pc:spChg chg="mod">
-          <ac:chgData name="Zonghua Gu" userId="9a7e1853e1951ef5" providerId="LiveId" clId="{CF1FAA12-072C-4ED5-BA76-0FFFAEFDB88A}" dt="2025-11-02T15:18:19.595" v="1375" actId="20577"/>
+          <ac:chgData name="Zonghua Gu" userId="9a7e1853e1951ef5" providerId="LiveId" clId="{CF1FAA12-072C-4ED5-BA76-0FFFAEFDB88A}" dt="2026-04-28T15:01:37.062" v="1712" actId="6549"/>
           <ac:spMkLst>
             <pc:docMk/>
             <pc:sldMk cId="2896628209" sldId="736"/>
             <ac:spMk id="4" creationId="{00000000-0000-0000-0000-000000000000}"/>
-          </ac:spMkLst>
-        </pc:spChg>
-        <pc:picChg chg="add mod">
-          <ac:chgData name="Zonghua Gu" userId="9a7e1853e1951ef5" providerId="LiveId" clId="{CF1FAA12-072C-4ED5-BA76-0FFFAEFDB88A}" dt="2025-11-02T15:07:56.158" v="1292" actId="1076"/>
-          <ac:picMkLst>
-            <pc:docMk/>
-            <pc:sldMk cId="2896628209" sldId="736"/>
-            <ac:picMk id="5" creationId="{00000000-0000-0000-0000-000000000000}"/>
-          </ac:picMkLst>
-        </pc:picChg>
-      </pc:sldChg>
-      <pc:sldChg chg="modSp new mod">
-        <pc:chgData name="Zonghua Gu" userId="9a7e1853e1951ef5" providerId="LiveId" clId="{CF1FAA12-072C-4ED5-BA76-0FFFAEFDB88A}" dt="2025-10-26T19:32:42.828" v="1192" actId="21"/>
-        <pc:sldMkLst>
-          <pc:docMk/>
-          <pc:sldMk cId="990295586" sldId="738"/>
-        </pc:sldMkLst>
-        <pc:spChg chg="mod">
-          <ac:chgData name="Zonghua Gu" userId="9a7e1853e1951ef5" providerId="LiveId" clId="{CF1FAA12-072C-4ED5-BA76-0FFFAEFDB88A}" dt="2025-10-26T19:32:42.828" v="1192" actId="21"/>
-          <ac:spMkLst>
-            <pc:docMk/>
-            <pc:sldMk cId="990295586" sldId="738"/>
-            <ac:spMk id="4" creationId="{DB304D09-7213-2F35-AD9D-8F22A94BFA9A}"/>
-          </ac:spMkLst>
-        </pc:spChg>
-      </pc:sldChg>
-      <pc:sldChg chg="addSp delSp modSp add mod modNotesTx">
-        <pc:chgData name="Zonghua Gu" userId="9a7e1853e1951ef5" providerId="LiveId" clId="{CF1FAA12-072C-4ED5-BA76-0FFFAEFDB88A}" dt="2025-10-26T16:47:46.641" v="1181" actId="20577"/>
-        <pc:sldMkLst>
-          <pc:docMk/>
-          <pc:sldMk cId="3951653191" sldId="739"/>
-        </pc:sldMkLst>
-        <pc:spChg chg="mod">
-          <ac:chgData name="Zonghua Gu" userId="9a7e1853e1951ef5" providerId="LiveId" clId="{CF1FAA12-072C-4ED5-BA76-0FFFAEFDB88A}" dt="2025-10-26T16:47:46.641" v="1181" actId="20577"/>
-          <ac:spMkLst>
-            <pc:docMk/>
-            <pc:sldMk cId="3951653191" sldId="739"/>
-            <ac:spMk id="4" creationId="{B3D4FF65-D71D-3471-F040-1E677F86A2DD}"/>
-          </ac:spMkLst>
-        </pc:spChg>
-      </pc:sldChg>
-      <pc:sldChg chg="addSp modSp add mod">
-        <pc:chgData name="Zonghua Gu" userId="9a7e1853e1951ef5" providerId="LiveId" clId="{CF1FAA12-072C-4ED5-BA76-0FFFAEFDB88A}" dt="2025-10-26T16:44:11.512" v="1178" actId="1076"/>
-        <pc:sldMkLst>
-          <pc:docMk/>
-          <pc:sldMk cId="598855194" sldId="741"/>
-        </pc:sldMkLst>
-        <pc:spChg chg="add mod">
-          <ac:chgData name="Zonghua Gu" userId="9a7e1853e1951ef5" providerId="LiveId" clId="{CF1FAA12-072C-4ED5-BA76-0FFFAEFDB88A}" dt="2025-10-26T16:44:11.512" v="1178" actId="1076"/>
-          <ac:spMkLst>
-            <pc:docMk/>
-            <pc:sldMk cId="598855194" sldId="741"/>
-            <ac:spMk id="5" creationId="{FFF26C8F-DF03-64D8-CF77-B258AADB637B}"/>
-          </ac:spMkLst>
-        </pc:spChg>
-      </pc:sldChg>
-      <pc:sldChg chg="addSp delSp modSp new mod">
-        <pc:chgData name="Zonghua Gu" userId="9a7e1853e1951ef5" providerId="LiveId" clId="{CF1FAA12-072C-4ED5-BA76-0FFFAEFDB88A}" dt="2025-11-15T01:06:04.191" v="1428" actId="20577"/>
-        <pc:sldMkLst>
-          <pc:docMk/>
-          <pc:sldMk cId="3892365445" sldId="743"/>
-        </pc:sldMkLst>
-        <pc:spChg chg="mod">
-          <ac:chgData name="Zonghua Gu" userId="9a7e1853e1951ef5" providerId="LiveId" clId="{CF1FAA12-072C-4ED5-BA76-0FFFAEFDB88A}" dt="2025-10-17T23:34:43.244" v="1160" actId="20577"/>
-          <ac:spMkLst>
-            <pc:docMk/>
-            <pc:sldMk cId="3892365445" sldId="743"/>
-            <ac:spMk id="2" creationId="{96369424-0102-7D10-CA3C-02B3C0033DF2}"/>
-          </ac:spMkLst>
-        </pc:spChg>
-        <pc:spChg chg="add del mod">
-          <ac:chgData name="Zonghua Gu" userId="9a7e1853e1951ef5" providerId="LiveId" clId="{CF1FAA12-072C-4ED5-BA76-0FFFAEFDB88A}" dt="2025-11-15T01:06:04.191" v="1428" actId="20577"/>
-          <ac:spMkLst>
-            <pc:docMk/>
-            <pc:sldMk cId="3892365445" sldId="743"/>
-            <ac:spMk id="4" creationId="{F6E9C26C-00C6-ED10-C2C9-02E0EBAC4C6B}"/>
           </ac:spMkLst>
         </pc:spChg>
       </pc:sldChg>
@@ -6443,7 +6368,7 @@
             <a:fld id="{BD4F56A7-3CDE-194F-B9AF-D598FBBF1989}" type="datetimeFigureOut">
               <a:rPr lang="en-US" smtClean="0"/>
               <a:pPr/>
-              <a:t>11/14/2025</a:t>
+              <a:t>4/28/2026</a:t>
             </a:fld>
             <a:endParaRPr lang="en-US"/>
           </a:p>
@@ -6611,7 +6536,7 @@
             <a:fld id="{1E52AD58-60CE-E948-9CBA-0BD7030FC28E}" type="datetimeFigureOut">
               <a:rPr lang="en-US" smtClean="0"/>
               <a:pPr/>
-              <a:t>11/14/2025</a:t>
+              <a:t>4/28/2026</a:t>
             </a:fld>
             <a:endParaRPr lang="en-US"/>
           </a:p>
@@ -8238,7 +8163,7 @@
             <a:pPr eaLnBrk="1" latinLnBrk="0" hangingPunct="1"/>
             <a:fld id="{8E8B2B42-CBC2-7D4E-BA50-0E7F29B4DAAB}" type="datetime1">
               <a:rPr lang="en-US" smtClean="0"/>
-              <a:t>11/14/2025</a:t>
+              <a:t>4/28/2026</a:t>
             </a:fld>
             <a:endParaRPr lang="en-US" sz="1600" dirty="0"/>
           </a:p>
@@ -8598,7 +8523,7 @@
             <a:pPr eaLnBrk="1" latinLnBrk="0" hangingPunct="1"/>
             <a:fld id="{597D1259-3A46-254C-ADDB-B5DA4F1DF3DA}" type="datetime1">
               <a:rPr lang="en-US" smtClean="0"/>
-              <a:t>11/14/2025</a:t>
+              <a:t>4/28/2026</a:t>
             </a:fld>
             <a:endParaRPr lang="en-US"/>
           </a:p>
@@ -8774,7 +8699,7 @@
             <a:pPr eaLnBrk="1" latinLnBrk="0" hangingPunct="1"/>
             <a:fld id="{CCA104EC-54AA-E04F-BDC0-22B4E8892699}" type="datetime1">
               <a:rPr lang="en-US" smtClean="0"/>
-              <a:t>11/14/2025</a:t>
+              <a:t>4/28/2026</a:t>
             </a:fld>
             <a:endParaRPr lang="en-US"/>
           </a:p>
@@ -9010,7 +8935,7 @@
             <a:pPr eaLnBrk="1" latinLnBrk="0" hangingPunct="1"/>
             <a:fld id="{A9E6F060-20EB-3246-9088-08BF5F1271DE}" type="datetime1">
               <a:rPr lang="en-US" smtClean="0"/>
-              <a:t>11/14/2025</a:t>
+              <a:t>4/28/2026</a:t>
             </a:fld>
             <a:endParaRPr lang="en-US" dirty="0"/>
           </a:p>
@@ -9280,7 +9205,7 @@
             <a:pPr eaLnBrk="1" latinLnBrk="0" hangingPunct="1"/>
             <a:fld id="{34C82E41-DA7E-CA4C-823B-C759BEA16CE8}" type="datetime1">
               <a:rPr lang="en-US" smtClean="0"/>
-              <a:t>11/14/2025</a:t>
+              <a:t>4/28/2026</a:t>
             </a:fld>
             <a:endParaRPr lang="en-US" dirty="0"/>
           </a:p>
@@ -9501,7 +9426,7 @@
             <a:pPr eaLnBrk="1" latinLnBrk="0" hangingPunct="1"/>
             <a:fld id="{2500C8B0-EB1A-0A41-B839-C4B99CD2225A}" type="datetime1">
               <a:rPr lang="en-US" smtClean="0"/>
-              <a:t>11/14/2025</a:t>
+              <a:t>4/28/2026</a:t>
             </a:fld>
             <a:endParaRPr lang="en-US"/>
           </a:p>
@@ -9854,7 +9779,7 @@
             <a:pPr eaLnBrk="1" latinLnBrk="0" hangingPunct="1"/>
             <a:fld id="{4F16605B-D952-1149-A111-28A5633BAE48}" type="datetime1">
               <a:rPr lang="en-US" smtClean="0"/>
-              <a:t>11/14/2025</a:t>
+              <a:t>4/28/2026</a:t>
             </a:fld>
             <a:endParaRPr lang="en-US"/>
           </a:p>
@@ -10087,7 +10012,7 @@
             <a:pPr eaLnBrk="1" latinLnBrk="0" hangingPunct="1"/>
             <a:fld id="{91109A1C-29B2-B04E-8365-C9D22C4AE842}" type="datetime1">
               <a:rPr lang="en-US" smtClean="0"/>
-              <a:t>11/14/2025</a:t>
+              <a:t>4/28/2026</a:t>
             </a:fld>
             <a:endParaRPr lang="en-US"/>
           </a:p>
@@ -10229,7 +10154,7 @@
             <a:pPr eaLnBrk="1" latinLnBrk="0" hangingPunct="1"/>
             <a:fld id="{2CE417B6-A42B-064A-8677-46C55C4F613A}" type="datetime1">
               <a:rPr lang="en-US" smtClean="0"/>
-              <a:t>11/14/2025</a:t>
+              <a:t>4/28/2026</a:t>
             </a:fld>
             <a:endParaRPr lang="en-US"/>
           </a:p>
@@ -10507,7 +10432,7 @@
             <a:pPr eaLnBrk="1" latinLnBrk="0" hangingPunct="1"/>
             <a:fld id="{DE76F5AD-3F1F-7141-BC8A-012C5728BE2D}" type="datetime1">
               <a:rPr lang="en-US" smtClean="0"/>
-              <a:t>11/14/2025</a:t>
+              <a:t>4/28/2026</a:t>
             </a:fld>
             <a:endParaRPr lang="en-US"/>
           </a:p>
@@ -10915,7 +10840,7 @@
             <a:pPr eaLnBrk="1" latinLnBrk="0" hangingPunct="1"/>
             <a:fld id="{09FA12B8-739E-4D47-A14C-180C3BC10865}" type="datetime1">
               <a:rPr lang="en-US" smtClean="0"/>
-              <a:t>11/14/2025</a:t>
+              <a:t>4/28/2026</a:t>
             </a:fld>
             <a:endParaRPr lang="en-US"/>
           </a:p>
@@ -11253,7 +11178,7 @@
             <a:pPr eaLnBrk="1" latinLnBrk="0" hangingPunct="1"/>
             <a:fld id="{CDD18CD8-E404-844E-A4BD-DF69B8E5881E}" type="datetime1">
               <a:rPr lang="en-US" smtClean="0"/>
-              <a:t>11/14/2025</a:t>
+              <a:t>4/28/2026</a:t>
             </a:fld>
             <a:endParaRPr lang="en-US" sz="1400" dirty="0">
               <a:solidFill>
@@ -12675,7 +12600,34 @@
                           </a:solidFill>
                           <a:latin typeface="Cambria Math" panose="02040503050406030204" pitchFamily="18" charset="0"/>
                         </a:rPr>
-                        <m:t>10.746×</m:t>
+                        <m:t>10</m:t>
+                      </m:r>
+                      <m:r>
+                        <a:rPr lang="en-US" i="1">
+                          <a:solidFill>
+                            <a:srgbClr val="000000"/>
+                          </a:solidFill>
+                          <a:latin typeface="Cambria Math" panose="02040503050406030204" pitchFamily="18" charset="0"/>
+                        </a:rPr>
+                        <m:t>.</m:t>
+                      </m:r>
+                      <m:r>
+                        <a:rPr lang="en-US" i="1">
+                          <a:solidFill>
+                            <a:srgbClr val="000000"/>
+                          </a:solidFill>
+                          <a:latin typeface="Cambria Math" panose="02040503050406030204" pitchFamily="18" charset="0"/>
+                        </a:rPr>
+                        <m:t>746</m:t>
+                      </m:r>
+                      <m:r>
+                        <a:rPr lang="en-US" i="1">
+                          <a:solidFill>
+                            <a:srgbClr val="000000"/>
+                          </a:solidFill>
+                          <a:latin typeface="Cambria Math" panose="02040503050406030204" pitchFamily="18" charset="0"/>
+                        </a:rPr>
+                        <m:t>×</m:t>
                       </m:r>
                       <m:sSup>
                         <m:sSupPr>
@@ -12739,7 +12691,25 @@
                               </a:solidFill>
                               <a:latin typeface="Cambria Math" panose="02040503050406030204" pitchFamily="18" charset="0"/>
                             </a:rPr>
-                            <m:t>10.746</m:t>
+                            <m:t>10</m:t>
+                          </m:r>
+                          <m:r>
+                            <a:rPr lang="en-US" i="1">
+                              <a:solidFill>
+                                <a:srgbClr val="000000"/>
+                              </a:solidFill>
+                              <a:latin typeface="Cambria Math" panose="02040503050406030204" pitchFamily="18" charset="0"/>
+                            </a:rPr>
+                            <m:t>.</m:t>
+                          </m:r>
+                          <m:r>
+                            <a:rPr lang="en-US" i="1">
+                              <a:solidFill>
+                                <a:srgbClr val="000000"/>
+                              </a:solidFill>
+                              <a:latin typeface="Cambria Math" panose="02040503050406030204" pitchFamily="18" charset="0"/>
+                            </a:rPr>
+                            <m:t>746</m:t>
                           </m:r>
                         </m:num>
                         <m:den>
@@ -12761,7 +12731,25 @@
                           </a:solidFill>
                           <a:latin typeface="Cambria Math" panose="02040503050406030204" pitchFamily="18" charset="0"/>
                         </a:rPr>
-                        <m:t>×8×</m:t>
+                        <m:t>×</m:t>
+                      </m:r>
+                      <m:r>
+                        <a:rPr lang="en-US" i="1">
+                          <a:solidFill>
+                            <a:srgbClr val="000000"/>
+                          </a:solidFill>
+                          <a:latin typeface="Cambria Math" panose="02040503050406030204" pitchFamily="18" charset="0"/>
+                        </a:rPr>
+                        <m:t>8</m:t>
+                      </m:r>
+                      <m:r>
+                        <a:rPr lang="en-US" i="1">
+                          <a:solidFill>
+                            <a:srgbClr val="000000"/>
+                          </a:solidFill>
+                          <a:latin typeface="Cambria Math" panose="02040503050406030204" pitchFamily="18" charset="0"/>
+                        </a:rPr>
+                        <m:t>×</m:t>
                       </m:r>
                       <m:sSup>
                         <m:sSupPr>
@@ -13678,8 +13666,8 @@
           </a:p>
         </p:txBody>
       </p:sp>
-      <mc:AlternateContent xmlns:mc="http://schemas.openxmlformats.org/markup-compatibility/2006" xmlns:a14="http://schemas.microsoft.com/office/drawing/2010/main">
-        <mc:Choice Requires="a14">
+      <mc:AlternateContent xmlns:mc="http://schemas.openxmlformats.org/markup-compatibility/2006">
+        <mc:Choice xmlns:a14="http://schemas.microsoft.com/office/drawing/2010/main" Requires="a14">
           <p:sp>
             <p:nvSpPr>
               <p:cNvPr id="4" name="Content Placeholder 3"/>
@@ -13693,12 +13681,12 @@
             <p:spPr>
               <a:xfrm>
                 <a:off x="609600" y="1263579"/>
-                <a:ext cx="10972800" cy="3841821"/>
+                <a:ext cx="10972800" cy="4222821"/>
               </a:xfrm>
             </p:spPr>
             <p:txBody>
               <a:bodyPr>
-                <a:normAutofit fontScale="77500" lnSpcReduction="20000"/>
+                <a:normAutofit fontScale="70000" lnSpcReduction="20000"/>
               </a:bodyPr>
               <a:lstStyle/>
               <a:p>
@@ -14471,7 +14459,34 @@
                     </m:r>
                   </m:oMath>
                 </a14:m>
-                <a:endParaRPr lang="en-US" sz="2800" dirty="0"/>
+                <a:r>
+                  <a:rPr lang="en-US" sz="2800" dirty="0"/>
+                  <a:t> </a:t>
+                </a:r>
+              </a:p>
+              <a:p>
+                <a:pPr lvl="1"/>
+                <a:r>
+                  <a:rPr lang="en-US" sz="2500" dirty="0"/>
+                  <a:t>Exponent – bias = </a:t>
+                </a:r>
+                <a14:m>
+                  <m:oMath xmlns:m="http://schemas.openxmlformats.org/officeDocument/2006/math">
+                    <m:r>
+                      <a:rPr lang="en-US" sz="2500" i="1">
+                        <a:latin typeface="Cambria Math" panose="02040503050406030204" pitchFamily="18" charset="0"/>
+                      </a:rPr>
+                      <m:t>133−127</m:t>
+                    </m:r>
+                    <m:r>
+                      <a:rPr lang="en-US" sz="2500" b="0" i="1" smtClean="0">
+                        <a:latin typeface="Cambria Math" panose="02040503050406030204" pitchFamily="18" charset="0"/>
+                      </a:rPr>
+                      <m:t>=6</m:t>
+                    </m:r>
+                  </m:oMath>
+                </a14:m>
+                <a:endParaRPr lang="en-US" sz="2500" dirty="0"/>
               </a:p>
               <a:p>
                 <a:r>
@@ -14591,6 +14606,48 @@
                 <a:endParaRPr lang="en-US" sz="2800" dirty="0"/>
               </a:p>
               <a:p>
+                <a:pPr lvl="1"/>
+                <a:r>
+                  <a:rPr lang="en-US" sz="2500" dirty="0"/>
+                  <a:t>Exponent – bias = </a:t>
+                </a:r>
+                <a14:m>
+                  <m:oMath xmlns:m="http://schemas.openxmlformats.org/officeDocument/2006/math">
+                    <m:r>
+                      <a:rPr lang="en-US" sz="2500" i="1">
+                        <a:latin typeface="Cambria Math" panose="02040503050406030204" pitchFamily="18" charset="0"/>
+                      </a:rPr>
+                      <m:t>13</m:t>
+                    </m:r>
+                    <m:r>
+                      <a:rPr lang="en-US" sz="2500" b="0" i="1" smtClean="0">
+                        <a:latin typeface="Cambria Math" panose="02040503050406030204" pitchFamily="18" charset="0"/>
+                      </a:rPr>
+                      <m:t>4</m:t>
+                    </m:r>
+                    <m:r>
+                      <a:rPr lang="en-US" sz="2500" i="1">
+                        <a:latin typeface="Cambria Math" panose="02040503050406030204" pitchFamily="18" charset="0"/>
+                      </a:rPr>
+                      <m:t>−127</m:t>
+                    </m:r>
+                    <m:r>
+                      <a:rPr lang="en-US" sz="2500" i="1">
+                        <a:latin typeface="Cambria Math" panose="02040503050406030204" pitchFamily="18" charset="0"/>
+                      </a:rPr>
+                      <m:t>=</m:t>
+                    </m:r>
+                    <m:r>
+                      <a:rPr lang="en-US" sz="2500" b="0" i="1" smtClean="0">
+                        <a:latin typeface="Cambria Math" panose="02040503050406030204" pitchFamily="18" charset="0"/>
+                      </a:rPr>
+                      <m:t>7</m:t>
+                    </m:r>
+                  </m:oMath>
+                </a14:m>
+                <a:endParaRPr lang="en-US" sz="2500" dirty="0"/>
+              </a:p>
+              <a:p>
                 <a:pPr marL="0" indent="0">
                   <a:buNone/>
                 </a:pPr>
@@ -14611,7 +14668,7 @@
             </p:txBody>
           </p:sp>
         </mc:Choice>
-        <mc:Fallback xmlns="">
+        <mc:Fallback>
           <p:sp>
             <p:nvSpPr>
               <p:cNvPr id="4" name="Content Placeholder 3"/>
@@ -14625,12 +14682,12 @@
             <p:spPr>
               <a:xfrm>
                 <a:off x="609600" y="1263579"/>
-                <a:ext cx="10972800" cy="3841821"/>
+                <a:ext cx="10972800" cy="4222821"/>
               </a:xfrm>
               <a:blipFill>
                 <a:blip r:embed="rId3"/>
                 <a:stretch>
-                  <a:fillRect l="-278" t="-2694" b="-1426"/>
+                  <a:fillRect l="-222" t="-2165"/>
                 </a:stretch>
               </a:blipFill>
             </p:spPr>
@@ -14810,8 +14867,8 @@
           </a:p>
         </p:txBody>
       </p:sp>
-      <mc:AlternateContent xmlns:mc="http://schemas.openxmlformats.org/markup-compatibility/2006" xmlns:a14="http://schemas.microsoft.com/office/drawing/2010/main">
-        <mc:Choice Requires="a14">
+      <mc:AlternateContent xmlns:mc="http://schemas.openxmlformats.org/markup-compatibility/2006">
+        <mc:Choice xmlns:a14="http://schemas.microsoft.com/office/drawing/2010/main" Requires="a14">
           <p:sp>
             <p:nvSpPr>
               <p:cNvPr id="4" name="Content Placeholder 3">
@@ -14931,7 +14988,13 @@
                       <a:rPr lang="en-US" sz="2800" i="1">
                         <a:latin typeface="Cambria Math"/>
                       </a:rPr>
-                      <m:t>=129</m:t>
+                      <m:t>=</m:t>
+                    </m:r>
+                    <m:r>
+                      <a:rPr lang="en-US" sz="2800" i="1">
+                        <a:latin typeface="Cambria Math"/>
+                      </a:rPr>
+                      <m:t>129</m:t>
                     </m:r>
                   </m:oMath>
                 </a14:m>
@@ -14957,7 +15020,13 @@
                           <a:rPr lang="en-US" sz="2800" i="1">
                             <a:latin typeface="Cambria Math"/>
                           </a:rPr>
-                          <m:t>0.</m:t>
+                          <m:t>0</m:t>
+                        </m:r>
+                        <m:r>
+                          <a:rPr lang="en-US" sz="2800" i="1">
+                            <a:latin typeface="Cambria Math"/>
+                          </a:rPr>
+                          <m:t>.</m:t>
                         </m:r>
                         <m:r>
                           <a:rPr lang="en-US" sz="2800" b="0" i="1" smtClean="0">
@@ -15017,7 +15086,13 @@
                           <a:rPr lang="en-US" sz="2800" i="1">
                             <a:latin typeface="Cambria Math"/>
                           </a:rPr>
-                          <m:t>−1</m:t>
+                          <m:t>−</m:t>
+                        </m:r>
+                        <m:r>
+                          <a:rPr lang="en-US" sz="2800" i="1">
+                            <a:latin typeface="Cambria Math"/>
+                          </a:rPr>
+                          <m:t>1</m:t>
                         </m:r>
                       </m:sup>
                     </m:sSup>
@@ -15060,7 +15135,13 @@
                           <a:rPr lang="en-US" sz="2800" i="1">
                             <a:latin typeface="Cambria Math"/>
                           </a:rPr>
-                          <m:t>−2</m:t>
+                          <m:t>−</m:t>
+                        </m:r>
+                        <m:r>
+                          <a:rPr lang="en-US" sz="2800" i="1">
+                            <a:latin typeface="Cambria Math"/>
+                          </a:rPr>
+                          <m:t>2</m:t>
                         </m:r>
                       </m:sup>
                     </m:sSup>
@@ -15068,7 +15149,19 @@
                       <a:rPr lang="en-US" sz="2800" i="1">
                         <a:latin typeface="Cambria Math"/>
                       </a:rPr>
-                      <m:t>+1×</m:t>
+                      <m:t>+</m:t>
+                    </m:r>
+                    <m:r>
+                      <a:rPr lang="en-US" sz="2800" i="1">
+                        <a:latin typeface="Cambria Math"/>
+                      </a:rPr>
+                      <m:t>1</m:t>
+                    </m:r>
+                    <m:r>
+                      <a:rPr lang="en-US" sz="2800" i="1">
+                        <a:latin typeface="Cambria Math"/>
+                      </a:rPr>
+                      <m:t>×</m:t>
                     </m:r>
                     <m:sSup>
                       <m:sSupPr>
@@ -15091,7 +15184,13 @@
                           <a:rPr lang="en-US" sz="2800" i="1">
                             <a:latin typeface="Cambria Math"/>
                           </a:rPr>
-                          <m:t>−3</m:t>
+                          <m:t>−</m:t>
+                        </m:r>
+                        <m:r>
+                          <a:rPr lang="en-US" sz="2800" i="1">
+                            <a:latin typeface="Cambria Math"/>
+                          </a:rPr>
+                          <m:t>3</m:t>
                         </m:r>
                       </m:sup>
                     </m:sSup>
@@ -15105,7 +15204,13 @@
                       <a:rPr lang="en-US" sz="2800" i="1">
                         <a:latin typeface="Cambria Math"/>
                       </a:rPr>
-                      <m:t>0.</m:t>
+                      <m:t>0</m:t>
+                    </m:r>
+                    <m:r>
+                      <a:rPr lang="en-US" sz="2800" i="1">
+                        <a:latin typeface="Cambria Math"/>
+                      </a:rPr>
+                      <m:t>.</m:t>
                     </m:r>
                     <m:r>
                       <a:rPr lang="en-US" sz="2800" b="0" i="1" smtClean="0">
@@ -15157,7 +15262,13 @@
                               <a:rPr lang="en-US" sz="2800" i="1">
                                 <a:latin typeface="Cambria Math"/>
                               </a:rPr>
-                              <m:t>−1</m:t>
+                              <m:t>−</m:t>
+                            </m:r>
+                            <m:r>
+                              <a:rPr lang="en-US" sz="2800" i="1">
+                                <a:latin typeface="Cambria Math"/>
+                              </a:rPr>
+                              <m:t>1</m:t>
                             </m:r>
                           </m:e>
                         </m:d>
@@ -15190,7 +15301,13 @@
                           <a:rPr lang="en-US" sz="2800" i="1">
                             <a:latin typeface="Cambria Math"/>
                           </a:rPr>
-                          <m:t>1+</m:t>
+                          <m:t>1</m:t>
+                        </m:r>
+                        <m:r>
+                          <a:rPr lang="en-US" sz="2800" i="1">
+                            <a:latin typeface="Cambria Math"/>
+                          </a:rPr>
+                          <m:t>+</m:t>
                         </m:r>
                         <m:r>
                           <a:rPr lang="en-US" sz="2800" i="1">
@@ -15233,7 +15350,13 @@
                           <a:rPr lang="en-US" sz="2800" i="1">
                             <a:latin typeface="Cambria Math"/>
                           </a:rPr>
-                          <m:t>−127</m:t>
+                          <m:t>−</m:t>
+                        </m:r>
+                        <m:r>
+                          <a:rPr lang="en-US" sz="2800" i="1">
+                            <a:latin typeface="Cambria Math"/>
+                          </a:rPr>
+                          <m:t>127</m:t>
                         </m:r>
                       </m:sup>
                     </m:sSup>
@@ -15284,7 +15407,13 @@
                                 <a:rPr lang="en-US" sz="2800" i="1">
                                   <a:latin typeface="Cambria Math"/>
                                 </a:rPr>
-                                <m:t>−1</m:t>
+                                <m:t>−</m:t>
+                              </m:r>
+                              <m:r>
+                                <a:rPr lang="en-US" sz="2800" i="1">
+                                  <a:latin typeface="Cambria Math"/>
+                                </a:rPr>
+                                <m:t>1</m:t>
                               </m:r>
                             </m:e>
                           </m:d>
@@ -15317,7 +15446,25 @@
                             <a:rPr lang="en-US" sz="2800" i="1">
                               <a:latin typeface="Cambria Math"/>
                             </a:rPr>
-                            <m:t>1+0.</m:t>
+                            <m:t>1</m:t>
+                          </m:r>
+                          <m:r>
+                            <a:rPr lang="en-US" sz="2800" i="1">
+                              <a:latin typeface="Cambria Math"/>
+                            </a:rPr>
+                            <m:t>+</m:t>
+                          </m:r>
+                          <m:r>
+                            <a:rPr lang="en-US" sz="2800" i="1">
+                              <a:latin typeface="Cambria Math"/>
+                            </a:rPr>
+                            <m:t>0</m:t>
+                          </m:r>
+                          <m:r>
+                            <a:rPr lang="en-US" sz="2800" i="1">
+                              <a:latin typeface="Cambria Math"/>
+                            </a:rPr>
+                            <m:t>.</m:t>
                           </m:r>
                           <m:r>
                             <a:rPr lang="en-US" sz="2800" b="0" i="1" smtClean="0">
@@ -15366,7 +15513,13 @@
                             <a:rPr lang="en-US" sz="2800" i="1">
                               <a:latin typeface="Cambria Math"/>
                             </a:rPr>
-                            <m:t>−127</m:t>
+                            <m:t>−</m:t>
+                          </m:r>
+                          <m:r>
+                            <a:rPr lang="en-US" sz="2800" i="1">
+                              <a:latin typeface="Cambria Math"/>
+                            </a:rPr>
+                            <m:t>127</m:t>
                           </m:r>
                         </m:sup>
                       </m:sSup>
@@ -15385,7 +15538,25 @@
                         <a:rPr lang="en-US" sz="2800" i="1">
                           <a:latin typeface="Cambria Math"/>
                         </a:rPr>
-                        <m:t>−1×1.</m:t>
+                        <m:t>1</m:t>
+                      </m:r>
+                      <m:r>
+                        <a:rPr lang="en-US" sz="2800" i="1">
+                          <a:latin typeface="Cambria Math"/>
+                        </a:rPr>
+                        <m:t>×</m:t>
+                      </m:r>
+                      <m:r>
+                        <a:rPr lang="en-US" sz="2800" i="1">
+                          <a:latin typeface="Cambria Math"/>
+                        </a:rPr>
+                        <m:t>1</m:t>
+                      </m:r>
+                      <m:r>
+                        <a:rPr lang="en-US" sz="2800" i="1">
+                          <a:latin typeface="Cambria Math"/>
+                        </a:rPr>
+                        <m:t>.</m:t>
                       </m:r>
                       <m:r>
                         <a:rPr lang="en-US" sz="2800" b="0" i="1" smtClean="0">
@@ -15439,7 +15610,19 @@
                         <a:rPr lang="en-US" sz="2800" b="0" i="1" smtClean="0">
                           <a:latin typeface="Cambria Math" panose="02040503050406030204" pitchFamily="18" charset="0"/>
                         </a:rPr>
-                        <m:t>4.5</m:t>
+                        <m:t>4</m:t>
+                      </m:r>
+                      <m:r>
+                        <a:rPr lang="en-US" sz="2800" b="0" i="1" smtClean="0">
+                          <a:latin typeface="Cambria Math" panose="02040503050406030204" pitchFamily="18" charset="0"/>
+                        </a:rPr>
+                        <m:t>.</m:t>
+                      </m:r>
+                      <m:r>
+                        <a:rPr lang="en-US" sz="2800" b="0" i="1" smtClean="0">
+                          <a:latin typeface="Cambria Math" panose="02040503050406030204" pitchFamily="18" charset="0"/>
+                        </a:rPr>
+                        <m:t>5</m:t>
                       </m:r>
                     </m:oMath>
                   </m:oMathPara>
@@ -15470,7 +15653,7 @@
             </p:txBody>
           </p:sp>
         </mc:Choice>
-        <mc:Fallback xmlns="">
+        <mc:Fallback>
           <p:sp>
             <p:nvSpPr>
               <p:cNvPr id="4" name="Content Placeholder 3">
@@ -15732,7 +15915,13 @@
                       <a:rPr lang="en-US" sz="2800" i="1">
                         <a:latin typeface="Cambria Math"/>
                       </a:rPr>
-                      <m:t>=127</m:t>
+                      <m:t>=</m:t>
+                    </m:r>
+                    <m:r>
+                      <a:rPr lang="en-US" sz="2800" i="1">
+                        <a:latin typeface="Cambria Math"/>
+                      </a:rPr>
+                      <m:t>127</m:t>
                     </m:r>
                   </m:oMath>
                 </a14:m>
@@ -15795,7 +15984,13 @@
                               <a:rPr lang="en-US" sz="2800" i="1">
                                 <a:latin typeface="Cambria Math"/>
                               </a:rPr>
-                              <m:t>−1</m:t>
+                              <m:t>−</m:t>
+                            </m:r>
+                            <m:r>
+                              <a:rPr lang="en-US" sz="2800" i="1">
+                                <a:latin typeface="Cambria Math"/>
+                              </a:rPr>
+                              <m:t>1</m:t>
                             </m:r>
                           </m:e>
                         </m:d>
@@ -15828,7 +16023,13 @@
                           <a:rPr lang="en-US" sz="2800" i="1">
                             <a:latin typeface="Cambria Math"/>
                           </a:rPr>
-                          <m:t>1+</m:t>
+                          <m:t>1</m:t>
+                        </m:r>
+                        <m:r>
+                          <a:rPr lang="en-US" sz="2800" i="1">
+                            <a:latin typeface="Cambria Math"/>
+                          </a:rPr>
+                          <m:t>+</m:t>
                         </m:r>
                         <m:r>
                           <a:rPr lang="en-US" sz="2800" i="1">
@@ -15871,7 +16072,13 @@
                           <a:rPr lang="en-US" sz="2800" i="1">
                             <a:latin typeface="Cambria Math"/>
                           </a:rPr>
-                          <m:t>−127</m:t>
+                          <m:t>−</m:t>
+                        </m:r>
+                        <m:r>
+                          <a:rPr lang="en-US" sz="2800" i="1">
+                            <a:latin typeface="Cambria Math"/>
+                          </a:rPr>
+                          <m:t>127</m:t>
                         </m:r>
                       </m:sup>
                     </m:sSup>
@@ -15922,7 +16129,13 @@
                                 <a:rPr lang="en-US" sz="2800" i="1">
                                   <a:latin typeface="Cambria Math"/>
                                 </a:rPr>
-                                <m:t>−1</m:t>
+                                <m:t>−</m:t>
+                              </m:r>
+                              <m:r>
+                                <a:rPr lang="en-US" sz="2800" i="1">
+                                  <a:latin typeface="Cambria Math"/>
+                                </a:rPr>
+                                <m:t>1</m:t>
                               </m:r>
                             </m:e>
                           </m:d>
@@ -15961,7 +16174,13 @@
                             <a:rPr lang="en-US" sz="2800" b="0" i="1" smtClean="0">
                               <a:latin typeface="Cambria Math" panose="02040503050406030204" pitchFamily="18" charset="0"/>
                             </a:rPr>
-                            <m:t>+0</m:t>
+                            <m:t>+</m:t>
+                          </m:r>
+                          <m:r>
+                            <a:rPr lang="en-US" sz="2800" b="0" i="1" smtClean="0">
+                              <a:latin typeface="Cambria Math" panose="02040503050406030204" pitchFamily="18" charset="0"/>
+                            </a:rPr>
+                            <m:t>0</m:t>
                           </m:r>
                         </m:e>
                       </m:d>
@@ -16004,7 +16223,13 @@
                             <a:rPr lang="en-US" sz="2800" i="1">
                               <a:latin typeface="Cambria Math"/>
                             </a:rPr>
-                            <m:t>−127</m:t>
+                            <m:t>−</m:t>
+                          </m:r>
+                          <m:r>
+                            <a:rPr lang="en-US" sz="2800" i="1">
+                              <a:latin typeface="Cambria Math"/>
+                            </a:rPr>
+                            <m:t>127</m:t>
                           </m:r>
                         </m:sup>
                       </m:sSup>
@@ -16023,7 +16248,31 @@
                         <a:rPr lang="en-US" sz="2800" i="1">
                           <a:latin typeface="Cambria Math"/>
                         </a:rPr>
-                        <m:t>−1×1×</m:t>
+                        <m:t>−</m:t>
+                      </m:r>
+                      <m:r>
+                        <a:rPr lang="en-US" sz="2800" i="1">
+                          <a:latin typeface="Cambria Math"/>
+                        </a:rPr>
+                        <m:t>1</m:t>
+                      </m:r>
+                      <m:r>
+                        <a:rPr lang="en-US" sz="2800" i="1">
+                          <a:latin typeface="Cambria Math"/>
+                        </a:rPr>
+                        <m:t>×</m:t>
+                      </m:r>
+                      <m:r>
+                        <a:rPr lang="en-US" sz="2800" i="1">
+                          <a:latin typeface="Cambria Math"/>
+                        </a:rPr>
+                        <m:t>1</m:t>
+                      </m:r>
+                      <m:r>
+                        <a:rPr lang="en-US" sz="2800" i="1">
+                          <a:latin typeface="Cambria Math"/>
+                        </a:rPr>
+                        <m:t>×</m:t>
                       </m:r>
                       <m:sSup>
                         <m:sSupPr>
@@ -16065,7 +16314,19 @@
                         <a:rPr lang="en-US" sz="2800" b="0" i="1" smtClean="0">
                           <a:latin typeface="Cambria Math" panose="02040503050406030204" pitchFamily="18" charset="0"/>
                         </a:rPr>
-                        <m:t>1.0</m:t>
+                        <m:t>1</m:t>
+                      </m:r>
+                      <m:r>
+                        <a:rPr lang="en-US" sz="2800" b="0" i="1" smtClean="0">
+                          <a:latin typeface="Cambria Math" panose="02040503050406030204" pitchFamily="18" charset="0"/>
+                        </a:rPr>
+                        <m:t>.</m:t>
+                      </m:r>
+                      <m:r>
+                        <a:rPr lang="en-US" sz="2800" b="0" i="1" smtClean="0">
+                          <a:latin typeface="Cambria Math" panose="02040503050406030204" pitchFamily="18" charset="0"/>
+                        </a:rPr>
+                        <m:t>0</m:t>
                       </m:r>
                     </m:oMath>
                   </m:oMathPara>
@@ -17221,7 +17482,19 @@
                       <a:rPr lang="en-US" i="1" smtClean="0">
                         <a:latin typeface="Cambria Math"/>
                       </a:rPr>
-                      <m:t>14.5</m:t>
+                      <m:t>14</m:t>
+                    </m:r>
+                    <m:r>
+                      <a:rPr lang="en-US" i="1" smtClean="0">
+                        <a:latin typeface="Cambria Math"/>
+                      </a:rPr>
+                      <m:t>.</m:t>
+                    </m:r>
+                    <m:r>
+                      <a:rPr lang="en-US" i="1" smtClean="0">
+                        <a:latin typeface="Cambria Math"/>
+                      </a:rPr>
+                      <m:t>5</m:t>
                     </m:r>
                     <m:r>
                       <a:rPr lang="en-US" b="0" i="1" smtClean="0">
@@ -17273,7 +17546,19 @@
                           <a:rPr lang="en-US" i="1">
                             <a:latin typeface="Cambria Math"/>
                           </a:rPr>
-                          <m:t>14.5</m:t>
+                          <m:t>14</m:t>
+                        </m:r>
+                        <m:r>
+                          <a:rPr lang="en-US" i="1">
+                            <a:latin typeface="Cambria Math"/>
+                          </a:rPr>
+                          <m:t>.</m:t>
+                        </m:r>
+                        <m:r>
+                          <a:rPr lang="en-US" i="1">
+                            <a:latin typeface="Cambria Math"/>
+                          </a:rPr>
+                          <m:t>5</m:t>
                         </m:r>
                       </m:num>
                       <m:den>
@@ -17308,7 +17593,25 @@
                       <a:rPr lang="en-US" b="0" i="1" smtClean="0">
                         <a:latin typeface="Cambria Math" panose="02040503050406030204" pitchFamily="18" charset="0"/>
                       </a:rPr>
-                      <m:t>=1.8125</m:t>
+                      <m:t>=</m:t>
+                    </m:r>
+                    <m:r>
+                      <a:rPr lang="en-US" b="0" i="1" smtClean="0">
+                        <a:latin typeface="Cambria Math" panose="02040503050406030204" pitchFamily="18" charset="0"/>
+                      </a:rPr>
+                      <m:t>1</m:t>
+                    </m:r>
+                    <m:r>
+                      <a:rPr lang="en-US" b="0" i="1" smtClean="0">
+                        <a:latin typeface="Cambria Math" panose="02040503050406030204" pitchFamily="18" charset="0"/>
+                      </a:rPr>
+                      <m:t>.</m:t>
+                    </m:r>
+                    <m:r>
+                      <a:rPr lang="en-US" b="0" i="1" smtClean="0">
+                        <a:latin typeface="Cambria Math" panose="02040503050406030204" pitchFamily="18" charset="0"/>
+                      </a:rPr>
+                      <m:t>8125</m:t>
                     </m:r>
                   </m:oMath>
                 </a14:m>
@@ -17327,7 +17630,49 @@
                       <a:rPr lang="en-US" i="1">
                         <a:latin typeface="Cambria Math"/>
                       </a:rPr>
-                      <m:t>14.5=1.8125×</m:t>
+                      <m:t>14</m:t>
+                    </m:r>
+                    <m:r>
+                      <a:rPr lang="en-US" i="1">
+                        <a:latin typeface="Cambria Math"/>
+                      </a:rPr>
+                      <m:t>.</m:t>
+                    </m:r>
+                    <m:r>
+                      <a:rPr lang="en-US" i="1">
+                        <a:latin typeface="Cambria Math"/>
+                      </a:rPr>
+                      <m:t>5</m:t>
+                    </m:r>
+                    <m:r>
+                      <a:rPr lang="en-US" i="1">
+                        <a:latin typeface="Cambria Math"/>
+                      </a:rPr>
+                      <m:t>=</m:t>
+                    </m:r>
+                    <m:r>
+                      <a:rPr lang="en-US" i="1">
+                        <a:latin typeface="Cambria Math"/>
+                      </a:rPr>
+                      <m:t>1</m:t>
+                    </m:r>
+                    <m:r>
+                      <a:rPr lang="en-US" i="1">
+                        <a:latin typeface="Cambria Math"/>
+                      </a:rPr>
+                      <m:t>.</m:t>
+                    </m:r>
+                    <m:r>
+                      <a:rPr lang="en-US" i="1">
+                        <a:latin typeface="Cambria Math"/>
+                      </a:rPr>
+                      <m:t>8125</m:t>
+                    </m:r>
+                    <m:r>
+                      <a:rPr lang="en-US" i="1">
+                        <a:latin typeface="Cambria Math"/>
+                      </a:rPr>
+                      <m:t>×</m:t>
                     </m:r>
                     <m:sSup>
                       <m:sSupPr>
@@ -17367,7 +17712,43 @@
                       <a:rPr lang="en-US" i="1">
                         <a:latin typeface="Cambria Math"/>
                       </a:rPr>
-                      <m:t>(1+0.8125)×</m:t>
+                      <m:t>(</m:t>
+                    </m:r>
+                    <m:r>
+                      <a:rPr lang="en-US" i="1">
+                        <a:latin typeface="Cambria Math"/>
+                      </a:rPr>
+                      <m:t>1</m:t>
+                    </m:r>
+                    <m:r>
+                      <a:rPr lang="en-US" i="1">
+                        <a:latin typeface="Cambria Math"/>
+                      </a:rPr>
+                      <m:t>+</m:t>
+                    </m:r>
+                    <m:r>
+                      <a:rPr lang="en-US" i="1">
+                        <a:latin typeface="Cambria Math"/>
+                      </a:rPr>
+                      <m:t>0</m:t>
+                    </m:r>
+                    <m:r>
+                      <a:rPr lang="en-US" i="1">
+                        <a:latin typeface="Cambria Math"/>
+                      </a:rPr>
+                      <m:t>.</m:t>
+                    </m:r>
+                    <m:r>
+                      <a:rPr lang="en-US" i="1">
+                        <a:latin typeface="Cambria Math"/>
+                      </a:rPr>
+                      <m:t>8125</m:t>
+                    </m:r>
+                    <m:r>
+                      <a:rPr lang="en-US" i="1">
+                        <a:latin typeface="Cambria Math"/>
+                      </a:rPr>
+                      <m:t>)×</m:t>
                     </m:r>
                     <m:sSup>
                       <m:sSupPr>
@@ -17417,7 +17798,13 @@
                       <a:rPr lang="en-US" b="0" i="1" smtClean="0">
                         <a:latin typeface="Cambria Math"/>
                       </a:rPr>
-                      <m:t>=0</m:t>
+                      <m:t>=</m:t>
+                    </m:r>
+                    <m:r>
+                      <a:rPr lang="en-US" b="0" i="1" smtClean="0">
+                        <a:latin typeface="Cambria Math"/>
+                      </a:rPr>
+                      <m:t>0</m:t>
                     </m:r>
                   </m:oMath>
                 </a14:m>
@@ -17450,7 +17837,37 @@
                       <a:rPr lang="en-US" i="1">
                         <a:latin typeface="Cambria Math"/>
                       </a:rPr>
-                      <m:t>3+127=130=</m:t>
+                      <m:t>3</m:t>
+                    </m:r>
+                    <m:r>
+                      <a:rPr lang="en-US" i="1">
+                        <a:latin typeface="Cambria Math"/>
+                      </a:rPr>
+                      <m:t>+</m:t>
+                    </m:r>
+                    <m:r>
+                      <a:rPr lang="en-US" i="1">
+                        <a:latin typeface="Cambria Math"/>
+                      </a:rPr>
+                      <m:t>127</m:t>
+                    </m:r>
+                    <m:r>
+                      <a:rPr lang="en-US" i="1">
+                        <a:latin typeface="Cambria Math"/>
+                      </a:rPr>
+                      <m:t>=</m:t>
+                    </m:r>
+                    <m:r>
+                      <a:rPr lang="en-US" i="1">
+                        <a:latin typeface="Cambria Math"/>
+                      </a:rPr>
+                      <m:t>130</m:t>
+                    </m:r>
+                    <m:r>
+                      <a:rPr lang="en-US" i="1">
+                        <a:latin typeface="Cambria Math"/>
+                      </a:rPr>
+                      <m:t>=</m:t>
                     </m:r>
                     <m:sSub>
                       <m:sSubPr>
@@ -17512,7 +17929,13 @@
                           <a:rPr lang="en-US" b="0" i="1" smtClean="0">
                             <a:latin typeface="Cambria Math"/>
                           </a:rPr>
-                          <m:t>0.</m:t>
+                          <m:t>0</m:t>
+                        </m:r>
+                        <m:r>
+                          <a:rPr lang="en-US" b="0" i="1" smtClean="0">
+                            <a:latin typeface="Cambria Math"/>
+                          </a:rPr>
+                          <m:t>.</m:t>
                         </m:r>
                         <m:r>
                           <a:rPr lang="en-US" b="0" i="1" smtClean="0">
@@ -17598,7 +18021,13 @@
                           <a:rPr lang="en-US" sz="2400" i="1">
                             <a:latin typeface="Cambria Math"/>
                           </a:rPr>
-                          <m:t>−1</m:t>
+                          <m:t>−</m:t>
+                        </m:r>
+                        <m:r>
+                          <a:rPr lang="en-US" sz="2400" i="1">
+                            <a:latin typeface="Cambria Math"/>
+                          </a:rPr>
+                          <m:t>1</m:t>
                         </m:r>
                       </m:sup>
                     </m:sSup>
@@ -17618,7 +18047,13 @@
                       <a:rPr lang="en-US" sz="2400" b="0" i="1" smtClean="0">
                         <a:latin typeface="Cambria Math" panose="02040503050406030204" pitchFamily="18" charset="0"/>
                       </a:rPr>
-                      <m:t>2×</m:t>
+                      <m:t>2</m:t>
+                    </m:r>
+                    <m:r>
+                      <a:rPr lang="en-US" sz="2400" b="0" i="1" smtClean="0">
+                        <a:latin typeface="Cambria Math" panose="02040503050406030204" pitchFamily="18" charset="0"/>
+                      </a:rPr>
+                      <m:t>×</m:t>
                     </m:r>
                     <m:sSup>
                       <m:sSupPr>
@@ -17641,7 +18076,13 @@
                           <a:rPr lang="en-US" sz="2400" i="1">
                             <a:latin typeface="Cambria Math"/>
                           </a:rPr>
-                          <m:t>−2</m:t>
+                          <m:t>−</m:t>
+                        </m:r>
+                        <m:r>
+                          <a:rPr lang="en-US" sz="2400" i="1">
+                            <a:latin typeface="Cambria Math"/>
+                          </a:rPr>
+                          <m:t>2</m:t>
                         </m:r>
                       </m:sup>
                     </m:sSup>
@@ -17661,7 +18102,13 @@
                       <a:rPr lang="en-US" sz="2400" b="0" i="1" smtClean="0">
                         <a:latin typeface="Cambria Math" panose="02040503050406030204" pitchFamily="18" charset="0"/>
                       </a:rPr>
-                      <m:t>3×</m:t>
+                      <m:t>3</m:t>
+                    </m:r>
+                    <m:r>
+                      <a:rPr lang="en-US" sz="2400" b="0" i="1" smtClean="0">
+                        <a:latin typeface="Cambria Math" panose="02040503050406030204" pitchFamily="18" charset="0"/>
+                      </a:rPr>
+                      <m:t>×</m:t>
                     </m:r>
                     <m:sSup>
                       <m:sSupPr>
@@ -17684,7 +18131,13 @@
                           <a:rPr lang="en-US" sz="2400" i="1">
                             <a:latin typeface="Cambria Math"/>
                           </a:rPr>
-                          <m:t>−3</m:t>
+                          <m:t>−</m:t>
+                        </m:r>
+                        <m:r>
+                          <a:rPr lang="en-US" sz="2400" i="1">
+                            <a:latin typeface="Cambria Math"/>
+                          </a:rPr>
+                          <m:t>3</m:t>
                         </m:r>
                       </m:sup>
                     </m:sSup>
@@ -17704,7 +18157,13 @@
                       <a:rPr lang="en-US" sz="2400" b="0" i="1" smtClean="0">
                         <a:latin typeface="Cambria Math" panose="02040503050406030204" pitchFamily="18" charset="0"/>
                       </a:rPr>
-                      <m:t>4×</m:t>
+                      <m:t>4</m:t>
+                    </m:r>
+                    <m:r>
+                      <a:rPr lang="en-US" sz="2400" b="0" i="1" smtClean="0">
+                        <a:latin typeface="Cambria Math" panose="02040503050406030204" pitchFamily="18" charset="0"/>
+                      </a:rPr>
+                      <m:t>×</m:t>
                     </m:r>
                     <m:sSup>
                       <m:sSupPr>
@@ -17727,7 +18186,13 @@
                           <a:rPr lang="en-US" sz="2400" i="1">
                             <a:latin typeface="Cambria Math"/>
                           </a:rPr>
-                          <m:t>−4</m:t>
+                          <m:t>−</m:t>
+                        </m:r>
+                        <m:r>
+                          <a:rPr lang="en-US" sz="2400" i="1">
+                            <a:latin typeface="Cambria Math"/>
+                          </a:rPr>
+                          <m:t>4</m:t>
                         </m:r>
                       </m:sup>
                     </m:sSup>
@@ -17749,7 +18214,91 @@
                       <a:rPr lang="en-US" i="1">
                         <a:latin typeface="Cambria Math"/>
                       </a:rPr>
-                      <m:t>0.8125×2=1.625=1+0.625</m:t>
+                      <m:t>0</m:t>
+                    </m:r>
+                    <m:r>
+                      <a:rPr lang="en-US" i="1">
+                        <a:latin typeface="Cambria Math"/>
+                      </a:rPr>
+                      <m:t>.</m:t>
+                    </m:r>
+                    <m:r>
+                      <a:rPr lang="en-US" i="1">
+                        <a:latin typeface="Cambria Math"/>
+                      </a:rPr>
+                      <m:t>8125</m:t>
+                    </m:r>
+                    <m:r>
+                      <a:rPr lang="en-US" i="1">
+                        <a:latin typeface="Cambria Math"/>
+                      </a:rPr>
+                      <m:t>×</m:t>
+                    </m:r>
+                    <m:r>
+                      <a:rPr lang="en-US" i="1">
+                        <a:latin typeface="Cambria Math"/>
+                      </a:rPr>
+                      <m:t>2</m:t>
+                    </m:r>
+                    <m:r>
+                      <a:rPr lang="en-US" i="1">
+                        <a:latin typeface="Cambria Math"/>
+                      </a:rPr>
+                      <m:t>=</m:t>
+                    </m:r>
+                    <m:r>
+                      <a:rPr lang="en-US" i="1">
+                        <a:latin typeface="Cambria Math"/>
+                      </a:rPr>
+                      <m:t>1</m:t>
+                    </m:r>
+                    <m:r>
+                      <a:rPr lang="en-US" i="1">
+                        <a:latin typeface="Cambria Math"/>
+                      </a:rPr>
+                      <m:t>.</m:t>
+                    </m:r>
+                    <m:r>
+                      <a:rPr lang="en-US" i="1">
+                        <a:latin typeface="Cambria Math"/>
+                      </a:rPr>
+                      <m:t>625</m:t>
+                    </m:r>
+                    <m:r>
+                      <a:rPr lang="en-US" i="1">
+                        <a:latin typeface="Cambria Math"/>
+                      </a:rPr>
+                      <m:t>=</m:t>
+                    </m:r>
+                    <m:r>
+                      <a:rPr lang="en-US" i="1">
+                        <a:latin typeface="Cambria Math"/>
+                      </a:rPr>
+                      <m:t>1</m:t>
+                    </m:r>
+                    <m:r>
+                      <a:rPr lang="en-US" i="1">
+                        <a:latin typeface="Cambria Math"/>
+                      </a:rPr>
+                      <m:t>+</m:t>
+                    </m:r>
+                    <m:r>
+                      <a:rPr lang="en-US" i="1">
+                        <a:latin typeface="Cambria Math"/>
+                      </a:rPr>
+                      <m:t>0</m:t>
+                    </m:r>
+                    <m:r>
+                      <a:rPr lang="en-US" i="1">
+                        <a:latin typeface="Cambria Math"/>
+                      </a:rPr>
+                      <m:t>.</m:t>
+                    </m:r>
+                    <m:r>
+                      <a:rPr lang="en-US" i="1">
+                        <a:latin typeface="Cambria Math"/>
+                      </a:rPr>
+                      <m:t>625</m:t>
                     </m:r>
                   </m:oMath>
                 </a14:m>
@@ -17766,7 +18315,91 @@
                       <a:rPr lang="en-US" i="1">
                         <a:latin typeface="Cambria Math"/>
                       </a:rPr>
-                      <m:t>0.625×2=1.25=1+0.25</m:t>
+                      <m:t>0</m:t>
+                    </m:r>
+                    <m:r>
+                      <a:rPr lang="en-US" i="1">
+                        <a:latin typeface="Cambria Math"/>
+                      </a:rPr>
+                      <m:t>.</m:t>
+                    </m:r>
+                    <m:r>
+                      <a:rPr lang="en-US" i="1">
+                        <a:latin typeface="Cambria Math"/>
+                      </a:rPr>
+                      <m:t>625</m:t>
+                    </m:r>
+                    <m:r>
+                      <a:rPr lang="en-US" i="1">
+                        <a:latin typeface="Cambria Math"/>
+                      </a:rPr>
+                      <m:t>×</m:t>
+                    </m:r>
+                    <m:r>
+                      <a:rPr lang="en-US" i="1">
+                        <a:latin typeface="Cambria Math"/>
+                      </a:rPr>
+                      <m:t>2</m:t>
+                    </m:r>
+                    <m:r>
+                      <a:rPr lang="en-US" i="1">
+                        <a:latin typeface="Cambria Math"/>
+                      </a:rPr>
+                      <m:t>=</m:t>
+                    </m:r>
+                    <m:r>
+                      <a:rPr lang="en-US" i="1">
+                        <a:latin typeface="Cambria Math"/>
+                      </a:rPr>
+                      <m:t>1</m:t>
+                    </m:r>
+                    <m:r>
+                      <a:rPr lang="en-US" i="1">
+                        <a:latin typeface="Cambria Math"/>
+                      </a:rPr>
+                      <m:t>.</m:t>
+                    </m:r>
+                    <m:r>
+                      <a:rPr lang="en-US" i="1">
+                        <a:latin typeface="Cambria Math"/>
+                      </a:rPr>
+                      <m:t>25</m:t>
+                    </m:r>
+                    <m:r>
+                      <a:rPr lang="en-US" i="1">
+                        <a:latin typeface="Cambria Math"/>
+                      </a:rPr>
+                      <m:t>=</m:t>
+                    </m:r>
+                    <m:r>
+                      <a:rPr lang="en-US" i="1">
+                        <a:latin typeface="Cambria Math"/>
+                      </a:rPr>
+                      <m:t>1</m:t>
+                    </m:r>
+                    <m:r>
+                      <a:rPr lang="en-US" i="1">
+                        <a:latin typeface="Cambria Math"/>
+                      </a:rPr>
+                      <m:t>+</m:t>
+                    </m:r>
+                    <m:r>
+                      <a:rPr lang="en-US" i="1">
+                        <a:latin typeface="Cambria Math"/>
+                      </a:rPr>
+                      <m:t>0</m:t>
+                    </m:r>
+                    <m:r>
+                      <a:rPr lang="en-US" i="1">
+                        <a:latin typeface="Cambria Math"/>
+                      </a:rPr>
+                      <m:t>.</m:t>
+                    </m:r>
+                    <m:r>
+                      <a:rPr lang="en-US" i="1">
+                        <a:latin typeface="Cambria Math"/>
+                      </a:rPr>
+                      <m:t>25</m:t>
                     </m:r>
                   </m:oMath>
                 </a14:m>
@@ -17783,7 +18416,91 @@
                       <a:rPr lang="en-US" i="1">
                         <a:latin typeface="Cambria Math"/>
                       </a:rPr>
-                      <m:t>0.25×2=0.5=0+0.5</m:t>
+                      <m:t>0</m:t>
+                    </m:r>
+                    <m:r>
+                      <a:rPr lang="en-US" i="1">
+                        <a:latin typeface="Cambria Math"/>
+                      </a:rPr>
+                      <m:t>.</m:t>
+                    </m:r>
+                    <m:r>
+                      <a:rPr lang="en-US" i="1">
+                        <a:latin typeface="Cambria Math"/>
+                      </a:rPr>
+                      <m:t>25</m:t>
+                    </m:r>
+                    <m:r>
+                      <a:rPr lang="en-US" i="1">
+                        <a:latin typeface="Cambria Math"/>
+                      </a:rPr>
+                      <m:t>×</m:t>
+                    </m:r>
+                    <m:r>
+                      <a:rPr lang="en-US" i="1">
+                        <a:latin typeface="Cambria Math"/>
+                      </a:rPr>
+                      <m:t>2</m:t>
+                    </m:r>
+                    <m:r>
+                      <a:rPr lang="en-US" i="1">
+                        <a:latin typeface="Cambria Math"/>
+                      </a:rPr>
+                      <m:t>=</m:t>
+                    </m:r>
+                    <m:r>
+                      <a:rPr lang="en-US" i="1">
+                        <a:latin typeface="Cambria Math"/>
+                      </a:rPr>
+                      <m:t>0</m:t>
+                    </m:r>
+                    <m:r>
+                      <a:rPr lang="en-US" i="1">
+                        <a:latin typeface="Cambria Math"/>
+                      </a:rPr>
+                      <m:t>.</m:t>
+                    </m:r>
+                    <m:r>
+                      <a:rPr lang="en-US" i="1">
+                        <a:latin typeface="Cambria Math"/>
+                      </a:rPr>
+                      <m:t>5</m:t>
+                    </m:r>
+                    <m:r>
+                      <a:rPr lang="en-US" i="1">
+                        <a:latin typeface="Cambria Math"/>
+                      </a:rPr>
+                      <m:t>=</m:t>
+                    </m:r>
+                    <m:r>
+                      <a:rPr lang="en-US" i="1">
+                        <a:latin typeface="Cambria Math"/>
+                      </a:rPr>
+                      <m:t>0</m:t>
+                    </m:r>
+                    <m:r>
+                      <a:rPr lang="en-US" i="1">
+                        <a:latin typeface="Cambria Math"/>
+                      </a:rPr>
+                      <m:t>+</m:t>
+                    </m:r>
+                    <m:r>
+                      <a:rPr lang="en-US" i="1">
+                        <a:latin typeface="Cambria Math"/>
+                      </a:rPr>
+                      <m:t>0</m:t>
+                    </m:r>
+                    <m:r>
+                      <a:rPr lang="en-US" i="1">
+                        <a:latin typeface="Cambria Math"/>
+                      </a:rPr>
+                      <m:t>.</m:t>
+                    </m:r>
+                    <m:r>
+                      <a:rPr lang="en-US" i="1">
+                        <a:latin typeface="Cambria Math"/>
+                      </a:rPr>
+                      <m:t>5</m:t>
                     </m:r>
                   </m:oMath>
                 </a14:m>
@@ -17800,7 +18517,43 @@
                       <a:rPr lang="en-US" i="1">
                         <a:latin typeface="Cambria Math"/>
                       </a:rPr>
-                      <m:t>0.5×2=1</m:t>
+                      <m:t>0</m:t>
+                    </m:r>
+                    <m:r>
+                      <a:rPr lang="en-US" i="1">
+                        <a:latin typeface="Cambria Math"/>
+                      </a:rPr>
+                      <m:t>.</m:t>
+                    </m:r>
+                    <m:r>
+                      <a:rPr lang="en-US" i="1">
+                        <a:latin typeface="Cambria Math"/>
+                      </a:rPr>
+                      <m:t>5</m:t>
+                    </m:r>
+                    <m:r>
+                      <a:rPr lang="en-US" i="1">
+                        <a:latin typeface="Cambria Math"/>
+                      </a:rPr>
+                      <m:t>×</m:t>
+                    </m:r>
+                    <m:r>
+                      <a:rPr lang="en-US" i="1">
+                        <a:latin typeface="Cambria Math"/>
+                      </a:rPr>
+                      <m:t>2</m:t>
+                    </m:r>
+                    <m:r>
+                      <a:rPr lang="en-US" i="1">
+                        <a:latin typeface="Cambria Math"/>
+                      </a:rPr>
+                      <m:t>=</m:t>
+                    </m:r>
+                    <m:r>
+                      <a:rPr lang="en-US" i="1">
+                        <a:latin typeface="Cambria Math"/>
+                      </a:rPr>
+                      <m:t>1</m:t>
                     </m:r>
                   </m:oMath>
                 </a14:m>
@@ -20734,7 +21487,13 @@
                       <a:rPr lang="en-US" sz="2800" i="1">
                         <a:latin typeface="Cambria Math"/>
                       </a:rPr>
-                      <m:t>=127</m:t>
+                      <m:t>=</m:t>
+                    </m:r>
+                    <m:r>
+                      <a:rPr lang="en-US" sz="2800" i="1">
+                        <a:latin typeface="Cambria Math"/>
+                      </a:rPr>
+                      <m:t>127</m:t>
                     </m:r>
                   </m:oMath>
                 </a14:m>
@@ -20757,7 +21516,13 @@
                       <a:rPr lang="en-US" sz="2800" i="1">
                         <a:latin typeface="Cambria Math" panose="02040503050406030204" pitchFamily="18" charset="0"/>
                       </a:rPr>
-                      <m:t>.29999995</m:t>
+                      <m:t>.</m:t>
+                    </m:r>
+                    <m:r>
+                      <a:rPr lang="en-US" sz="2800" i="1">
+                        <a:latin typeface="Cambria Math" panose="02040503050406030204" pitchFamily="18" charset="0"/>
+                      </a:rPr>
+                      <m:t>29999995</m:t>
                     </m:r>
                   </m:oMath>
                 </a14:m>
@@ -20806,7 +21571,13 @@
                               <a:rPr lang="en-US" sz="2800" i="1">
                                 <a:latin typeface="Cambria Math"/>
                               </a:rPr>
-                              <m:t>−1</m:t>
+                              <m:t>−</m:t>
+                            </m:r>
+                            <m:r>
+                              <a:rPr lang="en-US" sz="2800" i="1">
+                                <a:latin typeface="Cambria Math"/>
+                              </a:rPr>
+                              <m:t>1</m:t>
                             </m:r>
                           </m:e>
                         </m:d>
@@ -20839,7 +21610,13 @@
                           <a:rPr lang="en-US" sz="2800" i="1">
                             <a:latin typeface="Cambria Math"/>
                           </a:rPr>
-                          <m:t>1+</m:t>
+                          <m:t>1</m:t>
+                        </m:r>
+                        <m:r>
+                          <a:rPr lang="en-US" sz="2800" i="1">
+                            <a:latin typeface="Cambria Math"/>
+                          </a:rPr>
+                          <m:t>+</m:t>
                         </m:r>
                         <m:r>
                           <a:rPr lang="en-US" sz="2800" i="1">
@@ -20882,7 +21659,13 @@
                           <a:rPr lang="en-US" sz="2800" i="1">
                             <a:latin typeface="Cambria Math"/>
                           </a:rPr>
-                          <m:t>−127</m:t>
+                          <m:t>−</m:t>
+                        </m:r>
+                        <m:r>
+                          <a:rPr lang="en-US" sz="2800" i="1">
+                            <a:latin typeface="Cambria Math"/>
+                          </a:rPr>
+                          <m:t>127</m:t>
                         </m:r>
                       </m:sup>
                     </m:sSup>
@@ -20933,7 +21716,13 @@
                                 <a:rPr lang="en-US" sz="2800" i="1">
                                   <a:latin typeface="Cambria Math"/>
                                 </a:rPr>
-                                <m:t>−1</m:t>
+                                <m:t>−</m:t>
+                              </m:r>
+                              <m:r>
+                                <a:rPr lang="en-US" sz="2800" i="1">
+                                  <a:latin typeface="Cambria Math"/>
+                                </a:rPr>
+                                <m:t>1</m:t>
                               </m:r>
                             </m:e>
                           </m:d>
@@ -20966,7 +21755,13 @@
                             <a:rPr lang="en-US" sz="2800" i="1">
                               <a:latin typeface="Cambria Math"/>
                             </a:rPr>
-                            <m:t>1+</m:t>
+                            <m:t>1</m:t>
+                          </m:r>
+                          <m:r>
+                            <a:rPr lang="en-US" sz="2800" i="1">
+                              <a:latin typeface="Cambria Math"/>
+                            </a:rPr>
+                            <m:t>+</m:t>
                           </m:r>
                           <m:r>
                             <a:rPr lang="en-US" sz="2800" i="1" dirty="0">
@@ -20978,7 +21773,13 @@
                             <a:rPr lang="en-US" sz="2800" i="1">
                               <a:latin typeface="Cambria Math" panose="02040503050406030204" pitchFamily="18" charset="0"/>
                             </a:rPr>
-                            <m:t>.29999995</m:t>
+                            <m:t>.</m:t>
+                          </m:r>
+                          <m:r>
+                            <a:rPr lang="en-US" sz="2800" i="1">
+                              <a:latin typeface="Cambria Math" panose="02040503050406030204" pitchFamily="18" charset="0"/>
+                            </a:rPr>
+                            <m:t>29999995</m:t>
                           </m:r>
                         </m:e>
                       </m:d>
@@ -21021,7 +21822,13 @@
                             <a:rPr lang="en-US" sz="2800" i="1">
                               <a:latin typeface="Cambria Math"/>
                             </a:rPr>
-                            <m:t>−127</m:t>
+                            <m:t>−</m:t>
+                          </m:r>
+                          <m:r>
+                            <a:rPr lang="en-US" sz="2800" i="1">
+                              <a:latin typeface="Cambria Math"/>
+                            </a:rPr>
+                            <m:t>127</m:t>
                           </m:r>
                         </m:sup>
                       </m:sSup>
@@ -21046,7 +21853,13 @@
                         <a:rPr lang="en-US" sz="2800" i="1">
                           <a:latin typeface="Cambria Math" panose="02040503050406030204" pitchFamily="18" charset="0"/>
                         </a:rPr>
-                        <m:t>.29999995</m:t>
+                        <m:t>.</m:t>
+                      </m:r>
+                      <m:r>
+                        <a:rPr lang="en-US" sz="2800" i="1">
+                          <a:latin typeface="Cambria Math" panose="02040503050406030204" pitchFamily="18" charset="0"/>
+                        </a:rPr>
+                        <m:t>29999995</m:t>
                       </m:r>
                     </m:oMath>
                   </m:oMathPara>
@@ -21064,7 +21877,25 @@
                       <a:rPr lang="en-US" sz="2800" b="0" i="0" smtClean="0">
                         <a:latin typeface="Cambria Math" panose="02040503050406030204" pitchFamily="18" charset="0"/>
                       </a:rPr>
-                      <m:t>1.3−</m:t>
+                      <m:t>1</m:t>
+                    </m:r>
+                    <m:r>
+                      <a:rPr lang="en-US" sz="2800" b="0" i="0" smtClean="0">
+                        <a:latin typeface="Cambria Math" panose="02040503050406030204" pitchFamily="18" charset="0"/>
+                      </a:rPr>
+                      <m:t>.</m:t>
+                    </m:r>
+                    <m:r>
+                      <a:rPr lang="en-US" sz="2800" b="0" i="0" smtClean="0">
+                        <a:latin typeface="Cambria Math" panose="02040503050406030204" pitchFamily="18" charset="0"/>
+                      </a:rPr>
+                      <m:t>3</m:t>
+                    </m:r>
+                    <m:r>
+                      <a:rPr lang="en-US" sz="2800" b="0" i="0" smtClean="0">
+                        <a:latin typeface="Cambria Math" panose="02040503050406030204" pitchFamily="18" charset="0"/>
+                      </a:rPr>
+                      <m:t>−</m:t>
                     </m:r>
                     <m:r>
                       <a:rPr lang="en-US" sz="2800" i="1" dirty="0">
@@ -21076,7 +21907,31 @@
                       <a:rPr lang="en-US" sz="2800" i="1">
                         <a:latin typeface="Cambria Math" panose="02040503050406030204" pitchFamily="18" charset="0"/>
                       </a:rPr>
-                      <m:t>.29999995=5×</m:t>
+                      <m:t>.</m:t>
+                    </m:r>
+                    <m:r>
+                      <a:rPr lang="en-US" sz="2800" i="1">
+                        <a:latin typeface="Cambria Math" panose="02040503050406030204" pitchFamily="18" charset="0"/>
+                      </a:rPr>
+                      <m:t>29999995</m:t>
+                    </m:r>
+                    <m:r>
+                      <a:rPr lang="en-US" sz="2800" i="1">
+                        <a:latin typeface="Cambria Math" panose="02040503050406030204" pitchFamily="18" charset="0"/>
+                      </a:rPr>
+                      <m:t>=</m:t>
+                    </m:r>
+                    <m:r>
+                      <a:rPr lang="en-US" sz="2800" i="1">
+                        <a:latin typeface="Cambria Math" panose="02040503050406030204" pitchFamily="18" charset="0"/>
+                      </a:rPr>
+                      <m:t>5</m:t>
+                    </m:r>
+                    <m:r>
+                      <a:rPr lang="en-US" sz="2800" i="1">
+                        <a:latin typeface="Cambria Math" panose="02040503050406030204" pitchFamily="18" charset="0"/>
+                      </a:rPr>
+                      <m:t>×</m:t>
                     </m:r>
                     <m:sSup>
                       <m:sSupPr>
@@ -21099,7 +21954,13 @@
                           <a:rPr lang="en-US" sz="2800" b="0" i="1" smtClean="0">
                             <a:latin typeface="Cambria Math" panose="02040503050406030204" pitchFamily="18" charset="0"/>
                           </a:rPr>
-                          <m:t>−8</m:t>
+                          <m:t>−</m:t>
+                        </m:r>
+                        <m:r>
+                          <a:rPr lang="en-US" sz="2800" b="0" i="1" smtClean="0">
+                            <a:latin typeface="Cambria Math" panose="02040503050406030204" pitchFamily="18" charset="0"/>
+                          </a:rPr>
+                          <m:t>8</m:t>
                         </m:r>
                       </m:sup>
                     </m:sSup>
@@ -21624,7 +22485,21 @@
                         <a:latin typeface="Cambria Math" panose="02040503050406030204" pitchFamily="18" charset="0"/>
                         <a:ea typeface="Cambria Math" panose="02040503050406030204" pitchFamily="18" charset="0"/>
                       </a:rPr>
-                      <m:t>∞+∞</m:t>
+                      <m:t>∞</m:t>
+                    </m:r>
+                    <m:r>
+                      <a:rPr lang="en-US" i="1">
+                        <a:latin typeface="Cambria Math" panose="02040503050406030204" pitchFamily="18" charset="0"/>
+                        <a:ea typeface="Cambria Math" panose="02040503050406030204" pitchFamily="18" charset="0"/>
+                      </a:rPr>
+                      <m:t>+</m:t>
+                    </m:r>
+                    <m:r>
+                      <a:rPr lang="en-US" i="1">
+                        <a:latin typeface="Cambria Math" panose="02040503050406030204" pitchFamily="18" charset="0"/>
+                        <a:ea typeface="Cambria Math" panose="02040503050406030204" pitchFamily="18" charset="0"/>
+                      </a:rPr>
+                      <m:t>∞</m:t>
                     </m:r>
                   </m:oMath>
                 </a14:m>
@@ -21862,7 +22737,13 @@
                                 <a:rPr lang="en-US" sz="2800">
                                   <a:latin typeface="Cambria Math" panose="02040503050406030204" pitchFamily="18" charset="0"/>
                                 </a:rPr>
-                                <m:t>−1</m:t>
+                                <m:t>−</m:t>
+                              </m:r>
+                              <m:r>
+                                <a:rPr lang="en-US" sz="2800">
+                                  <a:latin typeface="Cambria Math" panose="02040503050406030204" pitchFamily="18" charset="0"/>
+                                </a:rPr>
+                                <m:t>1</m:t>
                               </m:r>
                             </m:e>
                           </m:d>
@@ -21918,7 +22799,16 @@
                               </a:solidFill>
                               <a:latin typeface="Cambria Math" panose="02040503050406030204" pitchFamily="18" charset="0"/>
                             </a:rPr>
-                            <m:t>−126</m:t>
+                            <m:t>−</m:t>
+                          </m:r>
+                          <m:r>
+                            <a:rPr lang="en-US" sz="2800">
+                              <a:solidFill>
+                                <a:srgbClr val="FF0000"/>
+                              </a:solidFill>
+                              <a:latin typeface="Cambria Math" panose="02040503050406030204" pitchFamily="18" charset="0"/>
+                            </a:rPr>
+                            <m:t>126</m:t>
                           </m:r>
                         </m:sup>
                       </m:sSup>
@@ -22021,7 +22911,13 @@
                                 <a:rPr lang="en-US" sz="2800">
                                   <a:latin typeface="Cambria Math" panose="02040503050406030204" pitchFamily="18" charset="0"/>
                                 </a:rPr>
-                                <m:t>−1</m:t>
+                                <m:t>−</m:t>
+                              </m:r>
+                              <m:r>
+                                <a:rPr lang="en-US" sz="2800">
+                                  <a:latin typeface="Cambria Math" panose="02040503050406030204" pitchFamily="18" charset="0"/>
+                                </a:rPr>
+                                <m:t>1</m:t>
                               </m:r>
                             </m:e>
                           </m:d>
@@ -22113,7 +23009,16 @@
                               </a:solidFill>
                               <a:latin typeface="Cambria Math" panose="02040503050406030204" pitchFamily="18" charset="0"/>
                             </a:rPr>
-                            <m:t>−12</m:t>
+                            <m:t>−</m:t>
+                          </m:r>
+                          <m:r>
+                            <a:rPr lang="en-US" sz="2800">
+                              <a:solidFill>
+                                <a:srgbClr val="FF0000"/>
+                              </a:solidFill>
+                              <a:latin typeface="Cambria Math" panose="02040503050406030204" pitchFamily="18" charset="0"/>
+                            </a:rPr>
+                            <m:t>12</m:t>
                           </m:r>
                           <m:r>
                             <a:rPr lang="en-US" sz="2800" i="1">
@@ -24874,464 +25779,6 @@
       </mc:AlternateContent>
       <p:pic>
         <p:nvPicPr>
-          <p:cNvPr id="1028" name="Picture 4"/>
-          <p:cNvPicPr>
-            <a:picLocks noChangeAspect="1" noChangeArrowheads="1"/>
-          </p:cNvPicPr>
-          <p:nvPr/>
-        </p:nvPicPr>
-        <p:blipFill>
-          <a:blip r:embed="rId3" cstate="print">
-            <a:extLst>
-              <a:ext uri="{28A0092B-C50C-407E-A947-70E740481C1C}">
-                <a14:useLocalDpi xmlns:a14="http://schemas.microsoft.com/office/drawing/2010/main" val="0"/>
-              </a:ext>
-            </a:extLst>
-          </a:blip>
-          <a:srcRect/>
-          <a:stretch>
-            <a:fillRect/>
-          </a:stretch>
-        </p:blipFill>
-        <p:spPr bwMode="auto">
-          <a:xfrm>
-            <a:off x="2133601" y="3865526"/>
-            <a:ext cx="3495675" cy="1565349"/>
-          </a:xfrm>
-          <a:prstGeom prst="rect">
-            <a:avLst/>
-          </a:prstGeom>
-          <a:noFill/>
-          <a:ln>
-            <a:noFill/>
-          </a:ln>
-          <a:extLst>
-            <a:ext uri="{909E8E84-426E-40DD-AFC4-6F175D3DCCD1}">
-              <a14:hiddenFill xmlns:a14="http://schemas.microsoft.com/office/drawing/2010/main">
-                <a:solidFill>
-                  <a:schemeClr val="accent1"/>
-                </a:solidFill>
-              </a14:hiddenFill>
-            </a:ext>
-            <a:ext uri="{91240B29-F687-4F45-9708-019B960494DF}">
-              <a14:hiddenLine xmlns:a14="http://schemas.microsoft.com/office/drawing/2010/main" w="9525">
-                <a:solidFill>
-                  <a:schemeClr val="tx1"/>
-                </a:solidFill>
-                <a:miter lim="800000"/>
-                <a:headEnd/>
-                <a:tailEnd/>
-              </a14:hiddenLine>
-            </a:ext>
-          </a:extLst>
-        </p:spPr>
-      </p:pic>
-      <mc:AlternateContent xmlns:mc="http://schemas.openxmlformats.org/markup-compatibility/2006" xmlns:a14="http://schemas.microsoft.com/office/drawing/2010/main">
-        <mc:Choice Requires="a14">
-          <p:sp>
-            <p:nvSpPr>
-              <p:cNvPr id="6" name="Rectangle 5"/>
-              <p:cNvSpPr/>
-              <p:nvPr/>
-            </p:nvSpPr>
-            <p:spPr>
-              <a:xfrm>
-                <a:off x="5934076" y="4191001"/>
-                <a:ext cx="4276725" cy="461665"/>
-              </a:xfrm>
-              <a:prstGeom prst="rect">
-                <a:avLst/>
-              </a:prstGeom>
-            </p:spPr>
-            <p:txBody>
-              <a:bodyPr wrap="square">
-                <a:spAutoFit/>
-              </a:bodyPr>
-              <a:lstStyle/>
-              <a:p>
-                <a:pPr/>
-                <a14:m>
-                  <m:oMathPara xmlns:m="http://schemas.openxmlformats.org/officeDocument/2006/math">
-                    <m:oMathParaPr>
-                      <m:jc m:val="centerGroup"/>
-                    </m:oMathParaPr>
-                    <m:oMath xmlns:m="http://schemas.openxmlformats.org/officeDocument/2006/math">
-                      <m:r>
-                        <a:rPr lang="en-US" sz="2400" smtClean="0">
-                          <a:latin typeface="Cambria Math"/>
-                        </a:rPr>
-                        <m:t>101</m:t>
-                      </m:r>
-                      <m:r>
-                        <a:rPr lang="en-US" sz="2400">
-                          <a:latin typeface="Cambria Math"/>
-                        </a:rPr>
-                        <m:t>01.10</m:t>
-                      </m:r>
-                      <m:sSub>
-                        <m:sSubPr>
-                          <m:ctrlPr>
-                            <a:rPr lang="en-US" sz="2400" i="1">
-                              <a:latin typeface="Cambria Math" panose="02040503050406030204" pitchFamily="18" charset="0"/>
-                            </a:rPr>
-                          </m:ctrlPr>
-                        </m:sSubPr>
-                        <m:e>
-                          <m:r>
-                            <a:rPr lang="en-US" sz="2400">
-                              <a:latin typeface="Cambria Math"/>
-                            </a:rPr>
-                            <m:t>1</m:t>
-                          </m:r>
-                        </m:e>
-                        <m:sub>
-                          <m:r>
-                            <a:rPr lang="en-US" sz="2400">
-                              <a:latin typeface="Cambria Math"/>
-                            </a:rPr>
-                            <m:t>2 </m:t>
-                          </m:r>
-                        </m:sub>
-                      </m:sSub>
-                      <m:r>
-                        <a:rPr lang="en-US" sz="2400">
-                          <a:latin typeface="Cambria Math"/>
-                        </a:rPr>
-                        <m:t>= </m:t>
-                      </m:r>
-                      <m:sSub>
-                        <m:sSubPr>
-                          <m:ctrlPr>
-                            <a:rPr lang="en-US" sz="2400" i="1">
-                              <a:latin typeface="Cambria Math" panose="02040503050406030204" pitchFamily="18" charset="0"/>
-                            </a:rPr>
-                          </m:ctrlPr>
-                        </m:sSubPr>
-                        <m:e>
-                          <m:r>
-                            <a:rPr lang="en-US" sz="2400" i="1">
-                              <a:latin typeface="Cambria Math"/>
-                            </a:rPr>
-                            <m:t>𝐴</m:t>
-                          </m:r>
-                        </m:e>
-                        <m:sub>
-                          <m:r>
-                            <a:rPr lang="en-US" sz="2400" i="1">
-                              <a:latin typeface="Cambria Math"/>
-                            </a:rPr>
-                            <m:t>h</m:t>
-                          </m:r>
-                        </m:sub>
-                      </m:sSub>
-                      <m:r>
-                        <a:rPr lang="en-US" sz="2400" i="1">
-                          <a:latin typeface="Cambria Math"/>
-                        </a:rPr>
-                        <m:t>+</m:t>
-                      </m:r>
-                      <m:sSub>
-                        <m:sSubPr>
-                          <m:ctrlPr>
-                            <a:rPr lang="en-US" sz="2400" i="1">
-                              <a:latin typeface="Cambria Math" panose="02040503050406030204" pitchFamily="18" charset="0"/>
-                            </a:rPr>
-                          </m:ctrlPr>
-                        </m:sSubPr>
-                        <m:e>
-                          <m:r>
-                            <a:rPr lang="en-US" sz="2400" i="1">
-                              <a:latin typeface="Cambria Math"/>
-                            </a:rPr>
-                            <m:t>𝐴</m:t>
-                          </m:r>
-                        </m:e>
-                        <m:sub>
-                          <m:r>
-                            <a:rPr lang="en-US" sz="2400" i="1">
-                              <a:latin typeface="Cambria Math"/>
-                            </a:rPr>
-                            <m:t>𝑙</m:t>
-                          </m:r>
-                        </m:sub>
-                      </m:sSub>
-                      <m:r>
-                        <a:rPr lang="en-US" sz="2400" i="1">
-                          <a:latin typeface="Cambria Math"/>
-                        </a:rPr>
-                        <m:t>×</m:t>
-                      </m:r>
-                      <m:sSup>
-                        <m:sSupPr>
-                          <m:ctrlPr>
-                            <a:rPr lang="en-US" sz="2400" i="1">
-                              <a:latin typeface="Cambria Math" panose="02040503050406030204" pitchFamily="18" charset="0"/>
-                            </a:rPr>
-                          </m:ctrlPr>
-                        </m:sSupPr>
-                        <m:e>
-                          <m:r>
-                            <a:rPr lang="en-US" sz="2400" i="1">
-                              <a:latin typeface="Cambria Math"/>
-                            </a:rPr>
-                            <m:t>2</m:t>
-                          </m:r>
-                        </m:e>
-                        <m:sup>
-                          <m:r>
-                            <a:rPr lang="en-US" sz="2400" i="1">
-                              <a:latin typeface="Cambria Math"/>
-                            </a:rPr>
-                            <m:t>−3</m:t>
-                          </m:r>
-                        </m:sup>
-                      </m:sSup>
-                    </m:oMath>
-                  </m:oMathPara>
-                </a14:m>
-                <a:endParaRPr lang="en-US" sz="2400" dirty="0"/>
-              </a:p>
-            </p:txBody>
-          </p:sp>
-        </mc:Choice>
-        <mc:Fallback xmlns="">
-          <p:sp>
-            <p:nvSpPr>
-              <p:cNvPr id="6" name="Rectangle 5"/>
-              <p:cNvSpPr>
-                <a:spLocks noRot="1" noChangeAspect="1" noMove="1" noResize="1" noEditPoints="1" noAdjustHandles="1" noChangeArrowheads="1" noChangeShapeType="1" noTextEdit="1"/>
-              </p:cNvSpPr>
-              <p:nvPr/>
-            </p:nvSpPr>
-            <p:spPr>
-              <a:xfrm>
-                <a:off x="5934076" y="4191001"/>
-                <a:ext cx="4276725" cy="461665"/>
-              </a:xfrm>
-              <a:prstGeom prst="rect">
-                <a:avLst/>
-              </a:prstGeom>
-              <a:blipFill>
-                <a:blip r:embed="rId4"/>
-                <a:stretch>
-                  <a:fillRect b="-21622"/>
-                </a:stretch>
-              </a:blipFill>
-            </p:spPr>
-            <p:txBody>
-              <a:bodyPr/>
-              <a:lstStyle/>
-              <a:p>
-                <a:r>
-                  <a:rPr lang="en-US">
-                    <a:noFill/>
-                  </a:rPr>
-                  <a:t> </a:t>
-                </a:r>
-              </a:p>
-            </p:txBody>
-          </p:sp>
-        </mc:Fallback>
-      </mc:AlternateContent>
-      <mc:AlternateContent xmlns:mc="http://schemas.openxmlformats.org/markup-compatibility/2006" xmlns:a14="http://schemas.microsoft.com/office/drawing/2010/main">
-        <mc:Choice Requires="a14">
-          <p:sp>
-            <p:nvSpPr>
-              <p:cNvPr id="4" name="Rectangle 3"/>
-              <p:cNvSpPr/>
-              <p:nvPr/>
-            </p:nvSpPr>
-            <p:spPr>
-              <a:xfrm>
-                <a:off x="7689586" y="4719936"/>
-                <a:ext cx="2155783" cy="461665"/>
-              </a:xfrm>
-              <a:prstGeom prst="rect">
-                <a:avLst/>
-              </a:prstGeom>
-            </p:spPr>
-            <p:txBody>
-              <a:bodyPr wrap="none">
-                <a:spAutoFit/>
-              </a:bodyPr>
-              <a:lstStyle/>
-              <a:p>
-                <a:pPr/>
-                <a14:m>
-                  <m:oMathPara xmlns:m="http://schemas.openxmlformats.org/officeDocument/2006/math">
-                    <m:oMathParaPr>
-                      <m:jc m:val="centerGroup"/>
-                    </m:oMathParaPr>
-                    <m:oMath xmlns:m="http://schemas.openxmlformats.org/officeDocument/2006/math">
-                      <m:r>
-                        <a:rPr lang="en-US" sz="2400">
-                          <a:latin typeface="Cambria Math"/>
-                        </a:rPr>
-                        <m:t>=21+5</m:t>
-                      </m:r>
-                      <m:r>
-                        <a:rPr lang="en-US" sz="2400" i="1">
-                          <a:latin typeface="Cambria Math"/>
-                        </a:rPr>
-                        <m:t>×</m:t>
-                      </m:r>
-                      <m:sSup>
-                        <m:sSupPr>
-                          <m:ctrlPr>
-                            <a:rPr lang="en-US" sz="2400" i="1">
-                              <a:latin typeface="Cambria Math" panose="02040503050406030204" pitchFamily="18" charset="0"/>
-                            </a:rPr>
-                          </m:ctrlPr>
-                        </m:sSupPr>
-                        <m:e>
-                          <m:r>
-                            <a:rPr lang="en-US" sz="2400" i="1">
-                              <a:latin typeface="Cambria Math"/>
-                            </a:rPr>
-                            <m:t>2</m:t>
-                          </m:r>
-                        </m:e>
-                        <m:sup>
-                          <m:r>
-                            <a:rPr lang="en-US" sz="2400" i="1">
-                              <a:latin typeface="Cambria Math"/>
-                            </a:rPr>
-                            <m:t>−3</m:t>
-                          </m:r>
-                        </m:sup>
-                      </m:sSup>
-                    </m:oMath>
-                  </m:oMathPara>
-                </a14:m>
-                <a:endParaRPr lang="en-US" sz="2400" dirty="0"/>
-              </a:p>
-            </p:txBody>
-          </p:sp>
-        </mc:Choice>
-        <mc:Fallback xmlns="">
-          <p:sp>
-            <p:nvSpPr>
-              <p:cNvPr id="4" name="Rectangle 3"/>
-              <p:cNvSpPr>
-                <a:spLocks noRot="1" noChangeAspect="1" noMove="1" noResize="1" noEditPoints="1" noAdjustHandles="1" noChangeArrowheads="1" noChangeShapeType="1" noTextEdit="1"/>
-              </p:cNvSpPr>
-              <p:nvPr/>
-            </p:nvSpPr>
-            <p:spPr>
-              <a:xfrm>
-                <a:off x="7689586" y="4719936"/>
-                <a:ext cx="2155783" cy="461665"/>
-              </a:xfrm>
-              <a:prstGeom prst="rect">
-                <a:avLst/>
-              </a:prstGeom>
-              <a:blipFill>
-                <a:blip r:embed="rId5"/>
-                <a:stretch>
-                  <a:fillRect/>
-                </a:stretch>
-              </a:blipFill>
-            </p:spPr>
-            <p:txBody>
-              <a:bodyPr/>
-              <a:lstStyle/>
-              <a:p>
-                <a:r>
-                  <a:rPr lang="en-US">
-                    <a:noFill/>
-                  </a:rPr>
-                  <a:t> </a:t>
-                </a:r>
-              </a:p>
-            </p:txBody>
-          </p:sp>
-        </mc:Fallback>
-      </mc:AlternateContent>
-      <mc:AlternateContent xmlns:mc="http://schemas.openxmlformats.org/markup-compatibility/2006" xmlns:a14="http://schemas.microsoft.com/office/drawing/2010/main">
-        <mc:Choice Requires="a14">
-          <p:sp>
-            <p:nvSpPr>
-              <p:cNvPr id="7" name="Rectangle 6"/>
-              <p:cNvSpPr/>
-              <p:nvPr/>
-            </p:nvSpPr>
-            <p:spPr>
-              <a:xfrm>
-                <a:off x="7723766" y="5253336"/>
-                <a:ext cx="1496435" cy="461665"/>
-              </a:xfrm>
-              <a:prstGeom prst="rect">
-                <a:avLst/>
-              </a:prstGeom>
-            </p:spPr>
-            <p:txBody>
-              <a:bodyPr wrap="none">
-                <a:spAutoFit/>
-              </a:bodyPr>
-              <a:lstStyle/>
-              <a:p>
-                <a:pPr/>
-                <a14:m>
-                  <m:oMathPara xmlns:m="http://schemas.openxmlformats.org/officeDocument/2006/math">
-                    <m:oMathParaPr>
-                      <m:jc m:val="centerGroup"/>
-                    </m:oMathParaPr>
-                    <m:oMath xmlns:m="http://schemas.openxmlformats.org/officeDocument/2006/math">
-                      <m:r>
-                        <a:rPr lang="en-US" sz="2400">
-                          <a:latin typeface="Cambria Math"/>
-                        </a:rPr>
-                        <m:t>=21.625</m:t>
-                      </m:r>
-                    </m:oMath>
-                  </m:oMathPara>
-                </a14:m>
-                <a:endParaRPr lang="en-US" sz="2400" dirty="0"/>
-              </a:p>
-            </p:txBody>
-          </p:sp>
-        </mc:Choice>
-        <mc:Fallback xmlns="">
-          <p:sp>
-            <p:nvSpPr>
-              <p:cNvPr id="7" name="Rectangle 6"/>
-              <p:cNvSpPr>
-                <a:spLocks noRot="1" noChangeAspect="1" noMove="1" noResize="1" noEditPoints="1" noAdjustHandles="1" noChangeArrowheads="1" noChangeShapeType="1" noTextEdit="1"/>
-              </p:cNvSpPr>
-              <p:nvPr/>
-            </p:nvSpPr>
-            <p:spPr>
-              <a:xfrm>
-                <a:off x="7723766" y="5253336"/>
-                <a:ext cx="1496435" cy="461665"/>
-              </a:xfrm>
-              <a:prstGeom prst="rect">
-                <a:avLst/>
-              </a:prstGeom>
-              <a:blipFill>
-                <a:blip r:embed="rId6"/>
-                <a:stretch>
-                  <a:fillRect/>
-                </a:stretch>
-              </a:blipFill>
-            </p:spPr>
-            <p:txBody>
-              <a:bodyPr/>
-              <a:lstStyle/>
-              <a:p>
-                <a:r>
-                  <a:rPr lang="en-US">
-                    <a:noFill/>
-                  </a:rPr>
-                  <a:t> </a:t>
-                </a:r>
-              </a:p>
-            </p:txBody>
-          </p:sp>
-        </mc:Fallback>
-      </mc:AlternateContent>
-      <p:pic>
-        <p:nvPicPr>
           <p:cNvPr id="8" name="Picture 7"/>
           <p:cNvPicPr>
             <a:picLocks noChangeAspect="1"/>
@@ -25339,7 +25786,7 @@
           <p:nvPr/>
         </p:nvPicPr>
         <p:blipFill>
-          <a:blip r:embed="rId7"/>
+          <a:blip r:embed="rId3"/>
           <a:stretch>
             <a:fillRect/>
           </a:stretch>
@@ -26566,8 +27013,8 @@
           </a:graphicData>
         </a:graphic>
       </p:graphicFrame>
-      <mc:AlternateContent xmlns:mc="http://schemas.openxmlformats.org/markup-compatibility/2006" xmlns:a14="http://schemas.microsoft.com/office/drawing/2010/main">
-        <mc:Choice Requires="a14">
+      <mc:AlternateContent xmlns:mc="http://schemas.openxmlformats.org/markup-compatibility/2006">
+        <mc:Choice xmlns:a14="http://schemas.microsoft.com/office/drawing/2010/main" Requires="a14">
           <p:sp>
             <p:nvSpPr>
               <p:cNvPr id="7" name="Rectangle 6">
@@ -26597,81 +27044,183 @@
               <a:p>
                 <a:pPr/>
                 <a14:m>
-                  <m:oMathPara xmlns:m="http://schemas.openxmlformats.org/officeDocument/2006/math">
-                    <m:oMathParaPr>
-                      <m:jc m:val="left"/>
-                    </m:oMathParaPr>
-                    <m:oMath xmlns:m="http://schemas.openxmlformats.org/officeDocument/2006/math">
-                      <m:r>
-                        <a:rPr lang="en-US" altLang="zh-CN" sz="2000" b="1" i="1">
-                          <a:solidFill>
-                            <a:srgbClr val="FF0000"/>
-                          </a:solidFill>
-                          <a:latin typeface="Cambria Math" panose="02040503050406030204" pitchFamily="18" charset="0"/>
-                        </a:rPr>
-                        <m:t>𝟏𝟎</m:t>
-                      </m:r>
-                      <m:r>
-                        <a:rPr lang="en-US" sz="2000" b="1" i="1">
-                          <a:solidFill>
-                            <a:srgbClr val="FF0000"/>
-                          </a:solidFill>
-                          <a:latin typeface="Cambria Math" panose="02040503050406030204" pitchFamily="18" charset="0"/>
-                        </a:rPr>
-                        <m:t>𝟏𝟎𝟏</m:t>
-                      </m:r>
-                      <m:r>
-                        <a:rPr lang="en-US" sz="2000" b="1">
-                          <a:solidFill>
-                            <a:srgbClr val="FF0000"/>
-                          </a:solidFill>
-                          <a:latin typeface="Cambria Math" panose="02040503050406030204" pitchFamily="18" charset="0"/>
-                        </a:rPr>
-                        <m:t>.</m:t>
-                      </m:r>
-                      <m:r>
-                        <a:rPr lang="en-US" sz="2000" b="1" i="1">
-                          <a:solidFill>
-                            <a:srgbClr val="FF0000"/>
-                          </a:solidFill>
-                          <a:latin typeface="Cambria Math" panose="02040503050406030204" pitchFamily="18" charset="0"/>
-                        </a:rPr>
-                        <m:t>𝟏𝟎</m:t>
-                      </m:r>
-                      <m:sSub>
-                        <m:sSubPr>
-                          <m:ctrlPr>
-                            <a:rPr lang="en-US" sz="2000" i="1">
-                              <a:latin typeface="Cambria Math" panose="02040503050406030204" pitchFamily="18" charset="0"/>
-                            </a:rPr>
-                          </m:ctrlPr>
-                        </m:sSubPr>
-                        <m:e>
-                          <m:r>
-                            <a:rPr lang="en-US" sz="2000" b="1">
-                              <a:solidFill>
-                                <a:srgbClr val="FF0000"/>
-                              </a:solidFill>
-                              <a:latin typeface="Cambria Math" panose="02040503050406030204" pitchFamily="18" charset="0"/>
-                            </a:rPr>
-                            <m:t>𝟏</m:t>
-                          </m:r>
-                        </m:e>
-                        <m:sub>
-                          <m:r>
-                            <a:rPr lang="en-US" sz="2000">
-                              <a:latin typeface="Cambria Math" panose="02040503050406030204" pitchFamily="18" charset="0"/>
-                            </a:rPr>
-                            <m:t>2 </m:t>
-                          </m:r>
-                        </m:sub>
-                      </m:sSub>
-                    </m:oMath>
-                  </m:oMathPara>
+                  <m:oMath xmlns:m="http://schemas.openxmlformats.org/officeDocument/2006/math">
+                    <m:r>
+                      <a:rPr lang="en-US" altLang="zh-CN" sz="2000" b="1" i="1" smtClean="0">
+                        <a:solidFill>
+                          <a:srgbClr val="FF0000"/>
+                        </a:solidFill>
+                        <a:latin typeface="Cambria Math" panose="02040503050406030204" pitchFamily="18" charset="0"/>
+                      </a:rPr>
+                      <m:t>𝟏𝟎</m:t>
+                    </m:r>
+                    <m:r>
+                      <a:rPr lang="en-US" sz="2000" b="1" i="1">
+                        <a:solidFill>
+                          <a:srgbClr val="FF0000"/>
+                        </a:solidFill>
+                        <a:latin typeface="Cambria Math" panose="02040503050406030204" pitchFamily="18" charset="0"/>
+                      </a:rPr>
+                      <m:t>𝟏𝟎𝟏</m:t>
+                    </m:r>
+                    <m:r>
+                      <a:rPr lang="en-US" sz="2000" b="1">
+                        <a:solidFill>
+                          <a:srgbClr val="FF0000"/>
+                        </a:solidFill>
+                        <a:latin typeface="Cambria Math" panose="02040503050406030204" pitchFamily="18" charset="0"/>
+                      </a:rPr>
+                      <m:t>.</m:t>
+                    </m:r>
+                    <m:r>
+                      <a:rPr lang="en-US" sz="2000" b="1" i="1">
+                        <a:solidFill>
+                          <a:srgbClr val="FF0000"/>
+                        </a:solidFill>
+                        <a:latin typeface="Cambria Math" panose="02040503050406030204" pitchFamily="18" charset="0"/>
+                      </a:rPr>
+                      <m:t>𝟏𝟎</m:t>
+                    </m:r>
+                    <m:sSub>
+                      <m:sSubPr>
+                        <m:ctrlPr>
+                          <a:rPr lang="en-US" sz="2000" i="1">
+                            <a:latin typeface="Cambria Math" panose="02040503050406030204" pitchFamily="18" charset="0"/>
+                          </a:rPr>
+                        </m:ctrlPr>
+                      </m:sSubPr>
+                      <m:e>
+                        <m:r>
+                          <a:rPr lang="en-US" sz="2000" b="1">
+                            <a:solidFill>
+                              <a:srgbClr val="FF0000"/>
+                            </a:solidFill>
+                            <a:latin typeface="Cambria Math" panose="02040503050406030204" pitchFamily="18" charset="0"/>
+                          </a:rPr>
+                          <m:t>𝟏</m:t>
+                        </m:r>
+                      </m:e>
+                      <m:sub>
+                        <m:r>
+                          <a:rPr lang="en-US" sz="2000">
+                            <a:latin typeface="Cambria Math" panose="02040503050406030204" pitchFamily="18" charset="0"/>
+                          </a:rPr>
+                          <m:t>2</m:t>
+                        </m:r>
+                        <m:r>
+                          <a:rPr lang="en-US" sz="2000">
+                            <a:latin typeface="Cambria Math" panose="02040503050406030204" pitchFamily="18" charset="0"/>
+                          </a:rPr>
+                          <m:t> </m:t>
+                        </m:r>
+                      </m:sub>
+                    </m:sSub>
+                  </m:oMath>
                 </a14:m>
-                <a:endParaRPr lang="en-US" sz="2000" i="1" dirty="0">
-                  <a:latin typeface="Cambria Math" panose="02040503050406030204" pitchFamily="18" charset="0"/>
-                </a:endParaRPr>
+                <a:r>
+                  <a:rPr lang="en-US" sz="2000" i="1" dirty="0">
+                    <a:latin typeface="Cambria Math" panose="02040503050406030204" pitchFamily="18" charset="0"/>
+                  </a:rPr>
+                  <a:t>= </a:t>
+                </a:r>
+                <a14:m>
+                  <m:oMath xmlns:m="http://schemas.openxmlformats.org/officeDocument/2006/math">
+                    <m:sSub>
+                      <m:sSubPr>
+                        <m:ctrlPr>
+                          <a:rPr lang="en-US" sz="2000" i="1">
+                            <a:latin typeface="Cambria Math" panose="02040503050406030204" pitchFamily="18" charset="0"/>
+                          </a:rPr>
+                        </m:ctrlPr>
+                      </m:sSubPr>
+                      <m:e>
+                        <m:r>
+                          <a:rPr lang="en-US" sz="2000" i="1">
+                            <a:latin typeface="Cambria Math"/>
+                          </a:rPr>
+                          <m:t>𝐴</m:t>
+                        </m:r>
+                      </m:e>
+                      <m:sub>
+                        <m:r>
+                          <a:rPr lang="en-US" sz="2000" i="1">
+                            <a:latin typeface="Cambria Math"/>
+                          </a:rPr>
+                          <m:t>h</m:t>
+                        </m:r>
+                      </m:sub>
+                    </m:sSub>
+                    <m:r>
+                      <a:rPr lang="en-US" sz="2000" i="1">
+                        <a:latin typeface="Cambria Math"/>
+                      </a:rPr>
+                      <m:t>+</m:t>
+                    </m:r>
+                    <m:sSub>
+                      <m:sSubPr>
+                        <m:ctrlPr>
+                          <a:rPr lang="en-US" sz="2000" i="1">
+                            <a:latin typeface="Cambria Math" panose="02040503050406030204" pitchFamily="18" charset="0"/>
+                          </a:rPr>
+                        </m:ctrlPr>
+                      </m:sSubPr>
+                      <m:e>
+                        <m:r>
+                          <a:rPr lang="en-US" sz="2000" i="1">
+                            <a:latin typeface="Cambria Math"/>
+                          </a:rPr>
+                          <m:t>𝐴</m:t>
+                        </m:r>
+                      </m:e>
+                      <m:sub>
+                        <m:r>
+                          <a:rPr lang="en-US" sz="2000" i="1">
+                            <a:latin typeface="Cambria Math"/>
+                          </a:rPr>
+                          <m:t>𝑙</m:t>
+                        </m:r>
+                      </m:sub>
+                    </m:sSub>
+                    <m:r>
+                      <a:rPr lang="en-US" sz="2000" i="1">
+                        <a:latin typeface="Cambria Math"/>
+                      </a:rPr>
+                      <m:t>×</m:t>
+                    </m:r>
+                    <m:sSup>
+                      <m:sSupPr>
+                        <m:ctrlPr>
+                          <a:rPr lang="en-US" sz="2000" i="1">
+                            <a:latin typeface="Cambria Math" panose="02040503050406030204" pitchFamily="18" charset="0"/>
+                          </a:rPr>
+                        </m:ctrlPr>
+                      </m:sSupPr>
+                      <m:e>
+                        <m:r>
+                          <a:rPr lang="en-US" sz="2000" i="1">
+                            <a:latin typeface="Cambria Math"/>
+                          </a:rPr>
+                          <m:t>2</m:t>
+                        </m:r>
+                      </m:e>
+                      <m:sup>
+                        <m:r>
+                          <a:rPr lang="en-US" sz="2000" i="1">
+                            <a:latin typeface="Cambria Math"/>
+                          </a:rPr>
+                          <m:t>−</m:t>
+                        </m:r>
+                        <m:r>
+                          <a:rPr lang="en-US" sz="2000" i="1">
+                            <a:latin typeface="Cambria Math"/>
+                          </a:rPr>
+                          <m:t>3</m:t>
+                        </m:r>
+                      </m:sup>
+                    </m:sSup>
+                  </m:oMath>
+                </a14:m>
+                <a:endParaRPr lang="en-US" sz="2000" dirty="0"/>
               </a:p>
               <a:p>
                 <a:endParaRPr lang="en-US" sz="1600" dirty="0">
@@ -26958,7 +27507,13 @@
                             <a:rPr lang="en-US" sz="2000">
                               <a:latin typeface="Cambria Math" panose="02040503050406030204" pitchFamily="18" charset="0"/>
                             </a:rPr>
-                            <m:t>−1</m:t>
+                            <m:t>−</m:t>
+                          </m:r>
+                          <m:r>
+                            <a:rPr lang="en-US" sz="2000">
+                              <a:latin typeface="Cambria Math" panose="02040503050406030204" pitchFamily="18" charset="0"/>
+                            </a:rPr>
+                            <m:t>1</m:t>
                           </m:r>
                         </m:sup>
                       </m:sSup>
@@ -27004,7 +27559,13 @@
                             <a:rPr lang="en-US" sz="2000">
                               <a:latin typeface="Cambria Math" panose="02040503050406030204" pitchFamily="18" charset="0"/>
                             </a:rPr>
-                            <m:t>−2</m:t>
+                            <m:t>−</m:t>
+                          </m:r>
+                          <m:r>
+                            <a:rPr lang="en-US" sz="2000">
+                              <a:latin typeface="Cambria Math" panose="02040503050406030204" pitchFamily="18" charset="0"/>
+                            </a:rPr>
+                            <m:t>2</m:t>
                           </m:r>
                         </m:sup>
                       </m:sSup>
@@ -27050,7 +27611,13 @@
                             <a:rPr lang="en-US" sz="2000">
                               <a:latin typeface="Cambria Math" panose="02040503050406030204" pitchFamily="18" charset="0"/>
                             </a:rPr>
-                            <m:t>−3</m:t>
+                            <m:t>−</m:t>
+                          </m:r>
+                          <m:r>
+                            <a:rPr lang="en-US" sz="2000">
+                              <a:latin typeface="Cambria Math" panose="02040503050406030204" pitchFamily="18" charset="0"/>
+                            </a:rPr>
+                            <m:t>3</m:t>
                           </m:r>
                         </m:sup>
                       </m:sSup>
@@ -27082,6 +27649,67 @@
                     <m:oMath xmlns:m="http://schemas.openxmlformats.org/officeDocument/2006/math">
                       <m:r>
                         <a:rPr lang="en-US" sz="2000">
+                          <a:latin typeface="Cambria Math"/>
+                        </a:rPr>
+                        <m:t>=</m:t>
+                      </m:r>
+                      <m:r>
+                        <a:rPr lang="en-US" sz="2000">
+                          <a:latin typeface="Cambria Math"/>
+                        </a:rPr>
+                        <m:t>21</m:t>
+                      </m:r>
+                      <m:r>
+                        <a:rPr lang="en-US" sz="2000">
+                          <a:latin typeface="Cambria Math"/>
+                        </a:rPr>
+                        <m:t>+</m:t>
+                      </m:r>
+                      <m:r>
+                        <a:rPr lang="en-US" sz="2000">
+                          <a:latin typeface="Cambria Math"/>
+                        </a:rPr>
+                        <m:t>5</m:t>
+                      </m:r>
+                      <m:r>
+                        <a:rPr lang="en-US" sz="2000" i="1">
+                          <a:latin typeface="Cambria Math"/>
+                        </a:rPr>
+                        <m:t>×</m:t>
+                      </m:r>
+                      <m:sSup>
+                        <m:sSupPr>
+                          <m:ctrlPr>
+                            <a:rPr lang="en-US" sz="2000" i="1">
+                              <a:latin typeface="Cambria Math" panose="02040503050406030204" pitchFamily="18" charset="0"/>
+                            </a:rPr>
+                          </m:ctrlPr>
+                        </m:sSupPr>
+                        <m:e>
+                          <m:r>
+                            <a:rPr lang="en-US" sz="2000" i="1">
+                              <a:latin typeface="Cambria Math"/>
+                            </a:rPr>
+                            <m:t>2</m:t>
+                          </m:r>
+                        </m:e>
+                        <m:sup>
+                          <m:r>
+                            <a:rPr lang="en-US" sz="2000" i="1">
+                              <a:latin typeface="Cambria Math"/>
+                            </a:rPr>
+                            <m:t>−</m:t>
+                          </m:r>
+                          <m:r>
+                            <a:rPr lang="en-US" sz="2000" i="1">
+                              <a:latin typeface="Cambria Math"/>
+                            </a:rPr>
+                            <m:t>3</m:t>
+                          </m:r>
+                        </m:sup>
+                      </m:sSup>
+                      <m:r>
+                        <a:rPr lang="en-US" sz="2000">
                           <a:latin typeface="Cambria Math" panose="02040503050406030204" pitchFamily="18" charset="0"/>
                         </a:rPr>
                         <m:t>=</m:t>
@@ -27096,7 +27724,13 @@
                         <a:rPr lang="en-US" sz="2000">
                           <a:latin typeface="Cambria Math" panose="02040503050406030204" pitchFamily="18" charset="0"/>
                         </a:rPr>
-                        <m:t>.625</m:t>
+                        <m:t>.</m:t>
+                      </m:r>
+                      <m:r>
+                        <a:rPr lang="en-US" sz="2000">
+                          <a:latin typeface="Cambria Math" panose="02040503050406030204" pitchFamily="18" charset="0"/>
+                        </a:rPr>
+                        <m:t>625</m:t>
                       </m:r>
                     </m:oMath>
                   </m:oMathPara>
@@ -27110,7 +27744,7 @@
             </p:txBody>
           </p:sp>
         </mc:Choice>
-        <mc:Fallback xmlns="">
+        <mc:Fallback>
           <p:sp>
             <p:nvSpPr>
               <p:cNvPr id="7" name="Rectangle 6">
@@ -27136,7 +27770,7 @@
               <a:blipFill>
                 <a:blip r:embed="rId3"/>
                 <a:stretch>
-                  <a:fillRect/>
+                  <a:fillRect t="-2419"/>
                 </a:stretch>
               </a:blipFill>
             </p:spPr>
@@ -27417,7 +28051,13 @@
                             <a:rPr lang="en-US" sz="2000">
                               <a:latin typeface="Cambria Math" panose="02040503050406030204" pitchFamily="18" charset="0"/>
                             </a:rPr>
-                            <m:t>2 </m:t>
+                            <m:t>2</m:t>
+                          </m:r>
+                          <m:r>
+                            <a:rPr lang="en-US" sz="2000">
+                              <a:latin typeface="Cambria Math" panose="02040503050406030204" pitchFamily="18" charset="0"/>
+                            </a:rPr>
+                            <m:t> </m:t>
                           </m:r>
                         </m:sub>
                       </m:sSub>
@@ -27525,7 +28165,25 @@
                         <a:rPr lang="en-US" sz="2000" i="1">
                           <a:latin typeface="Cambria Math" panose="02040503050406030204" pitchFamily="18" charset="0"/>
                         </a:rPr>
-                        <m:t>=21.625</m:t>
+                        <m:t>=</m:t>
+                      </m:r>
+                      <m:r>
+                        <a:rPr lang="en-US" sz="2000" i="1">
+                          <a:latin typeface="Cambria Math" panose="02040503050406030204" pitchFamily="18" charset="0"/>
+                        </a:rPr>
+                        <m:t>21</m:t>
+                      </m:r>
+                      <m:r>
+                        <a:rPr lang="en-US" sz="2000" i="1">
+                          <a:latin typeface="Cambria Math" panose="02040503050406030204" pitchFamily="18" charset="0"/>
+                        </a:rPr>
+                        <m:t>.</m:t>
+                      </m:r>
+                      <m:r>
+                        <a:rPr lang="en-US" sz="2000" i="1">
+                          <a:latin typeface="Cambria Math" panose="02040503050406030204" pitchFamily="18" charset="0"/>
+                        </a:rPr>
+                        <m:t>625</m:t>
                       </m:r>
                     </m:oMath>
                   </m:oMathPara>
@@ -29216,7 +29874,13 @@
                             <a:rPr lang="en-US" sz="2000">
                               <a:latin typeface="Cambria Math" panose="02040503050406030204" pitchFamily="18" charset="0"/>
                             </a:rPr>
-                            <m:t>2 </m:t>
+                            <m:t>2</m:t>
+                          </m:r>
+                          <m:r>
+                            <a:rPr lang="en-US" sz="2000">
+                              <a:latin typeface="Cambria Math" panose="02040503050406030204" pitchFamily="18" charset="0"/>
+                            </a:rPr>
+                            <m:t> </m:t>
                           </m:r>
                         </m:sub>
                       </m:sSub>
@@ -29308,7 +29972,13 @@
                             <a:rPr lang="en-US" sz="2000" i="1">
                               <a:latin typeface="Cambria Math" panose="02040503050406030204" pitchFamily="18" charset="0"/>
                             </a:rPr>
-                            <m:t>−83</m:t>
+                            <m:t>−</m:t>
+                          </m:r>
+                          <m:r>
+                            <a:rPr lang="en-US" sz="2000" i="1">
+                              <a:latin typeface="Cambria Math" panose="02040503050406030204" pitchFamily="18" charset="0"/>
+                            </a:rPr>
+                            <m:t>83</m:t>
                           </m:r>
                         </m:num>
                         <m:den>
@@ -29324,7 +29994,25 @@
                         <a:rPr lang="en-US" sz="2000" i="1">
                           <a:latin typeface="Cambria Math" panose="02040503050406030204" pitchFamily="18" charset="0"/>
                         </a:rPr>
-                        <m:t>=−10.375</m:t>
+                        <m:t>=−</m:t>
+                      </m:r>
+                      <m:r>
+                        <a:rPr lang="en-US" sz="2000" i="1">
+                          <a:latin typeface="Cambria Math" panose="02040503050406030204" pitchFamily="18" charset="0"/>
+                        </a:rPr>
+                        <m:t>10</m:t>
+                      </m:r>
+                      <m:r>
+                        <a:rPr lang="en-US" sz="2000" i="1">
+                          <a:latin typeface="Cambria Math" panose="02040503050406030204" pitchFamily="18" charset="0"/>
+                        </a:rPr>
+                        <m:t>.</m:t>
+                      </m:r>
+                      <m:r>
+                        <a:rPr lang="en-US" sz="2000" i="1">
+                          <a:latin typeface="Cambria Math" panose="02040503050406030204" pitchFamily="18" charset="0"/>
+                        </a:rPr>
+                        <m:t>375</m:t>
                       </m:r>
                     </m:oMath>
                   </m:oMathPara>
@@ -29713,8 +30401,8 @@
           </a:p>
         </p:txBody>
       </p:sp>
-      <mc:AlternateContent xmlns:mc="http://schemas.openxmlformats.org/markup-compatibility/2006" xmlns:a14="http://schemas.microsoft.com/office/drawing/2010/main">
-        <mc:Choice Requires="a14">
+      <mc:AlternateContent xmlns:mc="http://schemas.openxmlformats.org/markup-compatibility/2006">
+        <mc:Choice xmlns:a14="http://schemas.microsoft.com/office/drawing/2010/main" Requires="a14">
           <p:sp>
             <p:nvSpPr>
               <p:cNvPr id="17" name="Rectangle 16">
@@ -29729,8 +30417,8 @@
             </p:nvSpPr>
             <p:spPr>
               <a:xfrm>
-                <a:off x="2385392" y="3765766"/>
-                <a:ext cx="8282609" cy="1547731"/>
+                <a:off x="2385392" y="3657600"/>
+                <a:ext cx="8282609" cy="1855508"/>
               </a:xfrm>
               <a:prstGeom prst="rect">
                 <a:avLst/>
@@ -29744,77 +30432,181 @@
               <a:p>
                 <a:pPr/>
                 <a14:m>
-                  <m:oMathPara xmlns:m="http://schemas.openxmlformats.org/officeDocument/2006/math">
-                    <m:oMathParaPr>
-                      <m:jc m:val="left"/>
-                    </m:oMathParaPr>
-                    <m:oMath xmlns:m="http://schemas.openxmlformats.org/officeDocument/2006/math">
-                      <m:r>
-                        <a:rPr lang="en-US" altLang="zh-CN" sz="2000" b="1" i="1">
-                          <a:solidFill>
-                            <a:srgbClr val="FF0000"/>
-                          </a:solidFill>
-                          <a:latin typeface="Cambria Math" panose="02040503050406030204" pitchFamily="18" charset="0"/>
-                        </a:rPr>
-                        <m:t>𝟏𝟎</m:t>
-                      </m:r>
-                      <m:r>
-                        <a:rPr lang="en-US" sz="2000" b="1" i="1">
-                          <a:solidFill>
-                            <a:srgbClr val="FF0000"/>
-                          </a:solidFill>
-                          <a:latin typeface="Cambria Math" panose="02040503050406030204" pitchFamily="18" charset="0"/>
-                        </a:rPr>
-                        <m:t>𝟏𝟎𝟏</m:t>
-                      </m:r>
-                      <m:r>
-                        <a:rPr lang="en-US" sz="2000" b="1">
-                          <a:solidFill>
-                            <a:srgbClr val="FF0000"/>
-                          </a:solidFill>
-                          <a:latin typeface="Cambria Math" panose="02040503050406030204" pitchFamily="18" charset="0"/>
-                        </a:rPr>
-                        <m:t>.</m:t>
-                      </m:r>
-                      <m:r>
-                        <a:rPr lang="en-US" sz="2000" b="1" i="1">
-                          <a:solidFill>
-                            <a:srgbClr val="FF0000"/>
-                          </a:solidFill>
-                          <a:latin typeface="Cambria Math" panose="02040503050406030204" pitchFamily="18" charset="0"/>
-                        </a:rPr>
-                        <m:t>𝟏𝟎</m:t>
-                      </m:r>
-                      <m:sSub>
-                        <m:sSubPr>
-                          <m:ctrlPr>
-                            <a:rPr lang="en-US" sz="2000" i="1">
-                              <a:latin typeface="Cambria Math" panose="02040503050406030204" pitchFamily="18" charset="0"/>
-                            </a:rPr>
-                          </m:ctrlPr>
-                        </m:sSubPr>
-                        <m:e>
-                          <m:r>
-                            <a:rPr lang="en-US" sz="2000" b="1">
-                              <a:solidFill>
-                                <a:srgbClr val="FF0000"/>
-                              </a:solidFill>
-                              <a:latin typeface="Cambria Math" panose="02040503050406030204" pitchFamily="18" charset="0"/>
-                            </a:rPr>
-                            <m:t>𝟏</m:t>
-                          </m:r>
-                        </m:e>
-                        <m:sub>
-                          <m:r>
-                            <a:rPr lang="en-US" sz="2000">
-                              <a:latin typeface="Cambria Math" panose="02040503050406030204" pitchFamily="18" charset="0"/>
-                            </a:rPr>
-                            <m:t>2 </m:t>
-                          </m:r>
-                        </m:sub>
-                      </m:sSub>
-                    </m:oMath>
-                  </m:oMathPara>
+                  <m:oMath xmlns:m="http://schemas.openxmlformats.org/officeDocument/2006/math">
+                    <m:r>
+                      <a:rPr lang="en-US" altLang="zh-CN" sz="2000" b="1" i="1" smtClean="0">
+                        <a:solidFill>
+                          <a:srgbClr val="FF0000"/>
+                        </a:solidFill>
+                        <a:latin typeface="Cambria Math" panose="02040503050406030204" pitchFamily="18" charset="0"/>
+                      </a:rPr>
+                      <m:t>𝟏𝟎</m:t>
+                    </m:r>
+                    <m:r>
+                      <a:rPr lang="en-US" sz="2000" b="1" i="1">
+                        <a:solidFill>
+                          <a:srgbClr val="FF0000"/>
+                        </a:solidFill>
+                        <a:latin typeface="Cambria Math" panose="02040503050406030204" pitchFamily="18" charset="0"/>
+                      </a:rPr>
+                      <m:t>𝟏𝟎𝟏</m:t>
+                    </m:r>
+                    <m:r>
+                      <a:rPr lang="en-US" sz="2000" b="1">
+                        <a:solidFill>
+                          <a:srgbClr val="FF0000"/>
+                        </a:solidFill>
+                        <a:latin typeface="Cambria Math" panose="02040503050406030204" pitchFamily="18" charset="0"/>
+                      </a:rPr>
+                      <m:t>.</m:t>
+                    </m:r>
+                    <m:r>
+                      <a:rPr lang="en-US" sz="2000" b="1" i="1">
+                        <a:solidFill>
+                          <a:srgbClr val="FF0000"/>
+                        </a:solidFill>
+                        <a:latin typeface="Cambria Math" panose="02040503050406030204" pitchFamily="18" charset="0"/>
+                      </a:rPr>
+                      <m:t>𝟏𝟎</m:t>
+                    </m:r>
+                    <m:sSub>
+                      <m:sSubPr>
+                        <m:ctrlPr>
+                          <a:rPr lang="en-US" sz="2000" i="1">
+                            <a:latin typeface="Cambria Math" panose="02040503050406030204" pitchFamily="18" charset="0"/>
+                          </a:rPr>
+                        </m:ctrlPr>
+                      </m:sSubPr>
+                      <m:e>
+                        <m:r>
+                          <a:rPr lang="en-US" sz="2000" b="1">
+                            <a:solidFill>
+                              <a:srgbClr val="FF0000"/>
+                            </a:solidFill>
+                            <a:latin typeface="Cambria Math" panose="02040503050406030204" pitchFamily="18" charset="0"/>
+                          </a:rPr>
+                          <m:t>𝟏</m:t>
+                        </m:r>
+                      </m:e>
+                      <m:sub>
+                        <m:r>
+                          <a:rPr lang="en-US" sz="2000">
+                            <a:latin typeface="Cambria Math" panose="02040503050406030204" pitchFamily="18" charset="0"/>
+                          </a:rPr>
+                          <m:t>2</m:t>
+                        </m:r>
+                        <m:r>
+                          <a:rPr lang="en-US" sz="2000">
+                            <a:latin typeface="Cambria Math" panose="02040503050406030204" pitchFamily="18" charset="0"/>
+                          </a:rPr>
+                          <m:t> </m:t>
+                        </m:r>
+                      </m:sub>
+                    </m:sSub>
+                  </m:oMath>
+                </a14:m>
+                <a:r>
+                  <a:rPr lang="en-US" sz="2000" i="1" dirty="0">
+                    <a:latin typeface="Cambria Math" panose="02040503050406030204" pitchFamily="18" charset="0"/>
+                  </a:rPr>
+                  <a:t>= </a:t>
+                </a:r>
+                <a14:m>
+                  <m:oMath xmlns:m="http://schemas.openxmlformats.org/officeDocument/2006/math">
+                    <m:sSub>
+                      <m:sSubPr>
+                        <m:ctrlPr>
+                          <a:rPr lang="en-US" sz="2000" i="1">
+                            <a:latin typeface="Cambria Math" panose="02040503050406030204" pitchFamily="18" charset="0"/>
+                          </a:rPr>
+                        </m:ctrlPr>
+                      </m:sSubPr>
+                      <m:e>
+                        <m:r>
+                          <a:rPr lang="en-US" sz="2000" i="1">
+                            <a:latin typeface="Cambria Math"/>
+                          </a:rPr>
+                          <m:t>𝐴</m:t>
+                        </m:r>
+                      </m:e>
+                      <m:sub>
+                        <m:r>
+                          <a:rPr lang="en-US" sz="2000" i="1">
+                            <a:latin typeface="Cambria Math"/>
+                          </a:rPr>
+                          <m:t>h</m:t>
+                        </m:r>
+                      </m:sub>
+                    </m:sSub>
+                    <m:r>
+                      <a:rPr lang="en-US" sz="2000" i="1">
+                        <a:latin typeface="Cambria Math"/>
+                      </a:rPr>
+                      <m:t>+</m:t>
+                    </m:r>
+                    <m:sSub>
+                      <m:sSubPr>
+                        <m:ctrlPr>
+                          <a:rPr lang="en-US" sz="2000" i="1">
+                            <a:latin typeface="Cambria Math" panose="02040503050406030204" pitchFamily="18" charset="0"/>
+                          </a:rPr>
+                        </m:ctrlPr>
+                      </m:sSubPr>
+                      <m:e>
+                        <m:r>
+                          <a:rPr lang="en-US" sz="2000" i="1">
+                            <a:latin typeface="Cambria Math"/>
+                          </a:rPr>
+                          <m:t>𝐴</m:t>
+                        </m:r>
+                      </m:e>
+                      <m:sub>
+                        <m:r>
+                          <a:rPr lang="en-US" sz="2000" i="1">
+                            <a:latin typeface="Cambria Math"/>
+                          </a:rPr>
+                          <m:t>𝑙</m:t>
+                        </m:r>
+                      </m:sub>
+                    </m:sSub>
+                    <m:r>
+                      <a:rPr lang="en-US" sz="2000" i="1">
+                        <a:latin typeface="Cambria Math"/>
+                      </a:rPr>
+                      <m:t>×</m:t>
+                    </m:r>
+                    <m:sSup>
+                      <m:sSupPr>
+                        <m:ctrlPr>
+                          <a:rPr lang="en-US" sz="2000" i="1">
+                            <a:latin typeface="Cambria Math" panose="02040503050406030204" pitchFamily="18" charset="0"/>
+                          </a:rPr>
+                        </m:ctrlPr>
+                      </m:sSupPr>
+                      <m:e>
+                        <m:r>
+                          <a:rPr lang="en-US" sz="2000" i="1">
+                            <a:latin typeface="Cambria Math"/>
+                          </a:rPr>
+                          <m:t>2</m:t>
+                        </m:r>
+                      </m:e>
+                      <m:sup>
+                        <m:r>
+                          <a:rPr lang="en-US" sz="2000" i="1">
+                            <a:latin typeface="Cambria Math"/>
+                          </a:rPr>
+                          <m:t>−</m:t>
+                        </m:r>
+                        <m:r>
+                          <a:rPr lang="en-US" sz="2000" i="1">
+                            <a:latin typeface="Cambria Math"/>
+                          </a:rPr>
+                          <m:t>3</m:t>
+                        </m:r>
+                      </m:sup>
+                    </m:sSup>
+                  </m:oMath>
                 </a14:m>
                 <a:endParaRPr lang="en-US" sz="2000" i="1" dirty="0">
                   <a:latin typeface="Cambria Math" panose="02040503050406030204" pitchFamily="18" charset="0"/>
@@ -30134,7 +30926,13 @@
                             <a:rPr lang="en-US" sz="2000">
                               <a:latin typeface="Cambria Math" panose="02040503050406030204" pitchFamily="18" charset="0"/>
                             </a:rPr>
-                            <m:t>−1</m:t>
+                            <m:t>−</m:t>
+                          </m:r>
+                          <m:r>
+                            <a:rPr lang="en-US" sz="2000">
+                              <a:latin typeface="Cambria Math" panose="02040503050406030204" pitchFamily="18" charset="0"/>
+                            </a:rPr>
+                            <m:t>1</m:t>
                           </m:r>
                         </m:sup>
                       </m:sSup>
@@ -30180,7 +30978,13 @@
                             <a:rPr lang="en-US" sz="2000">
                               <a:latin typeface="Cambria Math" panose="02040503050406030204" pitchFamily="18" charset="0"/>
                             </a:rPr>
-                            <m:t>−2</m:t>
+                            <m:t>−</m:t>
+                          </m:r>
+                          <m:r>
+                            <a:rPr lang="en-US" sz="2000">
+                              <a:latin typeface="Cambria Math" panose="02040503050406030204" pitchFamily="18" charset="0"/>
+                            </a:rPr>
+                            <m:t>2</m:t>
                           </m:r>
                         </m:sup>
                       </m:sSup>
@@ -30226,7 +31030,13 @@
                             <a:rPr lang="en-US" sz="2000">
                               <a:latin typeface="Cambria Math" panose="02040503050406030204" pitchFamily="18" charset="0"/>
                             </a:rPr>
-                            <m:t>−3</m:t>
+                            <m:t>−</m:t>
+                          </m:r>
+                          <m:r>
+                            <a:rPr lang="en-US" sz="2000">
+                              <a:latin typeface="Cambria Math" panose="02040503050406030204" pitchFamily="18" charset="0"/>
+                            </a:rPr>
+                            <m:t>3</m:t>
                           </m:r>
                         </m:sup>
                       </m:sSup>
@@ -30257,16 +31067,105 @@
                     </m:oMathParaPr>
                     <m:oMath xmlns:m="http://schemas.openxmlformats.org/officeDocument/2006/math">
                       <m:r>
-                        <a:rPr lang="en-US" sz="2000">
+                        <a:rPr lang="en-US" sz="2000" smtClean="0">
                           <a:latin typeface="Cambria Math" panose="02040503050406030204" pitchFamily="18" charset="0"/>
                         </a:rPr>
                         <m:t>=</m:t>
+                      </m:r>
+                      <m:d>
+                        <m:dPr>
+                          <m:ctrlPr>
+                            <a:rPr lang="en-US" sz="2000" b="0" i="0" smtClean="0">
+                              <a:latin typeface="Cambria Math" panose="02040503050406030204" pitchFamily="18" charset="0"/>
+                            </a:rPr>
+                          </m:ctrlPr>
+                        </m:dPr>
+                        <m:e>
+                          <m:r>
+                            <a:rPr lang="en-US" sz="2000" b="0" i="0" smtClean="0">
+                              <a:latin typeface="Cambria Math" panose="02040503050406030204" pitchFamily="18" charset="0"/>
+                            </a:rPr>
+                            <m:t>−</m:t>
+                          </m:r>
+                          <m:r>
+                            <a:rPr lang="en-US" sz="2000" b="0" i="0" smtClean="0">
+                              <a:latin typeface="Cambria Math" panose="02040503050406030204" pitchFamily="18" charset="0"/>
+                            </a:rPr>
+                            <m:t>16</m:t>
+                          </m:r>
+                          <m:r>
+                            <a:rPr lang="en-US" sz="2000" b="0" i="0" smtClean="0">
+                              <a:latin typeface="Cambria Math" panose="02040503050406030204" pitchFamily="18" charset="0"/>
+                            </a:rPr>
+                            <m:t>+</m:t>
+                          </m:r>
+                          <m:r>
+                            <a:rPr lang="en-US" sz="2000" b="0" i="0" smtClean="0">
+                              <a:latin typeface="Cambria Math" panose="02040503050406030204" pitchFamily="18" charset="0"/>
+                            </a:rPr>
+                            <m:t>4</m:t>
+                          </m:r>
+                          <m:r>
+                            <a:rPr lang="en-US" sz="2000" b="0" i="0" smtClean="0">
+                              <a:latin typeface="Cambria Math" panose="02040503050406030204" pitchFamily="18" charset="0"/>
+                            </a:rPr>
+                            <m:t>+</m:t>
+                          </m:r>
+                          <m:r>
+                            <a:rPr lang="en-US" sz="2000" b="0" i="0" smtClean="0">
+                              <a:latin typeface="Cambria Math" panose="02040503050406030204" pitchFamily="18" charset="0"/>
+                            </a:rPr>
+                            <m:t>1</m:t>
+                          </m:r>
+                        </m:e>
+                      </m:d>
+                      <m:r>
+                        <a:rPr lang="en-US" sz="2000" b="0" i="0" smtClean="0">
+                          <a:latin typeface="Cambria Math" panose="02040503050406030204" pitchFamily="18" charset="0"/>
+                        </a:rPr>
+                        <m:t>+</m:t>
+                      </m:r>
+                      <m:r>
+                        <a:rPr lang="en-US" sz="2000" b="0" i="0" smtClean="0">
+                          <a:latin typeface="Cambria Math" panose="02040503050406030204" pitchFamily="18" charset="0"/>
+                        </a:rPr>
+                        <m:t>0</m:t>
+                      </m:r>
+                      <m:r>
+                        <a:rPr lang="en-US" sz="2000" b="0" i="0" smtClean="0">
+                          <a:latin typeface="Cambria Math" panose="02040503050406030204" pitchFamily="18" charset="0"/>
+                        </a:rPr>
+                        <m:t>.</m:t>
+                      </m:r>
+                      <m:r>
+                        <a:rPr lang="en-US" sz="2000" b="0" i="0" smtClean="0">
+                          <a:latin typeface="Cambria Math" panose="02040503050406030204" pitchFamily="18" charset="0"/>
+                        </a:rPr>
+                        <m:t>625</m:t>
+                      </m:r>
+                      <m:r>
+                        <a:rPr lang="en-US" sz="2000" b="0" i="0" smtClean="0">
+                          <a:latin typeface="Cambria Math" panose="02040503050406030204" pitchFamily="18" charset="0"/>
+                        </a:rPr>
+                        <m:t>=−</m:t>
                       </m:r>
                       <m:r>
                         <a:rPr lang="en-US" altLang="zh-CN" sz="2000">
                           <a:latin typeface="Cambria Math" panose="02040503050406030204" pitchFamily="18" charset="0"/>
                         </a:rPr>
-                        <m:t>−10.375</m:t>
+                        <m:t>10</m:t>
+                      </m:r>
+                      <m:r>
+                        <a:rPr lang="en-US" altLang="zh-CN" sz="2000">
+                          <a:latin typeface="Cambria Math" panose="02040503050406030204" pitchFamily="18" charset="0"/>
+                        </a:rPr>
+                        <m:t>.</m:t>
+                      </m:r>
+                      <m:r>
+                        <a:rPr lang="en-US" altLang="zh-CN" sz="2000">
+                          <a:latin typeface="Cambria Math" panose="02040503050406030204" pitchFamily="18" charset="0"/>
+                        </a:rPr>
+                        <m:t>375</m:t>
                       </m:r>
                     </m:oMath>
                   </m:oMathPara>
@@ -30280,7 +31179,7 @@
             </p:txBody>
           </p:sp>
         </mc:Choice>
-        <mc:Fallback xmlns="">
+        <mc:Fallback>
           <p:sp>
             <p:nvSpPr>
               <p:cNvPr id="17" name="Rectangle 16">
@@ -30297,8 +31196,8 @@
             </p:nvSpPr>
             <p:spPr>
               <a:xfrm>
-                <a:off x="2385392" y="3765766"/>
-                <a:ext cx="8282609" cy="1547731"/>
+                <a:off x="2385392" y="3657600"/>
+                <a:ext cx="8282609" cy="1855508"/>
               </a:xfrm>
               <a:prstGeom prst="rect">
                 <a:avLst/>
@@ -30306,7 +31205,7 @@
               <a:blipFill>
                 <a:blip r:embed="rId3"/>
                 <a:stretch>
-                  <a:fillRect/>
+                  <a:fillRect t="-1645"/>
                 </a:stretch>
               </a:blipFill>
             </p:spPr>
@@ -30325,6 +31224,112 @@
           </p:sp>
         </mc:Fallback>
       </mc:AlternateContent>
+      <p:sp>
+        <p:nvSpPr>
+          <p:cNvPr id="19" name="TextBox 18">
+            <a:extLst>
+              <a:ext uri="{FF2B5EF4-FFF2-40B4-BE49-F238E27FC236}">
+                <a16:creationId xmlns:a16="http://schemas.microsoft.com/office/drawing/2014/main" id="{6E77B0E7-C438-952B-F568-302321E6DD25}"/>
+              </a:ext>
+            </a:extLst>
+          </p:cNvPr>
+          <p:cNvSpPr txBox="1"/>
+          <p:nvPr/>
+        </p:nvSpPr>
+        <p:spPr>
+          <a:xfrm>
+            <a:off x="8113408" y="4618523"/>
+            <a:ext cx="3849992" cy="2031325"/>
+          </a:xfrm>
+          <a:prstGeom prst="rect">
+            <a:avLst/>
+          </a:prstGeom>
+          <a:solidFill>
+            <a:schemeClr val="bg1">
+              <a:lumMod val="85000"/>
+            </a:schemeClr>
+          </a:solidFill>
+        </p:spPr>
+        <p:style>
+          <a:lnRef idx="1">
+            <a:schemeClr val="dk1"/>
+          </a:lnRef>
+          <a:fillRef idx="2">
+            <a:schemeClr val="dk1"/>
+          </a:fillRef>
+          <a:effectRef idx="1">
+            <a:schemeClr val="dk1"/>
+          </a:effectRef>
+          <a:fontRef idx="minor">
+            <a:schemeClr val="dk1"/>
+          </a:fontRef>
+        </p:style>
+        <p:txBody>
+          <a:bodyPr wrap="square">
+            <a:spAutoFit/>
+          </a:bodyPr>
+          <a:lstStyle/>
+          <a:p>
+            <a:r>
+              <a:rPr lang="en-US" dirty="0"/>
+              <a:t>Another way of computing the int part:</a:t>
+            </a:r>
+          </a:p>
+          <a:p>
+            <a:r>
+              <a:rPr lang="en-US" dirty="0"/>
+              <a:t>MSB = 1 → number is </a:t>
+            </a:r>
+            <a:r>
+              <a:rPr lang="en-US" b="1" dirty="0"/>
+              <a:t>negative</a:t>
+            </a:r>
+            <a:r>
+              <a:rPr lang="en-US" dirty="0"/>
+              <a:t> </a:t>
+            </a:r>
+          </a:p>
+          <a:p>
+            <a:r>
+              <a:rPr lang="en-US" dirty="0"/>
+              <a:t>Find magnitude: </a:t>
+            </a:r>
+          </a:p>
+          <a:p>
+            <a:pPr lvl="1"/>
+            <a:r>
+              <a:rPr lang="en-US" dirty="0"/>
+              <a:t>Invert: 10101 → 01010 </a:t>
+            </a:r>
+          </a:p>
+          <a:p>
+            <a:pPr lvl="1"/>
+            <a:r>
+              <a:rPr lang="en-US" dirty="0"/>
+              <a:t>Add 1: 01010 + 1 = 01011 → decimal </a:t>
+            </a:r>
+            <a:r>
+              <a:rPr lang="en-US" b="1" dirty="0"/>
+              <a:t>11</a:t>
+            </a:r>
+            <a:r>
+              <a:rPr lang="en-US" dirty="0"/>
+              <a:t> </a:t>
+            </a:r>
+          </a:p>
+          <a:p>
+            <a:r>
+              <a:rPr lang="en-US" dirty="0"/>
+              <a:t>So the value is </a:t>
+            </a:r>
+            <a:r>
+              <a:rPr lang="en-US" b="1" dirty="0"/>
+              <a:t>−11</a:t>
+            </a:r>
+            <a:endParaRPr lang="en-US" dirty="0"/>
+          </a:p>
+        </p:txBody>
+      </p:sp>
     </p:spTree>
     <p:extLst>
       <p:ext uri="{BB962C8B-B14F-4D97-AF65-F5344CB8AC3E}">
@@ -30433,6 +31438,51 @@
                       </p:childTnLst>
                     </p:cTn>
                   </p:par>
+                  <p:par>
+                    <p:cTn id="11" fill="hold">
+                      <p:stCondLst>
+                        <p:cond delay="indefinite"/>
+                      </p:stCondLst>
+                      <p:childTnLst>
+                        <p:par>
+                          <p:cTn id="12" fill="hold">
+                            <p:stCondLst>
+                              <p:cond delay="0"/>
+                            </p:stCondLst>
+                            <p:childTnLst>
+                              <p:par>
+                                <p:cTn id="13" presetID="1" presetClass="entr" presetSubtype="0" fill="hold" grpId="0" nodeType="clickEffect">
+                                  <p:stCondLst>
+                                    <p:cond delay="0"/>
+                                  </p:stCondLst>
+                                  <p:childTnLst>
+                                    <p:set>
+                                      <p:cBhvr>
+                                        <p:cTn id="14" dur="1" fill="hold">
+                                          <p:stCondLst>
+                                            <p:cond delay="0"/>
+                                          </p:stCondLst>
+                                        </p:cTn>
+                                        <p:tgtEl>
+                                          <p:spTgt spid="19"/>
+                                        </p:tgtEl>
+                                        <p:attrNameLst>
+                                          <p:attrName>style.visibility</p:attrName>
+                                        </p:attrNameLst>
+                                      </p:cBhvr>
+                                      <p:to>
+                                        <p:strVal val="visible"/>
+                                      </p:to>
+                                    </p:set>
+                                  </p:childTnLst>
+                                </p:cTn>
+                              </p:par>
+                            </p:childTnLst>
+                          </p:cTn>
+                        </p:par>
+                      </p:childTnLst>
+                    </p:cTn>
+                  </p:par>
                 </p:childTnLst>
               </p:cTn>
               <p:prevCondLst>
@@ -30457,6 +31507,7 @@
     <p:bldLst>
       <p:bldP spid="7" grpId="0"/>
       <p:bldP spid="17" grpId="0"/>
+      <p:bldP spid="19" grpId="0" animBg="1"/>
     </p:bldLst>
   </p:timing>
 </p:sld>
@@ -31057,7 +32108,19 @@
                         <a:rPr lang="en-US" sz="2400">
                           <a:latin typeface="Cambria Math"/>
                         </a:rPr>
-                        <m:t>01.10</m:t>
+                        <m:t>01</m:t>
+                      </m:r>
+                      <m:r>
+                        <a:rPr lang="en-US" sz="2400">
+                          <a:latin typeface="Cambria Math"/>
+                        </a:rPr>
+                        <m:t>.</m:t>
+                      </m:r>
+                      <m:r>
+                        <a:rPr lang="en-US" sz="2400">
+                          <a:latin typeface="Cambria Math"/>
+                        </a:rPr>
+                        <m:t>10</m:t>
                       </m:r>
                       <m:sSub>
                         <m:sSubPr>
@@ -31080,7 +32143,13 @@
                             <a:rPr lang="en-US" sz="2400">
                               <a:latin typeface="Cambria Math"/>
                             </a:rPr>
-                            <m:t>2 </m:t>
+                            <m:t>2</m:t>
+                          </m:r>
+                          <m:r>
+                            <a:rPr lang="en-US" sz="2400">
+                              <a:latin typeface="Cambria Math"/>
+                            </a:rPr>
+                            <m:t> </m:t>
                           </m:r>
                         </m:sub>
                       </m:sSub>
@@ -31173,7 +32242,13 @@
                             <a:rPr lang="en-US" sz="2400" i="1">
                               <a:latin typeface="Cambria Math"/>
                             </a:rPr>
-                            <m:t>−3</m:t>
+                            <m:t>−</m:t>
+                          </m:r>
+                          <m:r>
+                            <a:rPr lang="en-US" sz="2400" i="1">
+                              <a:latin typeface="Cambria Math"/>
+                            </a:rPr>
+                            <m:t>3</m:t>
                           </m:r>
                         </m:sup>
                       </m:sSup>
@@ -31270,7 +32345,25 @@
                         <a:rPr lang="en-US" sz="2400">
                           <a:latin typeface="Cambria Math"/>
                         </a:rPr>
-                        <m:t>=21+5</m:t>
+                        <m:t>=</m:t>
+                      </m:r>
+                      <m:r>
+                        <a:rPr lang="en-US" sz="2400">
+                          <a:latin typeface="Cambria Math"/>
+                        </a:rPr>
+                        <m:t>21</m:t>
+                      </m:r>
+                      <m:r>
+                        <a:rPr lang="en-US" sz="2400">
+                          <a:latin typeface="Cambria Math"/>
+                        </a:rPr>
+                        <m:t>+</m:t>
+                      </m:r>
+                      <m:r>
+                        <a:rPr lang="en-US" sz="2400">
+                          <a:latin typeface="Cambria Math"/>
+                        </a:rPr>
+                        <m:t>5</m:t>
                       </m:r>
                       <m:r>
                         <a:rPr lang="en-US" sz="2400" i="1">
@@ -31299,7 +32392,13 @@
                             <a:rPr lang="en-US" sz="2400" i="1">
                               <a:latin typeface="Cambria Math"/>
                             </a:rPr>
-                            <m:t>−3</m:t>
+                            <m:t>−</m:t>
+                          </m:r>
+                          <m:r>
+                            <a:rPr lang="en-US" sz="2400" i="1">
+                              <a:latin typeface="Cambria Math"/>
+                            </a:rPr>
+                            <m:t>3</m:t>
                           </m:r>
                         </m:sup>
                       </m:sSup>
@@ -31396,7 +32495,25 @@
                         <a:rPr lang="en-US" sz="2400">
                           <a:latin typeface="Cambria Math"/>
                         </a:rPr>
-                        <m:t>=21.625</m:t>
+                        <m:t>=</m:t>
+                      </m:r>
+                      <m:r>
+                        <a:rPr lang="en-US" sz="2400">
+                          <a:latin typeface="Cambria Math"/>
+                        </a:rPr>
+                        <m:t>21</m:t>
+                      </m:r>
+                      <m:r>
+                        <a:rPr lang="en-US" sz="2400">
+                          <a:latin typeface="Cambria Math"/>
+                        </a:rPr>
+                        <m:t>.</m:t>
+                      </m:r>
+                      <m:r>
+                        <a:rPr lang="en-US" sz="2400">
+                          <a:latin typeface="Cambria Math"/>
+                        </a:rPr>
+                        <m:t>625</m:t>
                       </m:r>
                     </m:oMath>
                   </m:oMathPara>
@@ -31497,7 +32614,19 @@
                         <a:rPr lang="en-US" sz="2400">
                           <a:latin typeface="Cambria Math"/>
                         </a:rPr>
-                        <m:t>01.10</m:t>
+                        <m:t>01</m:t>
+                      </m:r>
+                      <m:r>
+                        <a:rPr lang="en-US" sz="2400">
+                          <a:latin typeface="Cambria Math"/>
+                        </a:rPr>
+                        <m:t>.</m:t>
+                      </m:r>
+                      <m:r>
+                        <a:rPr lang="en-US" sz="2400">
+                          <a:latin typeface="Cambria Math"/>
+                        </a:rPr>
+                        <m:t>10</m:t>
                       </m:r>
                       <m:sSub>
                         <m:sSubPr>
@@ -31520,7 +32649,13 @@
                             <a:rPr lang="en-US" sz="2400">
                               <a:latin typeface="Cambria Math"/>
                             </a:rPr>
-                            <m:t>2 </m:t>
+                            <m:t>2</m:t>
+                          </m:r>
+                          <m:r>
+                            <a:rPr lang="en-US" sz="2400">
+                              <a:latin typeface="Cambria Math"/>
+                            </a:rPr>
+                            <m:t> </m:t>
                           </m:r>
                         </m:sub>
                       </m:sSub>
@@ -31613,7 +32748,13 @@
                             <a:rPr lang="en-US" sz="2400" i="1">
                               <a:latin typeface="Cambria Math"/>
                             </a:rPr>
-                            <m:t>−3</m:t>
+                            <m:t>−</m:t>
+                          </m:r>
+                          <m:r>
+                            <a:rPr lang="en-US" sz="2400" i="1">
+                              <a:latin typeface="Cambria Math"/>
+                            </a:rPr>
+                            <m:t>3</m:t>
                           </m:r>
                         </m:sup>
                       </m:sSup>
@@ -31716,13 +32857,25 @@
                         <a:rPr lang="en-US" sz="2400" b="0" i="0" smtClean="0">
                           <a:latin typeface="Cambria Math" panose="02040503050406030204" pitchFamily="18" charset="0"/>
                         </a:rPr>
-                        <m:t>−11</m:t>
+                        <m:t>−</m:t>
+                      </m:r>
+                      <m:r>
+                        <a:rPr lang="en-US" sz="2400" b="0" i="0" smtClean="0">
+                          <a:latin typeface="Cambria Math" panose="02040503050406030204" pitchFamily="18" charset="0"/>
+                        </a:rPr>
+                        <m:t>11</m:t>
                       </m:r>
                       <m:r>
                         <a:rPr lang="en-US" sz="2400">
                           <a:latin typeface="Cambria Math"/>
                         </a:rPr>
-                        <m:t>+5</m:t>
+                        <m:t>+</m:t>
+                      </m:r>
+                      <m:r>
+                        <a:rPr lang="en-US" sz="2400">
+                          <a:latin typeface="Cambria Math"/>
+                        </a:rPr>
+                        <m:t>5</m:t>
                       </m:r>
                       <m:r>
                         <a:rPr lang="en-US" sz="2400" i="1">
@@ -31751,7 +32904,13 @@
                             <a:rPr lang="en-US" sz="2400" i="1">
                               <a:latin typeface="Cambria Math"/>
                             </a:rPr>
-                            <m:t>−3</m:t>
+                            <m:t>−</m:t>
+                          </m:r>
+                          <m:r>
+                            <a:rPr lang="en-US" sz="2400" i="1">
+                              <a:latin typeface="Cambria Math"/>
+                            </a:rPr>
+                            <m:t>3</m:t>
                           </m:r>
                         </m:sup>
                       </m:sSup>
@@ -31854,7 +33013,25 @@
                         <a:rPr lang="en-US" sz="2400" b="0" i="0" smtClean="0">
                           <a:latin typeface="Cambria Math" panose="02040503050406030204" pitchFamily="18" charset="0"/>
                         </a:rPr>
-                        <m:t>−10.375</m:t>
+                        <m:t>−</m:t>
+                      </m:r>
+                      <m:r>
+                        <a:rPr lang="en-US" sz="2400" b="0" i="0" smtClean="0">
+                          <a:latin typeface="Cambria Math" panose="02040503050406030204" pitchFamily="18" charset="0"/>
+                        </a:rPr>
+                        <m:t>10</m:t>
+                      </m:r>
+                      <m:r>
+                        <a:rPr lang="en-US" sz="2400" b="0" i="0" smtClean="0">
+                          <a:latin typeface="Cambria Math" panose="02040503050406030204" pitchFamily="18" charset="0"/>
+                        </a:rPr>
+                        <m:t>.</m:t>
+                      </m:r>
+                      <m:r>
+                        <a:rPr lang="en-US" sz="2400" b="0" i="0" smtClean="0">
+                          <a:latin typeface="Cambria Math" panose="02040503050406030204" pitchFamily="18" charset="0"/>
+                        </a:rPr>
+                        <m:t>375</m:t>
                       </m:r>
                     </m:oMath>
                   </m:oMathPara>
@@ -32087,8 +33264,8 @@
           </a:p>
         </p:txBody>
       </p:sp>
-      <mc:AlternateContent xmlns:mc="http://schemas.openxmlformats.org/markup-compatibility/2006" xmlns:a14="http://schemas.microsoft.com/office/drawing/2010/main">
-        <mc:Choice Requires="a14">
+      <mc:AlternateContent xmlns:mc="http://schemas.openxmlformats.org/markup-compatibility/2006">
+        <mc:Choice xmlns:a14="http://schemas.microsoft.com/office/drawing/2010/main" Requires="a14">
           <p:sp>
             <p:nvSpPr>
               <p:cNvPr id="4" name="Content Placeholder 3">
@@ -32126,7 +33303,7 @@
                 </a14:m>
                 <a:r>
                   <a:rPr lang="en-US" dirty="0"/>
-                  <a:t> into decimal with Two’s Complement notation’</a:t>
+                  <a:t> into decimal with Two’s Complement notation</a:t>
                 </a:r>
               </a:p>
               <a:p>
@@ -32445,7 +33622,7 @@
             </p:txBody>
           </p:sp>
         </mc:Choice>
-        <mc:Fallback xmlns="">
+        <mc:Fallback>
           <p:sp>
             <p:nvSpPr>
               <p:cNvPr id="4" name="Content Placeholder 3">
@@ -32577,8 +33754,8 @@
           </a:p>
         </p:txBody>
       </p:sp>
-      <mc:AlternateContent xmlns:mc="http://schemas.openxmlformats.org/markup-compatibility/2006" xmlns:a14="http://schemas.microsoft.com/office/drawing/2010/main">
-        <mc:Choice Requires="a14">
+      <mc:AlternateContent xmlns:mc="http://schemas.openxmlformats.org/markup-compatibility/2006">
+        <mc:Choice xmlns:a14="http://schemas.microsoft.com/office/drawing/2010/main" Requires="a14">
           <p:sp>
             <p:nvSpPr>
               <p:cNvPr id="4" name="Content Placeholder 3"/>
@@ -32597,7 +33774,7 @@
             </p:spPr>
             <p:txBody>
               <a:bodyPr>
-                <a:normAutofit/>
+                <a:normAutofit lnSpcReduction="10000"/>
               </a:bodyPr>
               <a:lstStyle/>
               <a:p>
@@ -32839,7 +34016,7 @@
               <a:p>
                 <a:r>
                   <a:rPr lang="en-US" sz="2200" dirty="0"/>
-                  <a:t>Error = </a:t>
+                  <a:t>Approximation Error = </a:t>
                 </a:r>
                 <a:r>
                   <a:rPr lang="en-US" sz="2200" dirty="0" err="1"/>
@@ -32980,13 +34157,13 @@
                 </a14:m>
                 <a:r>
                   <a:rPr lang="en-US" sz="2200" dirty="0"/>
-                  <a:t> </a:t>
+                  <a:t> (due to limited number of fractional bits (12))</a:t>
                 </a:r>
               </a:p>
             </p:txBody>
           </p:sp>
         </mc:Choice>
-        <mc:Fallback xmlns="">
+        <mc:Fallback>
           <p:sp>
             <p:nvSpPr>
               <p:cNvPr id="4" name="Content Placeholder 3"/>
@@ -33005,7 +34182,7 @@
               <a:blipFill>
                 <a:blip r:embed="rId2"/>
                 <a:stretch>
-                  <a:fillRect l="-292" t="-1522"/>
+                  <a:fillRect l="-292" t="-2609" b="-1087"/>
                 </a:stretch>
               </a:blipFill>
             </p:spPr>
@@ -33827,8 +35004,8 @@
           </a:p>
         </p:txBody>
       </p:sp>
-      <mc:AlternateContent xmlns:mc="http://schemas.openxmlformats.org/markup-compatibility/2006" xmlns:a14="http://schemas.microsoft.com/office/drawing/2010/main">
-        <mc:Choice Requires="a14">
+      <mc:AlternateContent xmlns:mc="http://schemas.openxmlformats.org/markup-compatibility/2006">
+        <mc:Choice xmlns:a14="http://schemas.microsoft.com/office/drawing/2010/main" Requires="a14">
           <p:sp>
             <p:nvSpPr>
               <p:cNvPr id="4" name="Content Placeholder 3"/>
@@ -34265,7 +35442,7 @@
               <a:p>
                 <a:r>
                   <a:rPr lang="en-US" sz="2000" dirty="0"/>
-                  <a:t>Error = </a:t>
+                  <a:t>Approximation Error = </a:t>
                 </a:r>
                 <a:r>
                   <a:rPr lang="en-US" sz="2000" dirty="0" err="1"/>
@@ -34415,7 +35592,7 @@
             </p:txBody>
           </p:sp>
         </mc:Choice>
-        <mc:Fallback xmlns="">
+        <mc:Fallback>
           <p:sp>
             <p:nvSpPr>
               <p:cNvPr id="4" name="Content Placeholder 3"/>

--- a/PPTs/Ch12_13_Fixed_Floating_Point_Numbers.pptx
+++ b/PPTs/Ch12_13_Fixed_Floating_Point_Numbers.pptx
@@ -6368,7 +6368,7 @@
             <a:fld id="{BD4F56A7-3CDE-194F-B9AF-D598FBBF1989}" type="datetimeFigureOut">
               <a:rPr lang="en-US" smtClean="0"/>
               <a:pPr/>
-              <a:t>4/28/2026</a:t>
+              <a:t>4/30/2026</a:t>
             </a:fld>
             <a:endParaRPr lang="en-US"/>
           </a:p>
@@ -6536,7 +6536,7 @@
             <a:fld id="{1E52AD58-60CE-E948-9CBA-0BD7030FC28E}" type="datetimeFigureOut">
               <a:rPr lang="en-US" smtClean="0"/>
               <a:pPr/>
-              <a:t>4/28/2026</a:t>
+              <a:t>4/30/2026</a:t>
             </a:fld>
             <a:endParaRPr lang="en-US"/>
           </a:p>
@@ -6902,6 +6902,94 @@
   <p:cSld>
     <p:spTree>
       <p:nvGrpSpPr>
+        <p:cNvPr id="1" name=""/>
+        <p:cNvGrpSpPr/>
+        <p:nvPr/>
+      </p:nvGrpSpPr>
+      <p:grpSpPr>
+        <a:xfrm>
+          <a:off x="0" y="0"/>
+          <a:ext cx="0" cy="0"/>
+          <a:chOff x="0" y="0"/>
+          <a:chExt cx="0" cy="0"/>
+        </a:xfrm>
+      </p:grpSpPr>
+      <p:sp>
+        <p:nvSpPr>
+          <p:cNvPr id="2" name="Slide Image Placeholder 1"/>
+          <p:cNvSpPr>
+            <a:spLocks noGrp="1" noRot="1" noChangeAspect="1"/>
+          </p:cNvSpPr>
+          <p:nvPr>
+            <p:ph type="sldImg"/>
+          </p:nvPr>
+        </p:nvSpPr>
+        <p:spPr/>
+      </p:sp>
+      <p:sp>
+        <p:nvSpPr>
+          <p:cNvPr id="3" name="Notes Placeholder 2"/>
+          <p:cNvSpPr>
+            <a:spLocks noGrp="1"/>
+          </p:cNvSpPr>
+          <p:nvPr>
+            <p:ph type="body" idx="1"/>
+          </p:nvPr>
+        </p:nvSpPr>
+        <p:spPr/>
+        <p:txBody>
+          <a:bodyPr/>
+          <a:lstStyle/>
+          <a:p>
+            <a:r>
+              <a:rPr lang="en-US" dirty="0"/>
+              <a:t>32-9=23</a:t>
+            </a:r>
+          </a:p>
+        </p:txBody>
+      </p:sp>
+      <p:sp>
+        <p:nvSpPr>
+          <p:cNvPr id="4" name="Slide Number Placeholder 3"/>
+          <p:cNvSpPr>
+            <a:spLocks noGrp="1"/>
+          </p:cNvSpPr>
+          <p:nvPr>
+            <p:ph type="sldNum" sz="quarter" idx="5"/>
+          </p:nvPr>
+        </p:nvSpPr>
+        <p:spPr/>
+        <p:txBody>
+          <a:bodyPr/>
+          <a:lstStyle/>
+          <a:p>
+            <a:fld id="{D624DF53-3DD3-9F45-9E7E-472B96F1AB81}" type="slidenum">
+              <a:rPr lang="en-US" smtClean="0"/>
+              <a:pPr/>
+              <a:t>20</a:t>
+            </a:fld>
+            <a:endParaRPr lang="en-US"/>
+          </a:p>
+        </p:txBody>
+      </p:sp>
+    </p:spTree>
+    <p:extLst>
+      <p:ext uri="{BB962C8B-B14F-4D97-AF65-F5344CB8AC3E}">
+        <p14:creationId xmlns:p14="http://schemas.microsoft.com/office/powerpoint/2010/main" val="2676423194"/>
+      </p:ext>
+    </p:extLst>
+  </p:cSld>
+  <p:clrMapOvr>
+    <a:masterClrMapping/>
+  </p:clrMapOvr>
+</p:notes>
+</file>
+
+<file path=ppt/notesSlides/notesSlide11.xml><?xml version="1.0" encoding="utf-8"?>
+<p:notes xmlns:a="http://schemas.openxmlformats.org/drawingml/2006/main" xmlns:r="http://schemas.openxmlformats.org/officeDocument/2006/relationships" xmlns:p="http://schemas.openxmlformats.org/presentationml/2006/main">
+  <p:cSld>
+    <p:spTree>
+      <p:nvGrpSpPr>
         <p:cNvPr id="1" name="">
           <a:extLst>
             <a:ext uri="{FF2B5EF4-FFF2-40B4-BE49-F238E27FC236}">
@@ -7006,7 +7094,7 @@
 </p:notes>
 </file>
 
-<file path=ppt/notesSlides/notesSlide11.xml><?xml version="1.0" encoding="utf-8"?>
+<file path=ppt/notesSlides/notesSlide12.xml><?xml version="1.0" encoding="utf-8"?>
 <p:notes xmlns:a="http://schemas.openxmlformats.org/drawingml/2006/main" xmlns:r="http://schemas.openxmlformats.org/officeDocument/2006/relationships" xmlns:p="http://schemas.openxmlformats.org/presentationml/2006/main">
   <p:cSld>
     <p:spTree>
@@ -7118,7 +7206,7 @@
 </p:notes>
 </file>
 
-<file path=ppt/notesSlides/notesSlide12.xml><?xml version="1.0" encoding="utf-8"?>
+<file path=ppt/notesSlides/notesSlide13.xml><?xml version="1.0" encoding="utf-8"?>
 <p:notes xmlns:a="http://schemas.openxmlformats.org/drawingml/2006/main" xmlns:r="http://schemas.openxmlformats.org/officeDocument/2006/relationships" xmlns:p="http://schemas.openxmlformats.org/presentationml/2006/main">
   <p:cSld>
     <p:spTree>
@@ -7978,9 +8066,18 @@
           <a:lstStyle/>
           <a:p>
             <a:r>
-              <a:rPr lang="en-US" dirty="0"/>
-              <a:t>32-9=23</a:t>
+              <a:rPr lang="en-US" altLang="zh-CN" sz="1200" b="0" i="0" kern="1200" dirty="0">
+                <a:solidFill>
+                  <a:schemeClr val="tx1"/>
+                </a:solidFill>
+                <a:effectLst/>
+                <a:latin typeface="+mn-lt"/>
+                <a:ea typeface="+mn-ea"/>
+                <a:cs typeface="+mn-cs"/>
+              </a:rPr>
+              <a:t>1.3</a:t>
             </a:r>
+            <a:endParaRPr lang="zh-CN" altLang="en-US" dirty="0"/>
           </a:p>
         </p:txBody>
       </p:sp>
@@ -8002,7 +8099,7 @@
             <a:fld id="{D624DF53-3DD3-9F45-9E7E-472B96F1AB81}" type="slidenum">
               <a:rPr lang="en-US" smtClean="0"/>
               <a:pPr/>
-              <a:t>20</a:t>
+              <a:t>19</a:t>
             </a:fld>
             <a:endParaRPr lang="en-US"/>
           </a:p>
@@ -8011,7 +8108,7 @@
     </p:spTree>
     <p:extLst>
       <p:ext uri="{BB962C8B-B14F-4D97-AF65-F5344CB8AC3E}">
-        <p14:creationId xmlns:p14="http://schemas.microsoft.com/office/powerpoint/2010/main" val="2676423194"/>
+        <p14:creationId xmlns:p14="http://schemas.microsoft.com/office/powerpoint/2010/main" val="912433574"/>
       </p:ext>
     </p:extLst>
   </p:cSld>
@@ -8163,7 +8260,7 @@
             <a:pPr eaLnBrk="1" latinLnBrk="0" hangingPunct="1"/>
             <a:fld id="{8E8B2B42-CBC2-7D4E-BA50-0E7F29B4DAAB}" type="datetime1">
               <a:rPr lang="en-US" smtClean="0"/>
-              <a:t>4/28/2026</a:t>
+              <a:t>4/30/2026</a:t>
             </a:fld>
             <a:endParaRPr lang="en-US" sz="1600" dirty="0"/>
           </a:p>
@@ -8523,7 +8620,7 @@
             <a:pPr eaLnBrk="1" latinLnBrk="0" hangingPunct="1"/>
             <a:fld id="{597D1259-3A46-254C-ADDB-B5DA4F1DF3DA}" type="datetime1">
               <a:rPr lang="en-US" smtClean="0"/>
-              <a:t>4/28/2026</a:t>
+              <a:t>4/30/2026</a:t>
             </a:fld>
             <a:endParaRPr lang="en-US"/>
           </a:p>
@@ -8699,7 +8796,7 @@
             <a:pPr eaLnBrk="1" latinLnBrk="0" hangingPunct="1"/>
             <a:fld id="{CCA104EC-54AA-E04F-BDC0-22B4E8892699}" type="datetime1">
               <a:rPr lang="en-US" smtClean="0"/>
-              <a:t>4/28/2026</a:t>
+              <a:t>4/30/2026</a:t>
             </a:fld>
             <a:endParaRPr lang="en-US"/>
           </a:p>
@@ -8935,7 +9032,7 @@
             <a:pPr eaLnBrk="1" latinLnBrk="0" hangingPunct="1"/>
             <a:fld id="{A9E6F060-20EB-3246-9088-08BF5F1271DE}" type="datetime1">
               <a:rPr lang="en-US" smtClean="0"/>
-              <a:t>4/28/2026</a:t>
+              <a:t>4/30/2026</a:t>
             </a:fld>
             <a:endParaRPr lang="en-US" dirty="0"/>
           </a:p>
@@ -9205,7 +9302,7 @@
             <a:pPr eaLnBrk="1" latinLnBrk="0" hangingPunct="1"/>
             <a:fld id="{34C82E41-DA7E-CA4C-823B-C759BEA16CE8}" type="datetime1">
               <a:rPr lang="en-US" smtClean="0"/>
-              <a:t>4/28/2026</a:t>
+              <a:t>4/30/2026</a:t>
             </a:fld>
             <a:endParaRPr lang="en-US" dirty="0"/>
           </a:p>
@@ -9426,7 +9523,7 @@
             <a:pPr eaLnBrk="1" latinLnBrk="0" hangingPunct="1"/>
             <a:fld id="{2500C8B0-EB1A-0A41-B839-C4B99CD2225A}" type="datetime1">
               <a:rPr lang="en-US" smtClean="0"/>
-              <a:t>4/28/2026</a:t>
+              <a:t>4/30/2026</a:t>
             </a:fld>
             <a:endParaRPr lang="en-US"/>
           </a:p>
@@ -9779,7 +9876,7 @@
             <a:pPr eaLnBrk="1" latinLnBrk="0" hangingPunct="1"/>
             <a:fld id="{4F16605B-D952-1149-A111-28A5633BAE48}" type="datetime1">
               <a:rPr lang="en-US" smtClean="0"/>
-              <a:t>4/28/2026</a:t>
+              <a:t>4/30/2026</a:t>
             </a:fld>
             <a:endParaRPr lang="en-US"/>
           </a:p>
@@ -10012,7 +10109,7 @@
             <a:pPr eaLnBrk="1" latinLnBrk="0" hangingPunct="1"/>
             <a:fld id="{91109A1C-29B2-B04E-8365-C9D22C4AE842}" type="datetime1">
               <a:rPr lang="en-US" smtClean="0"/>
-              <a:t>4/28/2026</a:t>
+              <a:t>4/30/2026</a:t>
             </a:fld>
             <a:endParaRPr lang="en-US"/>
           </a:p>
@@ -10154,7 +10251,7 @@
             <a:pPr eaLnBrk="1" latinLnBrk="0" hangingPunct="1"/>
             <a:fld id="{2CE417B6-A42B-064A-8677-46C55C4F613A}" type="datetime1">
               <a:rPr lang="en-US" smtClean="0"/>
-              <a:t>4/28/2026</a:t>
+              <a:t>4/30/2026</a:t>
             </a:fld>
             <a:endParaRPr lang="en-US"/>
           </a:p>
@@ -10432,7 +10529,7 @@
             <a:pPr eaLnBrk="1" latinLnBrk="0" hangingPunct="1"/>
             <a:fld id="{DE76F5AD-3F1F-7141-BC8A-012C5728BE2D}" type="datetime1">
               <a:rPr lang="en-US" smtClean="0"/>
-              <a:t>4/28/2026</a:t>
+              <a:t>4/30/2026</a:t>
             </a:fld>
             <a:endParaRPr lang="en-US"/>
           </a:p>
@@ -10840,7 +10937,7 @@
             <a:pPr eaLnBrk="1" latinLnBrk="0" hangingPunct="1"/>
             <a:fld id="{09FA12B8-739E-4D47-A14C-180C3BC10865}" type="datetime1">
               <a:rPr lang="en-US" smtClean="0"/>
-              <a:t>4/28/2026</a:t>
+              <a:t>4/30/2026</a:t>
             </a:fld>
             <a:endParaRPr lang="en-US"/>
           </a:p>
@@ -11178,7 +11275,7 @@
             <a:pPr eaLnBrk="1" latinLnBrk="0" hangingPunct="1"/>
             <a:fld id="{CDD18CD8-E404-844E-A4BD-DF69B8E5881E}" type="datetime1">
               <a:rPr lang="en-US" smtClean="0"/>
-              <a:t>4/28/2026</a:t>
+              <a:t>4/30/2026</a:t>
             </a:fld>
             <a:endParaRPr lang="en-US" sz="1400" dirty="0">
               <a:solidFill>
@@ -13489,7 +13586,7 @@
         <p:spPr/>
         <p:txBody>
           <a:bodyPr>
-            <a:normAutofit lnSpcReduction="10000"/>
+            <a:normAutofit fontScale="92500"/>
           </a:bodyPr>
           <a:lstStyle/>
           <a:p>
@@ -13537,14 +13634,25 @@
             <a:pPr lvl="1"/>
             <a:r>
               <a:rPr lang="en-US" dirty="0"/>
-              <a:t>Stored exponent 0 → actual exponent = -127 (used for special/subnormal cases)</a:t>
+              <a:t>Stored exponent 0 → reserved for zero and subnormal numbers</a:t>
+            </a:r>
+          </a:p>
+          <a:p>
+            <a:pPr lvl="2"/>
+            <a:r>
+              <a:rPr lang="en-US" dirty="0"/>
+              <a:t>For subnormal numbers: effective exponent = -126, and there is no hidden leading 1</a:t>
             </a:r>
           </a:p>
           <a:p>
             <a:pPr lvl="1"/>
             <a:r>
+              <a:rPr lang="en-US"/>
+              <a:t>Stored </a:t>
+            </a:r>
+            <a:r>
               <a:rPr lang="en-US" dirty="0"/>
-              <a:t>Stored exponent 127 → actual exponent = 0</a:t>
+              <a:t>exponent 127 → actual exponent = 0</a:t>
             </a:r>
           </a:p>
           <a:p>
@@ -13666,8 +13774,8 @@
           </a:p>
         </p:txBody>
       </p:sp>
-      <mc:AlternateContent xmlns:mc="http://schemas.openxmlformats.org/markup-compatibility/2006">
-        <mc:Choice xmlns:a14="http://schemas.microsoft.com/office/drawing/2010/main" Requires="a14">
+      <mc:AlternateContent xmlns:mc="http://schemas.openxmlformats.org/markup-compatibility/2006" xmlns:a14="http://schemas.microsoft.com/office/drawing/2010/main">
+        <mc:Choice Requires="a14">
           <p:sp>
             <p:nvSpPr>
               <p:cNvPr id="4" name="Content Placeholder 3"/>
@@ -13771,7 +13879,13 @@
                       <a:rPr lang="en-US" sz="2800" i="1">
                         <a:latin typeface="Cambria Math"/>
                       </a:rPr>
-                      <m:t>=131</m:t>
+                      <m:t>=</m:t>
+                    </m:r>
+                    <m:r>
+                      <a:rPr lang="en-US" sz="2800" i="1">
+                        <a:latin typeface="Cambria Math"/>
+                      </a:rPr>
+                      <m:t>131</m:t>
                     </m:r>
                   </m:oMath>
                 </a14:m>
@@ -13797,7 +13911,19 @@
                           <a:rPr lang="en-US" sz="2800" i="1">
                             <a:latin typeface="Cambria Math"/>
                           </a:rPr>
-                          <m:t>0.1111111</m:t>
+                          <m:t>0</m:t>
+                        </m:r>
+                        <m:r>
+                          <a:rPr lang="en-US" sz="2800" i="1">
+                            <a:latin typeface="Cambria Math"/>
+                          </a:rPr>
+                          <m:t>.</m:t>
+                        </m:r>
+                        <m:r>
+                          <a:rPr lang="en-US" sz="2800" i="1">
+                            <a:latin typeface="Cambria Math"/>
+                          </a:rPr>
+                          <m:t>1111111</m:t>
                         </m:r>
                       </m:e>
                       <m:sub>
@@ -13822,7 +13948,13 @@
                       <a:rPr lang="en-US" sz="2800" i="1">
                         <a:latin typeface="Cambria Math"/>
                       </a:rPr>
-                      <m:t>1×</m:t>
+                      <m:t>1</m:t>
+                    </m:r>
+                    <m:r>
+                      <a:rPr lang="en-US" sz="2800" i="1">
+                        <a:latin typeface="Cambria Math"/>
+                      </a:rPr>
+                      <m:t>×</m:t>
                     </m:r>
                     <m:sSup>
                       <m:sSupPr>
@@ -13845,7 +13977,13 @@
                           <a:rPr lang="en-US" sz="2800" i="1">
                             <a:latin typeface="Cambria Math"/>
                           </a:rPr>
-                          <m:t>−1</m:t>
+                          <m:t>−</m:t>
+                        </m:r>
+                        <m:r>
+                          <a:rPr lang="en-US" sz="2800" i="1">
+                            <a:latin typeface="Cambria Math"/>
+                          </a:rPr>
+                          <m:t>1</m:t>
                         </m:r>
                       </m:sup>
                     </m:sSup>
@@ -13853,7 +13991,19 @@
                       <a:rPr lang="en-US" sz="2800" i="1">
                         <a:latin typeface="Cambria Math"/>
                       </a:rPr>
-                      <m:t>+1×</m:t>
+                      <m:t>+</m:t>
+                    </m:r>
+                    <m:r>
+                      <a:rPr lang="en-US" sz="2800" i="1">
+                        <a:latin typeface="Cambria Math"/>
+                      </a:rPr>
+                      <m:t>1</m:t>
+                    </m:r>
+                    <m:r>
+                      <a:rPr lang="en-US" sz="2800" i="1">
+                        <a:latin typeface="Cambria Math"/>
+                      </a:rPr>
+                      <m:t>×</m:t>
                     </m:r>
                     <m:sSup>
                       <m:sSupPr>
@@ -13876,7 +14026,13 @@
                           <a:rPr lang="en-US" sz="2800" i="1">
                             <a:latin typeface="Cambria Math"/>
                           </a:rPr>
-                          <m:t>−2</m:t>
+                          <m:t>−</m:t>
+                        </m:r>
+                        <m:r>
+                          <a:rPr lang="en-US" sz="2800" i="1">
+                            <a:latin typeface="Cambria Math"/>
+                          </a:rPr>
+                          <m:t>2</m:t>
                         </m:r>
                       </m:sup>
                     </m:sSup>
@@ -13884,7 +14040,19 @@
                       <a:rPr lang="en-US" sz="2800" i="1">
                         <a:latin typeface="Cambria Math"/>
                       </a:rPr>
-                      <m:t>+1×</m:t>
+                      <m:t>+</m:t>
+                    </m:r>
+                    <m:r>
+                      <a:rPr lang="en-US" sz="2800" i="1">
+                        <a:latin typeface="Cambria Math"/>
+                      </a:rPr>
+                      <m:t>1</m:t>
+                    </m:r>
+                    <m:r>
+                      <a:rPr lang="en-US" sz="2800" i="1">
+                        <a:latin typeface="Cambria Math"/>
+                      </a:rPr>
+                      <m:t>×</m:t>
                     </m:r>
                     <m:sSup>
                       <m:sSupPr>
@@ -13907,7 +14075,13 @@
                           <a:rPr lang="en-US" sz="2800" i="1">
                             <a:latin typeface="Cambria Math"/>
                           </a:rPr>
-                          <m:t>−3</m:t>
+                          <m:t>−</m:t>
+                        </m:r>
+                        <m:r>
+                          <a:rPr lang="en-US" sz="2800" i="1">
+                            <a:latin typeface="Cambria Math"/>
+                          </a:rPr>
+                          <m:t>3</m:t>
                         </m:r>
                       </m:sup>
                     </m:sSup>
@@ -13915,7 +14089,19 @@
                       <a:rPr lang="en-US" sz="2800" i="1">
                         <a:latin typeface="Cambria Math"/>
                       </a:rPr>
-                      <m:t>+1×</m:t>
+                      <m:t>+</m:t>
+                    </m:r>
+                    <m:r>
+                      <a:rPr lang="en-US" sz="2800" i="1">
+                        <a:latin typeface="Cambria Math"/>
+                      </a:rPr>
+                      <m:t>1</m:t>
+                    </m:r>
+                    <m:r>
+                      <a:rPr lang="en-US" sz="2800" i="1">
+                        <a:latin typeface="Cambria Math"/>
+                      </a:rPr>
+                      <m:t>×</m:t>
                     </m:r>
                     <m:sSup>
                       <m:sSupPr>
@@ -13938,7 +14124,13 @@
                           <a:rPr lang="en-US" sz="2800" i="1">
                             <a:latin typeface="Cambria Math"/>
                           </a:rPr>
-                          <m:t>−4</m:t>
+                          <m:t>−</m:t>
+                        </m:r>
+                        <m:r>
+                          <a:rPr lang="en-US" sz="2800" i="1">
+                            <a:latin typeface="Cambria Math"/>
+                          </a:rPr>
+                          <m:t>4</m:t>
                         </m:r>
                       </m:sup>
                     </m:sSup>
@@ -13946,7 +14138,19 @@
                       <a:rPr lang="en-US" sz="2800" i="1">
                         <a:latin typeface="Cambria Math"/>
                       </a:rPr>
-                      <m:t>+1×</m:t>
+                      <m:t>+</m:t>
+                    </m:r>
+                    <m:r>
+                      <a:rPr lang="en-US" sz="2800" i="1">
+                        <a:latin typeface="Cambria Math"/>
+                      </a:rPr>
+                      <m:t>1</m:t>
+                    </m:r>
+                    <m:r>
+                      <a:rPr lang="en-US" sz="2800" i="1">
+                        <a:latin typeface="Cambria Math"/>
+                      </a:rPr>
+                      <m:t>×</m:t>
                     </m:r>
                     <m:sSup>
                       <m:sSupPr>
@@ -13969,7 +14173,13 @@
                           <a:rPr lang="en-US" sz="2800" i="1">
                             <a:latin typeface="Cambria Math"/>
                           </a:rPr>
-                          <m:t>−5</m:t>
+                          <m:t>−</m:t>
+                        </m:r>
+                        <m:r>
+                          <a:rPr lang="en-US" sz="2800" i="1">
+                            <a:latin typeface="Cambria Math"/>
+                          </a:rPr>
+                          <m:t>5</m:t>
                         </m:r>
                       </m:sup>
                     </m:sSup>
@@ -13977,7 +14187,19 @@
                       <a:rPr lang="en-US" sz="2800" i="1">
                         <a:latin typeface="Cambria Math"/>
                       </a:rPr>
-                      <m:t>+1×</m:t>
+                      <m:t>+</m:t>
+                    </m:r>
+                    <m:r>
+                      <a:rPr lang="en-US" sz="2800" i="1">
+                        <a:latin typeface="Cambria Math"/>
+                      </a:rPr>
+                      <m:t>1</m:t>
+                    </m:r>
+                    <m:r>
+                      <a:rPr lang="en-US" sz="2800" i="1">
+                        <a:latin typeface="Cambria Math"/>
+                      </a:rPr>
+                      <m:t>×</m:t>
                     </m:r>
                     <m:sSup>
                       <m:sSupPr>
@@ -14000,7 +14222,13 @@
                           <a:rPr lang="en-US" sz="2800" i="1">
                             <a:latin typeface="Cambria Math"/>
                           </a:rPr>
-                          <m:t>−6</m:t>
+                          <m:t>−</m:t>
+                        </m:r>
+                        <m:r>
+                          <a:rPr lang="en-US" sz="2800" i="1">
+                            <a:latin typeface="Cambria Math"/>
+                          </a:rPr>
+                          <m:t>6</m:t>
                         </m:r>
                       </m:sup>
                     </m:sSup>
@@ -14008,7 +14236,19 @@
                       <a:rPr lang="en-US" sz="2800" i="1">
                         <a:latin typeface="Cambria Math"/>
                       </a:rPr>
-                      <m:t>+1×</m:t>
+                      <m:t>+</m:t>
+                    </m:r>
+                    <m:r>
+                      <a:rPr lang="en-US" sz="2800" i="1">
+                        <a:latin typeface="Cambria Math"/>
+                      </a:rPr>
+                      <m:t>1</m:t>
+                    </m:r>
+                    <m:r>
+                      <a:rPr lang="en-US" sz="2800" i="1">
+                        <a:latin typeface="Cambria Math"/>
+                      </a:rPr>
+                      <m:t>×</m:t>
                     </m:r>
                     <m:sSup>
                       <m:sSupPr>
@@ -14031,7 +14271,13 @@
                           <a:rPr lang="en-US" sz="2800" i="1">
                             <a:latin typeface="Cambria Math"/>
                           </a:rPr>
-                          <m:t>−7</m:t>
+                          <m:t>−</m:t>
+                        </m:r>
+                        <m:r>
+                          <a:rPr lang="en-US" sz="2800" i="1">
+                            <a:latin typeface="Cambria Math"/>
+                          </a:rPr>
+                          <m:t>7</m:t>
                         </m:r>
                       </m:sup>
                     </m:sSup>
@@ -14045,7 +14291,19 @@
                       <a:rPr lang="en-US" sz="2800" i="1">
                         <a:latin typeface="Cambria Math"/>
                       </a:rPr>
-                      <m:t>0.9921875</m:t>
+                      <m:t>0</m:t>
+                    </m:r>
+                    <m:r>
+                      <a:rPr lang="en-US" sz="2800" i="1">
+                        <a:latin typeface="Cambria Math"/>
+                      </a:rPr>
+                      <m:t>.</m:t>
+                    </m:r>
+                    <m:r>
+                      <a:rPr lang="en-US" sz="2800" i="1">
+                        <a:latin typeface="Cambria Math"/>
+                      </a:rPr>
+                      <m:t>9921875</m:t>
                     </m:r>
                   </m:oMath>
                 </a14:m>
@@ -14091,7 +14349,13 @@
                               <a:rPr lang="en-US" sz="2800" i="1">
                                 <a:latin typeface="Cambria Math"/>
                               </a:rPr>
-                              <m:t>−1</m:t>
+                              <m:t>−</m:t>
+                            </m:r>
+                            <m:r>
+                              <a:rPr lang="en-US" sz="2800" i="1">
+                                <a:latin typeface="Cambria Math"/>
+                              </a:rPr>
+                              <m:t>1</m:t>
                             </m:r>
                           </m:e>
                         </m:d>
@@ -14124,7 +14388,13 @@
                           <a:rPr lang="en-US" sz="2800" i="1">
                             <a:latin typeface="Cambria Math"/>
                           </a:rPr>
-                          <m:t>1+</m:t>
+                          <m:t>1</m:t>
+                        </m:r>
+                        <m:r>
+                          <a:rPr lang="en-US" sz="2800" i="1">
+                            <a:latin typeface="Cambria Math"/>
+                          </a:rPr>
+                          <m:t>+</m:t>
                         </m:r>
                         <m:r>
                           <a:rPr lang="en-US" sz="2800" i="1">
@@ -14167,7 +14437,13 @@
                           <a:rPr lang="en-US" sz="2800" i="1">
                             <a:latin typeface="Cambria Math"/>
                           </a:rPr>
-                          <m:t>−127</m:t>
+                          <m:t>−</m:t>
+                        </m:r>
+                        <m:r>
+                          <a:rPr lang="en-US" sz="2800" i="1">
+                            <a:latin typeface="Cambria Math"/>
+                          </a:rPr>
+                          <m:t>127</m:t>
                         </m:r>
                       </m:sup>
                     </m:sSup>
@@ -14218,7 +14494,13 @@
                                 <a:rPr lang="en-US" sz="2800" i="1">
                                   <a:latin typeface="Cambria Math"/>
                                 </a:rPr>
-                                <m:t>−1</m:t>
+                                <m:t>−</m:t>
+                              </m:r>
+                              <m:r>
+                                <a:rPr lang="en-US" sz="2800" i="1">
+                                  <a:latin typeface="Cambria Math"/>
+                                </a:rPr>
+                                <m:t>1</m:t>
                               </m:r>
                             </m:e>
                           </m:d>
@@ -14251,7 +14533,31 @@
                             <a:rPr lang="en-US" sz="2800" i="1">
                               <a:latin typeface="Cambria Math"/>
                             </a:rPr>
-                            <m:t>1+0.9921875</m:t>
+                            <m:t>1</m:t>
+                          </m:r>
+                          <m:r>
+                            <a:rPr lang="en-US" sz="2800" i="1">
+                              <a:latin typeface="Cambria Math"/>
+                            </a:rPr>
+                            <m:t>+</m:t>
+                          </m:r>
+                          <m:r>
+                            <a:rPr lang="en-US" sz="2800" i="1">
+                              <a:latin typeface="Cambria Math"/>
+                            </a:rPr>
+                            <m:t>0</m:t>
+                          </m:r>
+                          <m:r>
+                            <a:rPr lang="en-US" sz="2800" i="1">
+                              <a:latin typeface="Cambria Math"/>
+                            </a:rPr>
+                            <m:t>.</m:t>
+                          </m:r>
+                          <m:r>
+                            <a:rPr lang="en-US" sz="2800" i="1">
+                              <a:latin typeface="Cambria Math"/>
+                            </a:rPr>
+                            <m:t>9921875</m:t>
                           </m:r>
                         </m:e>
                       </m:d>
@@ -14282,7 +14588,19 @@
                             <a:rPr lang="en-US" sz="2800" i="1">
                               <a:latin typeface="Cambria Math"/>
                             </a:rPr>
-                            <m:t>131−127</m:t>
+                            <m:t>131</m:t>
+                          </m:r>
+                          <m:r>
+                            <a:rPr lang="en-US" sz="2800" i="1">
+                              <a:latin typeface="Cambria Math"/>
+                            </a:rPr>
+                            <m:t>−</m:t>
+                          </m:r>
+                          <m:r>
+                            <a:rPr lang="en-US" sz="2800" i="1">
+                              <a:latin typeface="Cambria Math"/>
+                            </a:rPr>
+                            <m:t>127</m:t>
                           </m:r>
                         </m:sup>
                       </m:sSup>
@@ -14301,7 +14619,43 @@
                         <a:rPr lang="en-US" sz="2800" i="1">
                           <a:latin typeface="Cambria Math"/>
                         </a:rPr>
-                        <m:t>−1×1.9921875×</m:t>
+                        <m:t>−</m:t>
+                      </m:r>
+                      <m:r>
+                        <a:rPr lang="en-US" sz="2800" i="1">
+                          <a:latin typeface="Cambria Math"/>
+                        </a:rPr>
+                        <m:t>1</m:t>
+                      </m:r>
+                      <m:r>
+                        <a:rPr lang="en-US" sz="2800" i="1">
+                          <a:latin typeface="Cambria Math"/>
+                        </a:rPr>
+                        <m:t>×</m:t>
+                      </m:r>
+                      <m:r>
+                        <a:rPr lang="en-US" sz="2800" i="1">
+                          <a:latin typeface="Cambria Math"/>
+                        </a:rPr>
+                        <m:t>1</m:t>
+                      </m:r>
+                      <m:r>
+                        <a:rPr lang="en-US" sz="2800" i="1">
+                          <a:latin typeface="Cambria Math"/>
+                        </a:rPr>
+                        <m:t>.</m:t>
+                      </m:r>
+                      <m:r>
+                        <a:rPr lang="en-US" sz="2800" i="1">
+                          <a:latin typeface="Cambria Math"/>
+                        </a:rPr>
+                        <m:t>9921875</m:t>
+                      </m:r>
+                      <m:r>
+                        <a:rPr lang="en-US" sz="2800" i="1">
+                          <a:latin typeface="Cambria Math"/>
+                        </a:rPr>
+                        <m:t>×</m:t>
                       </m:r>
                       <m:sSup>
                         <m:sSupPr>
@@ -14343,7 +14697,25 @@
                         <a:rPr lang="en-US" sz="2800" i="1">
                           <a:latin typeface="Cambria Math"/>
                         </a:rPr>
-                        <m:t>−31.875</m:t>
+                        <m:t>−</m:t>
+                      </m:r>
+                      <m:r>
+                        <a:rPr lang="en-US" sz="2800" i="1">
+                          <a:latin typeface="Cambria Math"/>
+                        </a:rPr>
+                        <m:t>31</m:t>
+                      </m:r>
+                      <m:r>
+                        <a:rPr lang="en-US" sz="2800" i="1">
+                          <a:latin typeface="Cambria Math"/>
+                        </a:rPr>
+                        <m:t>.</m:t>
+                      </m:r>
+                      <m:r>
+                        <a:rPr lang="en-US" sz="2800" i="1">
+                          <a:latin typeface="Cambria Math"/>
+                        </a:rPr>
+                        <m:t>875</m:t>
                       </m:r>
                     </m:oMath>
                   </m:oMathPara>
@@ -14398,7 +14770,13 @@
                       <a:rPr lang="en-US" sz="2800" i="1">
                         <a:latin typeface="Cambria Math"/>
                       </a:rPr>
-                      <m:t>=133</m:t>
+                      <m:t>=</m:t>
+                    </m:r>
+                    <m:r>
+                      <a:rPr lang="en-US" sz="2800" i="1">
+                        <a:latin typeface="Cambria Math"/>
+                      </a:rPr>
+                      <m:t>133</m:t>
                     </m:r>
                   </m:oMath>
                 </a14:m>
@@ -14424,7 +14802,43 @@
                       <a:rPr lang="en-US" sz="2800" i="1">
                         <a:latin typeface="Cambria Math"/>
                       </a:rPr>
-                      <m:t>−1×1.9921875×</m:t>
+                      <m:t>−</m:t>
+                    </m:r>
+                    <m:r>
+                      <a:rPr lang="en-US" sz="2800" i="1">
+                        <a:latin typeface="Cambria Math"/>
+                      </a:rPr>
+                      <m:t>1</m:t>
+                    </m:r>
+                    <m:r>
+                      <a:rPr lang="en-US" sz="2800" i="1">
+                        <a:latin typeface="Cambria Math"/>
+                      </a:rPr>
+                      <m:t>×</m:t>
+                    </m:r>
+                    <m:r>
+                      <a:rPr lang="en-US" sz="2800" i="1">
+                        <a:latin typeface="Cambria Math"/>
+                      </a:rPr>
+                      <m:t>1</m:t>
+                    </m:r>
+                    <m:r>
+                      <a:rPr lang="en-US" sz="2800" i="1">
+                        <a:latin typeface="Cambria Math"/>
+                      </a:rPr>
+                      <m:t>.</m:t>
+                    </m:r>
+                    <m:r>
+                      <a:rPr lang="en-US" sz="2800" i="1">
+                        <a:latin typeface="Cambria Math"/>
+                      </a:rPr>
+                      <m:t>9921875</m:t>
+                    </m:r>
+                    <m:r>
+                      <a:rPr lang="en-US" sz="2800" i="1">
+                        <a:latin typeface="Cambria Math"/>
+                      </a:rPr>
+                      <m:t>×</m:t>
                     </m:r>
                     <m:sSup>
                       <m:sSupPr>
@@ -14455,7 +14869,25 @@
                       <a:rPr lang="en-US" sz="2800" b="0" i="1" smtClean="0">
                         <a:latin typeface="Cambria Math" panose="02040503050406030204" pitchFamily="18" charset="0"/>
                       </a:rPr>
-                      <m:t>=−127.5</m:t>
+                      <m:t>=−</m:t>
+                    </m:r>
+                    <m:r>
+                      <a:rPr lang="en-US" sz="2800" b="0" i="1" smtClean="0">
+                        <a:latin typeface="Cambria Math" panose="02040503050406030204" pitchFamily="18" charset="0"/>
+                      </a:rPr>
+                      <m:t>127</m:t>
+                    </m:r>
+                    <m:r>
+                      <a:rPr lang="en-US" sz="2800" b="0" i="1" smtClean="0">
+                        <a:latin typeface="Cambria Math" panose="02040503050406030204" pitchFamily="18" charset="0"/>
+                      </a:rPr>
+                      <m:t>.</m:t>
+                    </m:r>
+                    <m:r>
+                      <a:rPr lang="en-US" sz="2800" b="0" i="1" smtClean="0">
+                        <a:latin typeface="Cambria Math" panose="02040503050406030204" pitchFamily="18" charset="0"/>
+                      </a:rPr>
+                      <m:t>5</m:t>
                     </m:r>
                   </m:oMath>
                 </a14:m>
@@ -14476,13 +14908,31 @@
                       <a:rPr lang="en-US" sz="2500" i="1">
                         <a:latin typeface="Cambria Math" panose="02040503050406030204" pitchFamily="18" charset="0"/>
                       </a:rPr>
-                      <m:t>133−127</m:t>
+                      <m:t>133</m:t>
+                    </m:r>
+                    <m:r>
+                      <a:rPr lang="en-US" sz="2500" i="1">
+                        <a:latin typeface="Cambria Math" panose="02040503050406030204" pitchFamily="18" charset="0"/>
+                      </a:rPr>
+                      <m:t>−</m:t>
+                    </m:r>
+                    <m:r>
+                      <a:rPr lang="en-US" sz="2500" i="1">
+                        <a:latin typeface="Cambria Math" panose="02040503050406030204" pitchFamily="18" charset="0"/>
+                      </a:rPr>
+                      <m:t>127</m:t>
                     </m:r>
                     <m:r>
                       <a:rPr lang="en-US" sz="2500" b="0" i="1" smtClean="0">
                         <a:latin typeface="Cambria Math" panose="02040503050406030204" pitchFamily="18" charset="0"/>
                       </a:rPr>
-                      <m:t>=6</m:t>
+                      <m:t>=</m:t>
+                    </m:r>
+                    <m:r>
+                      <a:rPr lang="en-US" sz="2500" b="0" i="1" smtClean="0">
+                        <a:latin typeface="Cambria Math" panose="02040503050406030204" pitchFamily="18" charset="0"/>
+                      </a:rPr>
+                      <m:t>6</m:t>
                     </m:r>
                   </m:oMath>
                 </a14:m>
@@ -14536,7 +14986,13 @@
                       <a:rPr lang="en-US" sz="2800" i="1">
                         <a:latin typeface="Cambria Math"/>
                       </a:rPr>
-                      <m:t>=134</m:t>
+                      <m:t>=</m:t>
+                    </m:r>
+                    <m:r>
+                      <a:rPr lang="en-US" sz="2800" i="1">
+                        <a:latin typeface="Cambria Math"/>
+                      </a:rPr>
+                      <m:t>134</m:t>
                     </m:r>
                   </m:oMath>
                 </a14:m>
@@ -14562,7 +15018,43 @@
                       <a:rPr lang="en-US" sz="2800" i="1">
                         <a:latin typeface="Cambria Math"/>
                       </a:rPr>
-                      <m:t>−1×1.9921875×</m:t>
+                      <m:t>−</m:t>
+                    </m:r>
+                    <m:r>
+                      <a:rPr lang="en-US" sz="2800" i="1">
+                        <a:latin typeface="Cambria Math"/>
+                      </a:rPr>
+                      <m:t>1</m:t>
+                    </m:r>
+                    <m:r>
+                      <a:rPr lang="en-US" sz="2800" i="1">
+                        <a:latin typeface="Cambria Math"/>
+                      </a:rPr>
+                      <m:t>×</m:t>
+                    </m:r>
+                    <m:r>
+                      <a:rPr lang="en-US" sz="2800" i="1">
+                        <a:latin typeface="Cambria Math"/>
+                      </a:rPr>
+                      <m:t>1</m:t>
+                    </m:r>
+                    <m:r>
+                      <a:rPr lang="en-US" sz="2800" i="1">
+                        <a:latin typeface="Cambria Math"/>
+                      </a:rPr>
+                      <m:t>.</m:t>
+                    </m:r>
+                    <m:r>
+                      <a:rPr lang="en-US" sz="2800" i="1">
+                        <a:latin typeface="Cambria Math"/>
+                      </a:rPr>
+                      <m:t>9921875</m:t>
+                    </m:r>
+                    <m:r>
+                      <a:rPr lang="en-US" sz="2800" i="1">
+                        <a:latin typeface="Cambria Math"/>
+                      </a:rPr>
+                      <m:t>×</m:t>
                     </m:r>
                     <m:sSup>
                       <m:sSupPr>
@@ -14629,7 +15121,13 @@
                       <a:rPr lang="en-US" sz="2500" i="1">
                         <a:latin typeface="Cambria Math" panose="02040503050406030204" pitchFamily="18" charset="0"/>
                       </a:rPr>
-                      <m:t>−127</m:t>
+                      <m:t>−</m:t>
+                    </m:r>
+                    <m:r>
+                      <a:rPr lang="en-US" sz="2500" i="1">
+                        <a:latin typeface="Cambria Math" panose="02040503050406030204" pitchFamily="18" charset="0"/>
+                      </a:rPr>
+                      <m:t>127</m:t>
                     </m:r>
                     <m:r>
                       <a:rPr lang="en-US" sz="2500" i="1">
@@ -14668,7 +15166,7 @@
             </p:txBody>
           </p:sp>
         </mc:Choice>
-        <mc:Fallback>
+        <mc:Fallback xmlns="">
           <p:sp>
             <p:nvSpPr>
               <p:cNvPr id="4" name="Content Placeholder 3"/>
@@ -14867,8 +15365,8 @@
           </a:p>
         </p:txBody>
       </p:sp>
-      <mc:AlternateContent xmlns:mc="http://schemas.openxmlformats.org/markup-compatibility/2006">
-        <mc:Choice xmlns:a14="http://schemas.microsoft.com/office/drawing/2010/main" Requires="a14">
+      <mc:AlternateContent xmlns:mc="http://schemas.openxmlformats.org/markup-compatibility/2006" xmlns:a14="http://schemas.microsoft.com/office/drawing/2010/main">
+        <mc:Choice Requires="a14">
           <p:sp>
             <p:nvSpPr>
               <p:cNvPr id="4" name="Content Placeholder 3">
@@ -15653,7 +16151,7 @@
             </p:txBody>
           </p:sp>
         </mc:Choice>
-        <mc:Fallback>
+        <mc:Fallback xmlns="">
           <p:sp>
             <p:nvSpPr>
               <p:cNvPr id="4" name="Content Placeholder 3">
@@ -18640,7 +19138,7 @@
                 <a:ext cx="10363200" cy="5013960"/>
               </a:xfrm>
               <a:blipFill>
-                <a:blip r:embed="rId2"/>
+                <a:blip r:embed="rId3"/>
                 <a:stretch>
                   <a:fillRect l="-294" t="-1460" b="-2555"/>
                 </a:stretch>
@@ -19931,8 +20429,8 @@
           </a:p>
         </p:txBody>
       </p:sp>
-      <mc:AlternateContent xmlns:mc="http://schemas.openxmlformats.org/markup-compatibility/2006" xmlns:a14="http://schemas.microsoft.com/office/drawing/2010/main">
-        <mc:Choice Requires="a14">
+      <mc:AlternateContent xmlns:mc="http://schemas.openxmlformats.org/markup-compatibility/2006">
+        <mc:Choice xmlns:a14="http://schemas.microsoft.com/office/drawing/2010/main" Requires="a14">
           <p:sp>
             <p:nvSpPr>
               <p:cNvPr id="4" name="Content Placeholder 3">
@@ -21093,7 +21591,7 @@
                     <a:latin typeface="Consolas" panose="020B0609020204030204" pitchFamily="49" charset="0"/>
                     <a:cs typeface="Consolas" panose="020B0609020204030204" pitchFamily="49" charset="0"/>
                   </a:rPr>
-                  <a:t>14.5</a:t>
+                  <a:t>1.3</a:t>
                 </a:r>
                 <a:r>
                   <a:rPr lang="en-US" dirty="0"/>
@@ -21137,7 +21635,7 @@
             </p:txBody>
           </p:sp>
         </mc:Choice>
-        <mc:Fallback xmlns="">
+        <mc:Fallback>
           <p:sp>
             <p:nvSpPr>
               <p:cNvPr id="4" name="Content Placeholder 3">
@@ -21171,7 +21669,7 @@
               <a:lstStyle/>
               <a:p>
                 <a:r>
-                  <a:rPr lang="en-US">
+                  <a:rPr lang="zh-CN" altLang="en-US">
                     <a:noFill/>
                   </a:rPr>
                   <a:t> </a:t>
@@ -27013,8 +27511,8 @@
           </a:graphicData>
         </a:graphic>
       </p:graphicFrame>
-      <mc:AlternateContent xmlns:mc="http://schemas.openxmlformats.org/markup-compatibility/2006">
-        <mc:Choice xmlns:a14="http://schemas.microsoft.com/office/drawing/2010/main" Requires="a14">
+      <mc:AlternateContent xmlns:mc="http://schemas.openxmlformats.org/markup-compatibility/2006" xmlns:a14="http://schemas.microsoft.com/office/drawing/2010/main">
+        <mc:Choice Requires="a14">
           <p:sp>
             <p:nvSpPr>
               <p:cNvPr id="7" name="Rectangle 6">
@@ -27042,7 +27540,6 @@
               </a:bodyPr>
               <a:lstStyle/>
               <a:p>
-                <a:pPr/>
                 <a14:m>
                   <m:oMath xmlns:m="http://schemas.openxmlformats.org/officeDocument/2006/math">
                     <m:r>
@@ -27744,7 +28241,7 @@
             </p:txBody>
           </p:sp>
         </mc:Choice>
-        <mc:Fallback>
+        <mc:Fallback xmlns="">
           <p:sp>
             <p:nvSpPr>
               <p:cNvPr id="7" name="Rectangle 6">
@@ -30401,8 +30898,8 @@
           </a:p>
         </p:txBody>
       </p:sp>
-      <mc:AlternateContent xmlns:mc="http://schemas.openxmlformats.org/markup-compatibility/2006">
-        <mc:Choice xmlns:a14="http://schemas.microsoft.com/office/drawing/2010/main" Requires="a14">
+      <mc:AlternateContent xmlns:mc="http://schemas.openxmlformats.org/markup-compatibility/2006" xmlns:a14="http://schemas.microsoft.com/office/drawing/2010/main">
+        <mc:Choice Requires="a14">
           <p:sp>
             <p:nvSpPr>
               <p:cNvPr id="17" name="Rectangle 16">
@@ -30430,7 +30927,6 @@
               </a:bodyPr>
               <a:lstStyle/>
               <a:p>
-                <a:pPr/>
                 <a14:m>
                   <m:oMath xmlns:m="http://schemas.openxmlformats.org/officeDocument/2006/math">
                     <m:r>
@@ -31075,7 +31571,7 @@
                       <m:d>
                         <m:dPr>
                           <m:ctrlPr>
-                            <a:rPr lang="en-US" sz="2000" b="0" i="0" smtClean="0">
+                            <a:rPr lang="en-US" sz="2000" b="0" i="1" smtClean="0">
                               <a:latin typeface="Cambria Math" panose="02040503050406030204" pitchFamily="18" charset="0"/>
                             </a:rPr>
                           </m:ctrlPr>
@@ -31179,7 +31675,7 @@
             </p:txBody>
           </p:sp>
         </mc:Choice>
-        <mc:Fallback>
+        <mc:Fallback xmlns="">
           <p:sp>
             <p:nvSpPr>
               <p:cNvPr id="17" name="Rectangle 16">
@@ -33264,8 +33760,8 @@
           </a:p>
         </p:txBody>
       </p:sp>
-      <mc:AlternateContent xmlns:mc="http://schemas.openxmlformats.org/markup-compatibility/2006">
-        <mc:Choice xmlns:a14="http://schemas.microsoft.com/office/drawing/2010/main" Requires="a14">
+      <mc:AlternateContent xmlns:mc="http://schemas.openxmlformats.org/markup-compatibility/2006" xmlns:a14="http://schemas.microsoft.com/office/drawing/2010/main">
+        <mc:Choice Requires="a14">
           <p:sp>
             <p:nvSpPr>
               <p:cNvPr id="4" name="Content Placeholder 3">
@@ -33622,7 +34118,7 @@
             </p:txBody>
           </p:sp>
         </mc:Choice>
-        <mc:Fallback>
+        <mc:Fallback xmlns="">
           <p:sp>
             <p:nvSpPr>
               <p:cNvPr id="4" name="Content Placeholder 3">
@@ -33754,8 +34250,8 @@
           </a:p>
         </p:txBody>
       </p:sp>
-      <mc:AlternateContent xmlns:mc="http://schemas.openxmlformats.org/markup-compatibility/2006">
-        <mc:Choice xmlns:a14="http://schemas.microsoft.com/office/drawing/2010/main" Requires="a14">
+      <mc:AlternateContent xmlns:mc="http://schemas.openxmlformats.org/markup-compatibility/2006" xmlns:a14="http://schemas.microsoft.com/office/drawing/2010/main">
+        <mc:Choice Requires="a14">
           <p:sp>
             <p:nvSpPr>
               <p:cNvPr id="4" name="Content Placeholder 3"/>
@@ -33835,25 +34331,7 @@
                         </a:solidFill>
                         <a:latin typeface="Cambria Math" panose="02040503050406030204" pitchFamily="18" charset="0"/>
                       </a:rPr>
-                      <m:t>12867</m:t>
-                    </m:r>
-                    <m:r>
-                      <a:rPr lang="en-US" sz="2200" i="1">
-                        <a:solidFill>
-                          <a:srgbClr val="0000FF"/>
-                        </a:solidFill>
-                        <a:latin typeface="Cambria Math" panose="02040503050406030204" pitchFamily="18" charset="0"/>
-                      </a:rPr>
-                      <m:t>.</m:t>
-                    </m:r>
-                    <m:r>
-                      <a:rPr lang="en-US" sz="2200" i="1">
-                        <a:solidFill>
-                          <a:srgbClr val="0000FF"/>
-                        </a:solidFill>
-                        <a:latin typeface="Cambria Math" panose="02040503050406030204" pitchFamily="18" charset="0"/>
-                      </a:rPr>
-                      <m:t>964928</m:t>
+                      <m:t>12867.964928</m:t>
                     </m:r>
                   </m:oMath>
                 </a14:m>
@@ -33889,19 +34367,7 @@
                           <a:rPr lang="en-US" sz="2200" i="1">
                             <a:latin typeface="Cambria Math" panose="02040503050406030204" pitchFamily="18" charset="0"/>
                           </a:rPr>
-                          <m:t>12867</m:t>
-                        </m:r>
-                        <m:r>
-                          <a:rPr lang="en-US" sz="2200" i="1">
-                            <a:latin typeface="Cambria Math" panose="02040503050406030204" pitchFamily="18" charset="0"/>
-                          </a:rPr>
-                          <m:t>.</m:t>
-                        </m:r>
-                        <m:r>
-                          <a:rPr lang="en-US" sz="2200" i="1">
-                            <a:latin typeface="Cambria Math" panose="02040503050406030204" pitchFamily="18" charset="0"/>
-                          </a:rPr>
-                          <m:t>964928</m:t>
+                          <m:t>12867.964928</m:t>
                         </m:r>
                         <m:r>
                           <a:rPr lang="en-US" sz="2200">
@@ -34096,31 +34562,7 @@
                       <a:rPr lang="en-US" sz="2200" i="1">
                         <a:latin typeface="Cambria Math" panose="02040503050406030204" pitchFamily="18" charset="0"/>
                       </a:rPr>
-                      <m:t>=</m:t>
-                    </m:r>
-                    <m:r>
-                      <a:rPr lang="en-US" sz="2200" i="1">
-                        <a:latin typeface="Cambria Math" panose="02040503050406030204" pitchFamily="18" charset="0"/>
-                      </a:rPr>
-                      <m:t>8</m:t>
-                    </m:r>
-                    <m:r>
-                      <a:rPr lang="en-US" sz="2200" i="1">
-                        <a:latin typeface="Cambria Math" panose="02040503050406030204" pitchFamily="18" charset="0"/>
-                      </a:rPr>
-                      <m:t>.</m:t>
-                    </m:r>
-                    <m:r>
-                      <a:rPr lang="en-US" sz="2200" i="1">
-                        <a:latin typeface="Cambria Math" panose="02040503050406030204" pitchFamily="18" charset="0"/>
-                      </a:rPr>
-                      <m:t>5625</m:t>
-                    </m:r>
-                    <m:r>
-                      <a:rPr lang="en-US" sz="2200" i="1">
-                        <a:latin typeface="Cambria Math" panose="02040503050406030204" pitchFamily="18" charset="0"/>
-                      </a:rPr>
-                      <m:t>×</m:t>
+                      <m:t>=8.5625×</m:t>
                     </m:r>
                     <m:sSup>
                       <m:sSupPr>
@@ -34143,13 +34585,7 @@
                           <a:rPr lang="en-US" sz="2200" i="1">
                             <a:latin typeface="Cambria Math" panose="02040503050406030204" pitchFamily="18" charset="0"/>
                           </a:rPr>
-                          <m:t>−</m:t>
-                        </m:r>
-                        <m:r>
-                          <a:rPr lang="en-US" sz="2200" i="1">
-                            <a:latin typeface="Cambria Math" panose="02040503050406030204" pitchFamily="18" charset="0"/>
-                          </a:rPr>
-                          <m:t>6</m:t>
+                          <m:t>−6</m:t>
                         </m:r>
                       </m:sup>
                     </m:sSup>
@@ -34163,7 +34599,7 @@
             </p:txBody>
           </p:sp>
         </mc:Choice>
-        <mc:Fallback>
+        <mc:Fallback xmlns="">
           <p:sp>
             <p:nvSpPr>
               <p:cNvPr id="4" name="Content Placeholder 3"/>
@@ -34240,31 +34676,7 @@
                       <a:rPr lang="en-US" sz="2400">
                         <a:latin typeface="Cambria Math" panose="02040503050406030204" pitchFamily="18" charset="0"/>
                       </a:rPr>
-                      <m:t> = </m:t>
-                    </m:r>
-                    <m:r>
-                      <a:rPr lang="en-US" sz="2400">
-                        <a:latin typeface="Cambria Math" panose="02040503050406030204" pitchFamily="18" charset="0"/>
-                      </a:rPr>
-                      <m:t>3</m:t>
-                    </m:r>
-                    <m:r>
-                      <a:rPr lang="en-US" sz="2400">
-                        <a:latin typeface="Cambria Math" panose="02040503050406030204" pitchFamily="18" charset="0"/>
-                      </a:rPr>
-                      <m:t>. </m:t>
-                    </m:r>
-                    <m:r>
-                      <a:rPr lang="en-US" sz="2400">
-                        <a:latin typeface="Cambria Math" panose="02040503050406030204" pitchFamily="18" charset="0"/>
-                      </a:rPr>
-                      <m:t>141593</m:t>
-                    </m:r>
-                    <m:r>
-                      <a:rPr lang="en-US" sz="2400">
-                        <a:latin typeface="Cambria Math" panose="02040503050406030204" pitchFamily="18" charset="0"/>
-                      </a:rPr>
-                      <m:t> </m:t>
+                      <m:t> = 3. 141593 </m:t>
                     </m:r>
                   </m:oMath>
                 </a14:m>
@@ -35004,8 +35416,8 @@
           </a:p>
         </p:txBody>
       </p:sp>
-      <mc:AlternateContent xmlns:mc="http://schemas.openxmlformats.org/markup-compatibility/2006">
-        <mc:Choice xmlns:a14="http://schemas.microsoft.com/office/drawing/2010/main" Requires="a14">
+      <mc:AlternateContent xmlns:mc="http://schemas.openxmlformats.org/markup-compatibility/2006" xmlns:a14="http://schemas.microsoft.com/office/drawing/2010/main">
+        <mc:Choice Requires="a14">
           <p:sp>
             <p:nvSpPr>
               <p:cNvPr id="4" name="Content Placeholder 3"/>
@@ -35085,7 +35497,34 @@
                         </a:solidFill>
                         <a:latin typeface="Cambria Math" panose="02040503050406030204" pitchFamily="18" charset="0"/>
                       </a:rPr>
-                      <m:t>−12867.964928</m:t>
+                      <m:t>−</m:t>
+                    </m:r>
+                    <m:r>
+                      <a:rPr lang="en-US" sz="2000" i="1">
+                        <a:solidFill>
+                          <a:srgbClr val="0000FF"/>
+                        </a:solidFill>
+                        <a:latin typeface="Cambria Math" panose="02040503050406030204" pitchFamily="18" charset="0"/>
+                      </a:rPr>
+                      <m:t>12867</m:t>
+                    </m:r>
+                    <m:r>
+                      <a:rPr lang="en-US" sz="2000" i="1">
+                        <a:solidFill>
+                          <a:srgbClr val="0000FF"/>
+                        </a:solidFill>
+                        <a:latin typeface="Cambria Math" panose="02040503050406030204" pitchFamily="18" charset="0"/>
+                      </a:rPr>
+                      <m:t>.</m:t>
+                    </m:r>
+                    <m:r>
+                      <a:rPr lang="en-US" sz="2000" i="1">
+                        <a:solidFill>
+                          <a:srgbClr val="0000FF"/>
+                        </a:solidFill>
+                        <a:latin typeface="Cambria Math" panose="02040503050406030204" pitchFamily="18" charset="0"/>
+                      </a:rPr>
+                      <m:t>964928</m:t>
                     </m:r>
                   </m:oMath>
                 </a14:m>
@@ -35126,7 +35565,25 @@
                           <a:rPr lang="en-US" sz="2000" i="1">
                             <a:latin typeface="Cambria Math" panose="02040503050406030204" pitchFamily="18" charset="0"/>
                           </a:rPr>
-                          <m:t>−12867.964928</m:t>
+                          <m:t>−</m:t>
+                        </m:r>
+                        <m:r>
+                          <a:rPr lang="en-US" sz="2000" i="1">
+                            <a:latin typeface="Cambria Math" panose="02040503050406030204" pitchFamily="18" charset="0"/>
+                          </a:rPr>
+                          <m:t>12867</m:t>
+                        </m:r>
+                        <m:r>
+                          <a:rPr lang="en-US" sz="2000" i="1">
+                            <a:latin typeface="Cambria Math" panose="02040503050406030204" pitchFamily="18" charset="0"/>
+                          </a:rPr>
+                          <m:t>.</m:t>
+                        </m:r>
+                        <m:r>
+                          <a:rPr lang="en-US" sz="2000" i="1">
+                            <a:latin typeface="Cambria Math" panose="02040503050406030204" pitchFamily="18" charset="0"/>
+                          </a:rPr>
+                          <m:t>964928</m:t>
                         </m:r>
                         <m:r>
                           <a:rPr lang="en-US" sz="2000">
@@ -35592,7 +36049,7 @@
             </p:txBody>
           </p:sp>
         </mc:Choice>
-        <mc:Fallback>
+        <mc:Fallback xmlns="">
           <p:sp>
             <p:nvSpPr>
               <p:cNvPr id="4" name="Content Placeholder 3"/>

--- a/PPTs/Ch12_13_Fixed_Floating_Point_Numbers.pptx
+++ b/PPTs/Ch12_13_Fixed_Floating_Point_Numbers.pptx
@@ -6368,7 +6368,7 @@
             <a:fld id="{BD4F56A7-3CDE-194F-B9AF-D598FBBF1989}" type="datetimeFigureOut">
               <a:rPr lang="en-US" smtClean="0"/>
               <a:pPr/>
-              <a:t>4/30/2026</a:t>
+              <a:t>5/2/2026</a:t>
             </a:fld>
             <a:endParaRPr lang="en-US"/>
           </a:p>
@@ -6536,7 +6536,7 @@
             <a:fld id="{1E52AD58-60CE-E948-9CBA-0BD7030FC28E}" type="datetimeFigureOut">
               <a:rPr lang="en-US" smtClean="0"/>
               <a:pPr/>
-              <a:t>4/30/2026</a:t>
+              <a:t>5/2/2026</a:t>
             </a:fld>
             <a:endParaRPr lang="en-US"/>
           </a:p>
@@ -8260,7 +8260,7 @@
             <a:pPr eaLnBrk="1" latinLnBrk="0" hangingPunct="1"/>
             <a:fld id="{8E8B2B42-CBC2-7D4E-BA50-0E7F29B4DAAB}" type="datetime1">
               <a:rPr lang="en-US" smtClean="0"/>
-              <a:t>4/30/2026</a:t>
+              <a:t>5/2/2026</a:t>
             </a:fld>
             <a:endParaRPr lang="en-US" sz="1600" dirty="0"/>
           </a:p>
@@ -8620,7 +8620,7 @@
             <a:pPr eaLnBrk="1" latinLnBrk="0" hangingPunct="1"/>
             <a:fld id="{597D1259-3A46-254C-ADDB-B5DA4F1DF3DA}" type="datetime1">
               <a:rPr lang="en-US" smtClean="0"/>
-              <a:t>4/30/2026</a:t>
+              <a:t>5/2/2026</a:t>
             </a:fld>
             <a:endParaRPr lang="en-US"/>
           </a:p>
@@ -8796,7 +8796,7 @@
             <a:pPr eaLnBrk="1" latinLnBrk="0" hangingPunct="1"/>
             <a:fld id="{CCA104EC-54AA-E04F-BDC0-22B4E8892699}" type="datetime1">
               <a:rPr lang="en-US" smtClean="0"/>
-              <a:t>4/30/2026</a:t>
+              <a:t>5/2/2026</a:t>
             </a:fld>
             <a:endParaRPr lang="en-US"/>
           </a:p>
@@ -9032,7 +9032,7 @@
             <a:pPr eaLnBrk="1" latinLnBrk="0" hangingPunct="1"/>
             <a:fld id="{A9E6F060-20EB-3246-9088-08BF5F1271DE}" type="datetime1">
               <a:rPr lang="en-US" smtClean="0"/>
-              <a:t>4/30/2026</a:t>
+              <a:t>5/2/2026</a:t>
             </a:fld>
             <a:endParaRPr lang="en-US" dirty="0"/>
           </a:p>
@@ -9302,7 +9302,7 @@
             <a:pPr eaLnBrk="1" latinLnBrk="0" hangingPunct="1"/>
             <a:fld id="{34C82E41-DA7E-CA4C-823B-C759BEA16CE8}" type="datetime1">
               <a:rPr lang="en-US" smtClean="0"/>
-              <a:t>4/30/2026</a:t>
+              <a:t>5/2/2026</a:t>
             </a:fld>
             <a:endParaRPr lang="en-US" dirty="0"/>
           </a:p>
@@ -9523,7 +9523,7 @@
             <a:pPr eaLnBrk="1" latinLnBrk="0" hangingPunct="1"/>
             <a:fld id="{2500C8B0-EB1A-0A41-B839-C4B99CD2225A}" type="datetime1">
               <a:rPr lang="en-US" smtClean="0"/>
-              <a:t>4/30/2026</a:t>
+              <a:t>5/2/2026</a:t>
             </a:fld>
             <a:endParaRPr lang="en-US"/>
           </a:p>
@@ -9876,7 +9876,7 @@
             <a:pPr eaLnBrk="1" latinLnBrk="0" hangingPunct="1"/>
             <a:fld id="{4F16605B-D952-1149-A111-28A5633BAE48}" type="datetime1">
               <a:rPr lang="en-US" smtClean="0"/>
-              <a:t>4/30/2026</a:t>
+              <a:t>5/2/2026</a:t>
             </a:fld>
             <a:endParaRPr lang="en-US"/>
           </a:p>
@@ -10109,7 +10109,7 @@
             <a:pPr eaLnBrk="1" latinLnBrk="0" hangingPunct="1"/>
             <a:fld id="{91109A1C-29B2-B04E-8365-C9D22C4AE842}" type="datetime1">
               <a:rPr lang="en-US" smtClean="0"/>
-              <a:t>4/30/2026</a:t>
+              <a:t>5/2/2026</a:t>
             </a:fld>
             <a:endParaRPr lang="en-US"/>
           </a:p>
@@ -10251,7 +10251,7 @@
             <a:pPr eaLnBrk="1" latinLnBrk="0" hangingPunct="1"/>
             <a:fld id="{2CE417B6-A42B-064A-8677-46C55C4F613A}" type="datetime1">
               <a:rPr lang="en-US" smtClean="0"/>
-              <a:t>4/30/2026</a:t>
+              <a:t>5/2/2026</a:t>
             </a:fld>
             <a:endParaRPr lang="en-US"/>
           </a:p>
@@ -10529,7 +10529,7 @@
             <a:pPr eaLnBrk="1" latinLnBrk="0" hangingPunct="1"/>
             <a:fld id="{DE76F5AD-3F1F-7141-BC8A-012C5728BE2D}" type="datetime1">
               <a:rPr lang="en-US" smtClean="0"/>
-              <a:t>4/30/2026</a:t>
+              <a:t>5/2/2026</a:t>
             </a:fld>
             <a:endParaRPr lang="en-US"/>
           </a:p>
@@ -10937,7 +10937,7 @@
             <a:pPr eaLnBrk="1" latinLnBrk="0" hangingPunct="1"/>
             <a:fld id="{09FA12B8-739E-4D47-A14C-180C3BC10865}" type="datetime1">
               <a:rPr lang="en-US" smtClean="0"/>
-              <a:t>4/30/2026</a:t>
+              <a:t>5/2/2026</a:t>
             </a:fld>
             <a:endParaRPr lang="en-US"/>
           </a:p>
@@ -11275,7 +11275,7 @@
             <a:pPr eaLnBrk="1" latinLnBrk="0" hangingPunct="1"/>
             <a:fld id="{CDD18CD8-E404-844E-A4BD-DF69B8E5881E}" type="datetime1">
               <a:rPr lang="en-US" smtClean="0"/>
-              <a:t>4/30/2026</a:t>
+              <a:t>5/2/2026</a:t>
             </a:fld>
             <a:endParaRPr lang="en-US" sz="1400" dirty="0">
               <a:solidFill>
@@ -15486,13 +15486,7 @@
                       <a:rPr lang="en-US" sz="2800" i="1">
                         <a:latin typeface="Cambria Math"/>
                       </a:rPr>
-                      <m:t>=</m:t>
-                    </m:r>
-                    <m:r>
-                      <a:rPr lang="en-US" sz="2800" i="1">
-                        <a:latin typeface="Cambria Math"/>
-                      </a:rPr>
-                      <m:t>129</m:t>
+                      <m:t>=129</m:t>
                     </m:r>
                   </m:oMath>
                 </a14:m>
@@ -15518,13 +15512,7 @@
                           <a:rPr lang="en-US" sz="2800" i="1">
                             <a:latin typeface="Cambria Math"/>
                           </a:rPr>
-                          <m:t>0</m:t>
-                        </m:r>
-                        <m:r>
-                          <a:rPr lang="en-US" sz="2800" i="1">
-                            <a:latin typeface="Cambria Math"/>
-                          </a:rPr>
-                          <m:t>.</m:t>
+                          <m:t>0.</m:t>
                         </m:r>
                         <m:r>
                           <a:rPr lang="en-US" sz="2800" b="0" i="1" smtClean="0">
@@ -15584,13 +15572,7 @@
                           <a:rPr lang="en-US" sz="2800" i="1">
                             <a:latin typeface="Cambria Math"/>
                           </a:rPr>
-                          <m:t>−</m:t>
-                        </m:r>
-                        <m:r>
-                          <a:rPr lang="en-US" sz="2800" i="1">
-                            <a:latin typeface="Cambria Math"/>
-                          </a:rPr>
-                          <m:t>1</m:t>
+                          <m:t>−1</m:t>
                         </m:r>
                       </m:sup>
                     </m:sSup>
@@ -15633,13 +15615,7 @@
                           <a:rPr lang="en-US" sz="2800" i="1">
                             <a:latin typeface="Cambria Math"/>
                           </a:rPr>
-                          <m:t>−</m:t>
-                        </m:r>
-                        <m:r>
-                          <a:rPr lang="en-US" sz="2800" i="1">
-                            <a:latin typeface="Cambria Math"/>
-                          </a:rPr>
-                          <m:t>2</m:t>
+                          <m:t>−2</m:t>
                         </m:r>
                       </m:sup>
                     </m:sSup>
@@ -15647,19 +15623,7 @@
                       <a:rPr lang="en-US" sz="2800" i="1">
                         <a:latin typeface="Cambria Math"/>
                       </a:rPr>
-                      <m:t>+</m:t>
-                    </m:r>
-                    <m:r>
-                      <a:rPr lang="en-US" sz="2800" i="1">
-                        <a:latin typeface="Cambria Math"/>
-                      </a:rPr>
-                      <m:t>1</m:t>
-                    </m:r>
-                    <m:r>
-                      <a:rPr lang="en-US" sz="2800" i="1">
-                        <a:latin typeface="Cambria Math"/>
-                      </a:rPr>
-                      <m:t>×</m:t>
+                      <m:t>+1×</m:t>
                     </m:r>
                     <m:sSup>
                       <m:sSupPr>
@@ -15682,13 +15646,7 @@
                           <a:rPr lang="en-US" sz="2800" i="1">
                             <a:latin typeface="Cambria Math"/>
                           </a:rPr>
-                          <m:t>−</m:t>
-                        </m:r>
-                        <m:r>
-                          <a:rPr lang="en-US" sz="2800" i="1">
-                            <a:latin typeface="Cambria Math"/>
-                          </a:rPr>
-                          <m:t>3</m:t>
+                          <m:t>−3</m:t>
                         </m:r>
                       </m:sup>
                     </m:sSup>
@@ -15702,13 +15660,7 @@
                       <a:rPr lang="en-US" sz="2800" i="1">
                         <a:latin typeface="Cambria Math"/>
                       </a:rPr>
-                      <m:t>0</m:t>
-                    </m:r>
-                    <m:r>
-                      <a:rPr lang="en-US" sz="2800" i="1">
-                        <a:latin typeface="Cambria Math"/>
-                      </a:rPr>
-                      <m:t>.</m:t>
+                      <m:t>0.</m:t>
                     </m:r>
                     <m:r>
                       <a:rPr lang="en-US" sz="2800" b="0" i="1" smtClean="0">
@@ -15760,13 +15712,7 @@
                               <a:rPr lang="en-US" sz="2800" i="1">
                                 <a:latin typeface="Cambria Math"/>
                               </a:rPr>
-                              <m:t>−</m:t>
-                            </m:r>
-                            <m:r>
-                              <a:rPr lang="en-US" sz="2800" i="1">
-                                <a:latin typeface="Cambria Math"/>
-                              </a:rPr>
-                              <m:t>1</m:t>
+                              <m:t>−1</m:t>
                             </m:r>
                           </m:e>
                         </m:d>
@@ -15799,13 +15745,7 @@
                           <a:rPr lang="en-US" sz="2800" i="1">
                             <a:latin typeface="Cambria Math"/>
                           </a:rPr>
-                          <m:t>1</m:t>
-                        </m:r>
-                        <m:r>
-                          <a:rPr lang="en-US" sz="2800" i="1">
-                            <a:latin typeface="Cambria Math"/>
-                          </a:rPr>
-                          <m:t>+</m:t>
+                          <m:t>1+</m:t>
                         </m:r>
                         <m:r>
                           <a:rPr lang="en-US" sz="2800" i="1">
@@ -15848,13 +15788,7 @@
                           <a:rPr lang="en-US" sz="2800" i="1">
                             <a:latin typeface="Cambria Math"/>
                           </a:rPr>
-                          <m:t>−</m:t>
-                        </m:r>
-                        <m:r>
-                          <a:rPr lang="en-US" sz="2800" i="1">
-                            <a:latin typeface="Cambria Math"/>
-                          </a:rPr>
-                          <m:t>127</m:t>
+                          <m:t>−127</m:t>
                         </m:r>
                       </m:sup>
                     </m:sSup>
@@ -15905,13 +15839,7 @@
                                 <a:rPr lang="en-US" sz="2800" i="1">
                                   <a:latin typeface="Cambria Math"/>
                                 </a:rPr>
-                                <m:t>−</m:t>
-                              </m:r>
-                              <m:r>
-                                <a:rPr lang="en-US" sz="2800" i="1">
-                                  <a:latin typeface="Cambria Math"/>
-                                </a:rPr>
-                                <m:t>1</m:t>
+                                <m:t>−1</m:t>
                               </m:r>
                             </m:e>
                           </m:d>
@@ -15944,25 +15872,7 @@
                             <a:rPr lang="en-US" sz="2800" i="1">
                               <a:latin typeface="Cambria Math"/>
                             </a:rPr>
-                            <m:t>1</m:t>
-                          </m:r>
-                          <m:r>
-                            <a:rPr lang="en-US" sz="2800" i="1">
-                              <a:latin typeface="Cambria Math"/>
-                            </a:rPr>
-                            <m:t>+</m:t>
-                          </m:r>
-                          <m:r>
-                            <a:rPr lang="en-US" sz="2800" i="1">
-                              <a:latin typeface="Cambria Math"/>
-                            </a:rPr>
-                            <m:t>0</m:t>
-                          </m:r>
-                          <m:r>
-                            <a:rPr lang="en-US" sz="2800" i="1">
-                              <a:latin typeface="Cambria Math"/>
-                            </a:rPr>
-                            <m:t>.</m:t>
+                            <m:t>1+0.</m:t>
                           </m:r>
                           <m:r>
                             <a:rPr lang="en-US" sz="2800" b="0" i="1" smtClean="0">
@@ -16011,13 +15921,7 @@
                             <a:rPr lang="en-US" sz="2800" i="1">
                               <a:latin typeface="Cambria Math"/>
                             </a:rPr>
-                            <m:t>−</m:t>
-                          </m:r>
-                          <m:r>
-                            <a:rPr lang="en-US" sz="2800" i="1">
-                              <a:latin typeface="Cambria Math"/>
-                            </a:rPr>
-                            <m:t>127</m:t>
+                            <m:t>−127</m:t>
                           </m:r>
                         </m:sup>
                       </m:sSup>
@@ -16036,25 +15940,7 @@
                         <a:rPr lang="en-US" sz="2800" i="1">
                           <a:latin typeface="Cambria Math"/>
                         </a:rPr>
-                        <m:t>1</m:t>
-                      </m:r>
-                      <m:r>
-                        <a:rPr lang="en-US" sz="2800" i="1">
-                          <a:latin typeface="Cambria Math"/>
-                        </a:rPr>
-                        <m:t>×</m:t>
-                      </m:r>
-                      <m:r>
-                        <a:rPr lang="en-US" sz="2800" i="1">
-                          <a:latin typeface="Cambria Math"/>
-                        </a:rPr>
-                        <m:t>1</m:t>
-                      </m:r>
-                      <m:r>
-                        <a:rPr lang="en-US" sz="2800" i="1">
-                          <a:latin typeface="Cambria Math"/>
-                        </a:rPr>
-                        <m:t>.</m:t>
+                        <m:t>1×1.</m:t>
                       </m:r>
                       <m:r>
                         <a:rPr lang="en-US" sz="2800" b="0" i="1" smtClean="0">
@@ -16108,19 +15994,7 @@
                         <a:rPr lang="en-US" sz="2800" b="0" i="1" smtClean="0">
                           <a:latin typeface="Cambria Math" panose="02040503050406030204" pitchFamily="18" charset="0"/>
                         </a:rPr>
-                        <m:t>4</m:t>
-                      </m:r>
-                      <m:r>
-                        <a:rPr lang="en-US" sz="2800" b="0" i="1" smtClean="0">
-                          <a:latin typeface="Cambria Math" panose="02040503050406030204" pitchFamily="18" charset="0"/>
-                        </a:rPr>
-                        <m:t>.</m:t>
-                      </m:r>
-                      <m:r>
-                        <a:rPr lang="en-US" sz="2800" b="0" i="1" smtClean="0">
-                          <a:latin typeface="Cambria Math" panose="02040503050406030204" pitchFamily="18" charset="0"/>
-                        </a:rPr>
-                        <m:t>5</m:t>
+                        <m:t>4.5</m:t>
                       </m:r>
                     </m:oMath>
                   </m:oMathPara>
@@ -17128,13 +17002,7 @@
                       <a:rPr lang="en-US" sz="2800" i="1">
                         <a:latin typeface="Cambria Math"/>
                       </a:rPr>
-                      <m:t>=</m:t>
-                    </m:r>
-                    <m:r>
-                      <a:rPr lang="en-US" sz="2800" i="1">
-                        <a:latin typeface="Cambria Math"/>
-                      </a:rPr>
-                      <m:t>130</m:t>
+                      <m:t>=130</m:t>
                     </m:r>
                   </m:oMath>
                 </a14:m>
@@ -17160,13 +17028,7 @@
                           <a:rPr lang="en-US" sz="2800" i="1">
                             <a:latin typeface="Cambria Math"/>
                           </a:rPr>
-                          <m:t>0</m:t>
-                        </m:r>
-                        <m:r>
-                          <a:rPr lang="en-US" sz="2800" i="1">
-                            <a:latin typeface="Cambria Math"/>
-                          </a:rPr>
-                          <m:t>.</m:t>
+                          <m:t>0.</m:t>
                         </m:r>
                         <m:r>
                           <a:rPr lang="en-US" sz="2800" b="0" i="1" smtClean="0">
@@ -17226,13 +17088,7 @@
                           <a:rPr lang="en-US" sz="2800" i="1">
                             <a:latin typeface="Cambria Math"/>
                           </a:rPr>
-                          <m:t>−</m:t>
-                        </m:r>
-                        <m:r>
-                          <a:rPr lang="en-US" sz="2800" i="1">
-                            <a:latin typeface="Cambria Math"/>
-                          </a:rPr>
-                          <m:t>1</m:t>
+                          <m:t>−1</m:t>
                         </m:r>
                       </m:sup>
                     </m:sSup>
@@ -17275,13 +17131,7 @@
                           <a:rPr lang="en-US" sz="2800" i="1">
                             <a:latin typeface="Cambria Math"/>
                           </a:rPr>
-                          <m:t>−</m:t>
-                        </m:r>
-                        <m:r>
-                          <a:rPr lang="en-US" sz="2800" i="1">
-                            <a:latin typeface="Cambria Math"/>
-                          </a:rPr>
-                          <m:t>2</m:t>
+                          <m:t>−2</m:t>
                         </m:r>
                       </m:sup>
                     </m:sSup>
@@ -17289,19 +17139,7 @@
                       <a:rPr lang="en-US" sz="2800" i="1">
                         <a:latin typeface="Cambria Math"/>
                       </a:rPr>
-                      <m:t>+</m:t>
-                    </m:r>
-                    <m:r>
-                      <a:rPr lang="en-US" sz="2800" i="1">
-                        <a:latin typeface="Cambria Math"/>
-                      </a:rPr>
-                      <m:t>1</m:t>
-                    </m:r>
-                    <m:r>
-                      <a:rPr lang="en-US" sz="2800" i="1">
-                        <a:latin typeface="Cambria Math"/>
-                      </a:rPr>
-                      <m:t>×</m:t>
+                      <m:t>+1×</m:t>
                     </m:r>
                     <m:sSup>
                       <m:sSupPr>
@@ -17338,25 +17176,7 @@
                       <a:rPr lang="en-US" sz="2800" i="1">
                         <a:latin typeface="Cambria Math" panose="02040503050406030204" pitchFamily="18" charset="0"/>
                       </a:rPr>
-                      <m:t>=</m:t>
-                    </m:r>
-                    <m:r>
-                      <a:rPr lang="en-US" sz="2800" i="1">
-                        <a:latin typeface="Cambria Math" panose="02040503050406030204" pitchFamily="18" charset="0"/>
-                      </a:rPr>
-                      <m:t>0</m:t>
-                    </m:r>
-                    <m:r>
-                      <a:rPr lang="en-US" sz="2800" i="1">
-                        <a:latin typeface="Cambria Math" panose="02040503050406030204" pitchFamily="18" charset="0"/>
-                      </a:rPr>
-                      <m:t>.</m:t>
-                    </m:r>
-                    <m:r>
-                      <a:rPr lang="en-US" sz="2800" i="1">
-                        <a:latin typeface="Cambria Math" panose="02040503050406030204" pitchFamily="18" charset="0"/>
-                      </a:rPr>
-                      <m:t>8125</m:t>
+                      <m:t>=0.8125</m:t>
                     </m:r>
                   </m:oMath>
                 </a14:m>
@@ -17402,13 +17222,7 @@
                               <a:rPr lang="en-US" sz="2800" i="1">
                                 <a:latin typeface="Cambria Math"/>
                               </a:rPr>
-                              <m:t>−</m:t>
-                            </m:r>
-                            <m:r>
-                              <a:rPr lang="en-US" sz="2800" i="1">
-                                <a:latin typeface="Cambria Math"/>
-                              </a:rPr>
-                              <m:t>1</m:t>
+                              <m:t>−1</m:t>
                             </m:r>
                           </m:e>
                         </m:d>
@@ -17441,13 +17255,7 @@
                           <a:rPr lang="en-US" sz="2800" i="1">
                             <a:latin typeface="Cambria Math"/>
                           </a:rPr>
-                          <m:t>1</m:t>
-                        </m:r>
-                        <m:r>
-                          <a:rPr lang="en-US" sz="2800" i="1">
-                            <a:latin typeface="Cambria Math"/>
-                          </a:rPr>
-                          <m:t>+</m:t>
+                          <m:t>1+</m:t>
                         </m:r>
                         <m:r>
                           <a:rPr lang="en-US" sz="2800" i="1">
@@ -17490,13 +17298,7 @@
                           <a:rPr lang="en-US" sz="2800" i="1">
                             <a:latin typeface="Cambria Math"/>
                           </a:rPr>
-                          <m:t>−</m:t>
-                        </m:r>
-                        <m:r>
-                          <a:rPr lang="en-US" sz="2800" i="1">
-                            <a:latin typeface="Cambria Math"/>
-                          </a:rPr>
-                          <m:t>127</m:t>
+                          <m:t>−127</m:t>
                         </m:r>
                       </m:sup>
                     </m:sSup>
@@ -17547,13 +17349,7 @@
                                 <a:rPr lang="en-US" sz="2800" i="1">
                                   <a:latin typeface="Cambria Math"/>
                                 </a:rPr>
-                                <m:t>−</m:t>
-                              </m:r>
-                              <m:r>
-                                <a:rPr lang="en-US" sz="2800" i="1">
-                                  <a:latin typeface="Cambria Math"/>
-                                </a:rPr>
-                                <m:t>1</m:t>
+                                <m:t>−1</m:t>
                               </m:r>
                             </m:e>
                           </m:d>
@@ -17586,31 +17382,13 @@
                             <a:rPr lang="en-US" sz="2800" i="1">
                               <a:latin typeface="Cambria Math"/>
                             </a:rPr>
-                            <m:t>1</m:t>
-                          </m:r>
-                          <m:r>
-                            <a:rPr lang="en-US" sz="2800" i="1">
-                              <a:latin typeface="Cambria Math"/>
-                            </a:rPr>
-                            <m:t>+</m:t>
+                            <m:t>1+</m:t>
                           </m:r>
                           <m:r>
                             <a:rPr lang="en-US" sz="2800" i="1">
                               <a:latin typeface="Cambria Math" panose="02040503050406030204" pitchFamily="18" charset="0"/>
                             </a:rPr>
-                            <m:t>0</m:t>
-                          </m:r>
-                          <m:r>
-                            <a:rPr lang="en-US" sz="2800" i="1">
-                              <a:latin typeface="Cambria Math" panose="02040503050406030204" pitchFamily="18" charset="0"/>
-                            </a:rPr>
-                            <m:t>.</m:t>
-                          </m:r>
-                          <m:r>
-                            <a:rPr lang="en-US" sz="2800" i="1">
-                              <a:latin typeface="Cambria Math" panose="02040503050406030204" pitchFamily="18" charset="0"/>
-                            </a:rPr>
-                            <m:t>8125</m:t>
+                            <m:t>0.8125</m:t>
                           </m:r>
                         </m:e>
                       </m:d>
@@ -17653,13 +17431,7 @@
                             <a:rPr lang="en-US" sz="2800" i="1">
                               <a:latin typeface="Cambria Math"/>
                             </a:rPr>
-                            <m:t>−</m:t>
-                          </m:r>
-                          <m:r>
-                            <a:rPr lang="en-US" sz="2800" i="1">
-                              <a:latin typeface="Cambria Math"/>
-                            </a:rPr>
-                            <m:t>127</m:t>
+                            <m:t>−127</m:t>
                           </m:r>
                         </m:sup>
                       </m:sSup>
@@ -17678,25 +17450,7 @@
                         <a:rPr lang="en-US" sz="2800" i="1">
                           <a:latin typeface="Cambria Math"/>
                         </a:rPr>
-                        <m:t>1</m:t>
-                      </m:r>
-                      <m:r>
-                        <a:rPr lang="en-US" sz="2800" i="1">
-                          <a:latin typeface="Cambria Math"/>
-                        </a:rPr>
-                        <m:t>×</m:t>
-                      </m:r>
-                      <m:r>
-                        <a:rPr lang="en-US" sz="2800" i="1">
-                          <a:latin typeface="Cambria Math"/>
-                        </a:rPr>
-                        <m:t>1</m:t>
-                      </m:r>
-                      <m:r>
-                        <a:rPr lang="en-US" sz="2800" i="1">
-                          <a:latin typeface="Cambria Math"/>
-                        </a:rPr>
-                        <m:t>.</m:t>
+                        <m:t>1×1.</m:t>
                       </m:r>
                       <m:r>
                         <a:rPr lang="en-US" sz="2800" b="0" i="1" smtClean="0">
@@ -17750,19 +17504,7 @@
                         <a:rPr lang="en-US" sz="2800" b="0" i="1" smtClean="0">
                           <a:latin typeface="Cambria Math" panose="02040503050406030204" pitchFamily="18" charset="0"/>
                         </a:rPr>
-                        <m:t>14</m:t>
-                      </m:r>
-                      <m:r>
-                        <a:rPr lang="en-US" sz="2800" b="0" i="1" smtClean="0">
-                          <a:latin typeface="Cambria Math" panose="02040503050406030204" pitchFamily="18" charset="0"/>
-                        </a:rPr>
-                        <m:t>.</m:t>
-                      </m:r>
-                      <m:r>
-                        <a:rPr lang="en-US" sz="2800" b="0" i="1" smtClean="0">
-                          <a:latin typeface="Cambria Math" panose="02040503050406030204" pitchFamily="18" charset="0"/>
-                        </a:rPr>
-                        <m:t>5</m:t>
+                        <m:t>14.5</m:t>
                       </m:r>
                     </m:oMath>
                   </m:oMathPara>
@@ -17980,19 +17722,7 @@
                       <a:rPr lang="en-US" i="1" smtClean="0">
                         <a:latin typeface="Cambria Math"/>
                       </a:rPr>
-                      <m:t>14</m:t>
-                    </m:r>
-                    <m:r>
-                      <a:rPr lang="en-US" i="1" smtClean="0">
-                        <a:latin typeface="Cambria Math"/>
-                      </a:rPr>
-                      <m:t>.</m:t>
-                    </m:r>
-                    <m:r>
-                      <a:rPr lang="en-US" i="1" smtClean="0">
-                        <a:latin typeface="Cambria Math"/>
-                      </a:rPr>
-                      <m:t>5</m:t>
+                      <m:t>14.5</m:t>
                     </m:r>
                     <m:r>
                       <a:rPr lang="en-US" b="0" i="1" smtClean="0">
@@ -18044,19 +17774,7 @@
                           <a:rPr lang="en-US" i="1">
                             <a:latin typeface="Cambria Math"/>
                           </a:rPr>
-                          <m:t>14</m:t>
-                        </m:r>
-                        <m:r>
-                          <a:rPr lang="en-US" i="1">
-                            <a:latin typeface="Cambria Math"/>
-                          </a:rPr>
-                          <m:t>.</m:t>
-                        </m:r>
-                        <m:r>
-                          <a:rPr lang="en-US" i="1">
-                            <a:latin typeface="Cambria Math"/>
-                          </a:rPr>
-                          <m:t>5</m:t>
+                          <m:t>14.5</m:t>
                         </m:r>
                       </m:num>
                       <m:den>
@@ -18091,25 +17809,7 @@
                       <a:rPr lang="en-US" b="0" i="1" smtClean="0">
                         <a:latin typeface="Cambria Math" panose="02040503050406030204" pitchFamily="18" charset="0"/>
                       </a:rPr>
-                      <m:t>=</m:t>
-                    </m:r>
-                    <m:r>
-                      <a:rPr lang="en-US" b="0" i="1" smtClean="0">
-                        <a:latin typeface="Cambria Math" panose="02040503050406030204" pitchFamily="18" charset="0"/>
-                      </a:rPr>
-                      <m:t>1</m:t>
-                    </m:r>
-                    <m:r>
-                      <a:rPr lang="en-US" b="0" i="1" smtClean="0">
-                        <a:latin typeface="Cambria Math" panose="02040503050406030204" pitchFamily="18" charset="0"/>
-                      </a:rPr>
-                      <m:t>.</m:t>
-                    </m:r>
-                    <m:r>
-                      <a:rPr lang="en-US" b="0" i="1" smtClean="0">
-                        <a:latin typeface="Cambria Math" panose="02040503050406030204" pitchFamily="18" charset="0"/>
-                      </a:rPr>
-                      <m:t>8125</m:t>
+                      <m:t>=1.8125</m:t>
                     </m:r>
                   </m:oMath>
                 </a14:m>
@@ -18128,49 +17828,7 @@
                       <a:rPr lang="en-US" i="1">
                         <a:latin typeface="Cambria Math"/>
                       </a:rPr>
-                      <m:t>14</m:t>
-                    </m:r>
-                    <m:r>
-                      <a:rPr lang="en-US" i="1">
-                        <a:latin typeface="Cambria Math"/>
-                      </a:rPr>
-                      <m:t>.</m:t>
-                    </m:r>
-                    <m:r>
-                      <a:rPr lang="en-US" i="1">
-                        <a:latin typeface="Cambria Math"/>
-                      </a:rPr>
-                      <m:t>5</m:t>
-                    </m:r>
-                    <m:r>
-                      <a:rPr lang="en-US" i="1">
-                        <a:latin typeface="Cambria Math"/>
-                      </a:rPr>
-                      <m:t>=</m:t>
-                    </m:r>
-                    <m:r>
-                      <a:rPr lang="en-US" i="1">
-                        <a:latin typeface="Cambria Math"/>
-                      </a:rPr>
-                      <m:t>1</m:t>
-                    </m:r>
-                    <m:r>
-                      <a:rPr lang="en-US" i="1">
-                        <a:latin typeface="Cambria Math"/>
-                      </a:rPr>
-                      <m:t>.</m:t>
-                    </m:r>
-                    <m:r>
-                      <a:rPr lang="en-US" i="1">
-                        <a:latin typeface="Cambria Math"/>
-                      </a:rPr>
-                      <m:t>8125</m:t>
-                    </m:r>
-                    <m:r>
-                      <a:rPr lang="en-US" i="1">
-                        <a:latin typeface="Cambria Math"/>
-                      </a:rPr>
-                      <m:t>×</m:t>
+                      <m:t>14.5=1.8125×</m:t>
                     </m:r>
                     <m:sSup>
                       <m:sSupPr>
@@ -18210,43 +17868,7 @@
                       <a:rPr lang="en-US" i="1">
                         <a:latin typeface="Cambria Math"/>
                       </a:rPr>
-                      <m:t>(</m:t>
-                    </m:r>
-                    <m:r>
-                      <a:rPr lang="en-US" i="1">
-                        <a:latin typeface="Cambria Math"/>
-                      </a:rPr>
-                      <m:t>1</m:t>
-                    </m:r>
-                    <m:r>
-                      <a:rPr lang="en-US" i="1">
-                        <a:latin typeface="Cambria Math"/>
-                      </a:rPr>
-                      <m:t>+</m:t>
-                    </m:r>
-                    <m:r>
-                      <a:rPr lang="en-US" i="1">
-                        <a:latin typeface="Cambria Math"/>
-                      </a:rPr>
-                      <m:t>0</m:t>
-                    </m:r>
-                    <m:r>
-                      <a:rPr lang="en-US" i="1">
-                        <a:latin typeface="Cambria Math"/>
-                      </a:rPr>
-                      <m:t>.</m:t>
-                    </m:r>
-                    <m:r>
-                      <a:rPr lang="en-US" i="1">
-                        <a:latin typeface="Cambria Math"/>
-                      </a:rPr>
-                      <m:t>8125</m:t>
-                    </m:r>
-                    <m:r>
-                      <a:rPr lang="en-US" i="1">
-                        <a:latin typeface="Cambria Math"/>
-                      </a:rPr>
-                      <m:t>)×</m:t>
+                      <m:t>(1+0.8125)×</m:t>
                     </m:r>
                     <m:sSup>
                       <m:sSupPr>
@@ -18296,13 +17918,7 @@
                       <a:rPr lang="en-US" b="0" i="1" smtClean="0">
                         <a:latin typeface="Cambria Math"/>
                       </a:rPr>
-                      <m:t>=</m:t>
-                    </m:r>
-                    <m:r>
-                      <a:rPr lang="en-US" b="0" i="1" smtClean="0">
-                        <a:latin typeface="Cambria Math"/>
-                      </a:rPr>
-                      <m:t>0</m:t>
+                      <m:t>=0</m:t>
                     </m:r>
                   </m:oMath>
                 </a14:m>
@@ -18335,37 +17951,7 @@
                       <a:rPr lang="en-US" i="1">
                         <a:latin typeface="Cambria Math"/>
                       </a:rPr>
-                      <m:t>3</m:t>
-                    </m:r>
-                    <m:r>
-                      <a:rPr lang="en-US" i="1">
-                        <a:latin typeface="Cambria Math"/>
-                      </a:rPr>
-                      <m:t>+</m:t>
-                    </m:r>
-                    <m:r>
-                      <a:rPr lang="en-US" i="1">
-                        <a:latin typeface="Cambria Math"/>
-                      </a:rPr>
-                      <m:t>127</m:t>
-                    </m:r>
-                    <m:r>
-                      <a:rPr lang="en-US" i="1">
-                        <a:latin typeface="Cambria Math"/>
-                      </a:rPr>
-                      <m:t>=</m:t>
-                    </m:r>
-                    <m:r>
-                      <a:rPr lang="en-US" i="1">
-                        <a:latin typeface="Cambria Math"/>
-                      </a:rPr>
-                      <m:t>130</m:t>
-                    </m:r>
-                    <m:r>
-                      <a:rPr lang="en-US" i="1">
-                        <a:latin typeface="Cambria Math"/>
-                      </a:rPr>
-                      <m:t>=</m:t>
+                      <m:t>3+127=130=</m:t>
                     </m:r>
                     <m:sSub>
                       <m:sSubPr>
@@ -18427,13 +18013,7 @@
                           <a:rPr lang="en-US" b="0" i="1" smtClean="0">
                             <a:latin typeface="Cambria Math"/>
                           </a:rPr>
-                          <m:t>0</m:t>
-                        </m:r>
-                        <m:r>
-                          <a:rPr lang="en-US" b="0" i="1" smtClean="0">
-                            <a:latin typeface="Cambria Math"/>
-                          </a:rPr>
-                          <m:t>.</m:t>
+                          <m:t>0.</m:t>
                         </m:r>
                         <m:r>
                           <a:rPr lang="en-US" b="0" i="1" smtClean="0">
@@ -18519,13 +18099,7 @@
                           <a:rPr lang="en-US" sz="2400" i="1">
                             <a:latin typeface="Cambria Math"/>
                           </a:rPr>
-                          <m:t>−</m:t>
-                        </m:r>
-                        <m:r>
-                          <a:rPr lang="en-US" sz="2400" i="1">
-                            <a:latin typeface="Cambria Math"/>
-                          </a:rPr>
-                          <m:t>1</m:t>
+                          <m:t>−1</m:t>
                         </m:r>
                       </m:sup>
                     </m:sSup>
@@ -18545,13 +18119,7 @@
                       <a:rPr lang="en-US" sz="2400" b="0" i="1" smtClean="0">
                         <a:latin typeface="Cambria Math" panose="02040503050406030204" pitchFamily="18" charset="0"/>
                       </a:rPr>
-                      <m:t>2</m:t>
-                    </m:r>
-                    <m:r>
-                      <a:rPr lang="en-US" sz="2400" b="0" i="1" smtClean="0">
-                        <a:latin typeface="Cambria Math" panose="02040503050406030204" pitchFamily="18" charset="0"/>
-                      </a:rPr>
-                      <m:t>×</m:t>
+                      <m:t>2×</m:t>
                     </m:r>
                     <m:sSup>
                       <m:sSupPr>
@@ -18574,13 +18142,7 @@
                           <a:rPr lang="en-US" sz="2400" i="1">
                             <a:latin typeface="Cambria Math"/>
                           </a:rPr>
-                          <m:t>−</m:t>
-                        </m:r>
-                        <m:r>
-                          <a:rPr lang="en-US" sz="2400" i="1">
-                            <a:latin typeface="Cambria Math"/>
-                          </a:rPr>
-                          <m:t>2</m:t>
+                          <m:t>−2</m:t>
                         </m:r>
                       </m:sup>
                     </m:sSup>
@@ -18600,13 +18162,7 @@
                       <a:rPr lang="en-US" sz="2400" b="0" i="1" smtClean="0">
                         <a:latin typeface="Cambria Math" panose="02040503050406030204" pitchFamily="18" charset="0"/>
                       </a:rPr>
-                      <m:t>3</m:t>
-                    </m:r>
-                    <m:r>
-                      <a:rPr lang="en-US" sz="2400" b="0" i="1" smtClean="0">
-                        <a:latin typeface="Cambria Math" panose="02040503050406030204" pitchFamily="18" charset="0"/>
-                      </a:rPr>
-                      <m:t>×</m:t>
+                      <m:t>3×</m:t>
                     </m:r>
                     <m:sSup>
                       <m:sSupPr>
@@ -18629,13 +18185,7 @@
                           <a:rPr lang="en-US" sz="2400" i="1">
                             <a:latin typeface="Cambria Math"/>
                           </a:rPr>
-                          <m:t>−</m:t>
-                        </m:r>
-                        <m:r>
-                          <a:rPr lang="en-US" sz="2400" i="1">
-                            <a:latin typeface="Cambria Math"/>
-                          </a:rPr>
-                          <m:t>3</m:t>
+                          <m:t>−3</m:t>
                         </m:r>
                       </m:sup>
                     </m:sSup>
@@ -18655,13 +18205,7 @@
                       <a:rPr lang="en-US" sz="2400" b="0" i="1" smtClean="0">
                         <a:latin typeface="Cambria Math" panose="02040503050406030204" pitchFamily="18" charset="0"/>
                       </a:rPr>
-                      <m:t>4</m:t>
-                    </m:r>
-                    <m:r>
-                      <a:rPr lang="en-US" sz="2400" b="0" i="1" smtClean="0">
-                        <a:latin typeface="Cambria Math" panose="02040503050406030204" pitchFamily="18" charset="0"/>
-                      </a:rPr>
-                      <m:t>×</m:t>
+                      <m:t>4×</m:t>
                     </m:r>
                     <m:sSup>
                       <m:sSupPr>
@@ -18684,13 +18228,7 @@
                           <a:rPr lang="en-US" sz="2400" i="1">
                             <a:latin typeface="Cambria Math"/>
                           </a:rPr>
-                          <m:t>−</m:t>
-                        </m:r>
-                        <m:r>
-                          <a:rPr lang="en-US" sz="2400" i="1">
-                            <a:latin typeface="Cambria Math"/>
-                          </a:rPr>
-                          <m:t>4</m:t>
+                          <m:t>−4</m:t>
                         </m:r>
                       </m:sup>
                     </m:sSup>
@@ -18712,91 +18250,7 @@
                       <a:rPr lang="en-US" i="1">
                         <a:latin typeface="Cambria Math"/>
                       </a:rPr>
-                      <m:t>0</m:t>
-                    </m:r>
-                    <m:r>
-                      <a:rPr lang="en-US" i="1">
-                        <a:latin typeface="Cambria Math"/>
-                      </a:rPr>
-                      <m:t>.</m:t>
-                    </m:r>
-                    <m:r>
-                      <a:rPr lang="en-US" i="1">
-                        <a:latin typeface="Cambria Math"/>
-                      </a:rPr>
-                      <m:t>8125</m:t>
-                    </m:r>
-                    <m:r>
-                      <a:rPr lang="en-US" i="1">
-                        <a:latin typeface="Cambria Math"/>
-                      </a:rPr>
-                      <m:t>×</m:t>
-                    </m:r>
-                    <m:r>
-                      <a:rPr lang="en-US" i="1">
-                        <a:latin typeface="Cambria Math"/>
-                      </a:rPr>
-                      <m:t>2</m:t>
-                    </m:r>
-                    <m:r>
-                      <a:rPr lang="en-US" i="1">
-                        <a:latin typeface="Cambria Math"/>
-                      </a:rPr>
-                      <m:t>=</m:t>
-                    </m:r>
-                    <m:r>
-                      <a:rPr lang="en-US" i="1">
-                        <a:latin typeface="Cambria Math"/>
-                      </a:rPr>
-                      <m:t>1</m:t>
-                    </m:r>
-                    <m:r>
-                      <a:rPr lang="en-US" i="1">
-                        <a:latin typeface="Cambria Math"/>
-                      </a:rPr>
-                      <m:t>.</m:t>
-                    </m:r>
-                    <m:r>
-                      <a:rPr lang="en-US" i="1">
-                        <a:latin typeface="Cambria Math"/>
-                      </a:rPr>
-                      <m:t>625</m:t>
-                    </m:r>
-                    <m:r>
-                      <a:rPr lang="en-US" i="1">
-                        <a:latin typeface="Cambria Math"/>
-                      </a:rPr>
-                      <m:t>=</m:t>
-                    </m:r>
-                    <m:r>
-                      <a:rPr lang="en-US" i="1">
-                        <a:latin typeface="Cambria Math"/>
-                      </a:rPr>
-                      <m:t>1</m:t>
-                    </m:r>
-                    <m:r>
-                      <a:rPr lang="en-US" i="1">
-                        <a:latin typeface="Cambria Math"/>
-                      </a:rPr>
-                      <m:t>+</m:t>
-                    </m:r>
-                    <m:r>
-                      <a:rPr lang="en-US" i="1">
-                        <a:latin typeface="Cambria Math"/>
-                      </a:rPr>
-                      <m:t>0</m:t>
-                    </m:r>
-                    <m:r>
-                      <a:rPr lang="en-US" i="1">
-                        <a:latin typeface="Cambria Math"/>
-                      </a:rPr>
-                      <m:t>.</m:t>
-                    </m:r>
-                    <m:r>
-                      <a:rPr lang="en-US" i="1">
-                        <a:latin typeface="Cambria Math"/>
-                      </a:rPr>
-                      <m:t>625</m:t>
+                      <m:t>0.8125×2=1.625=1+0.625</m:t>
                     </m:r>
                   </m:oMath>
                 </a14:m>
@@ -18813,91 +18267,7 @@
                       <a:rPr lang="en-US" i="1">
                         <a:latin typeface="Cambria Math"/>
                       </a:rPr>
-                      <m:t>0</m:t>
-                    </m:r>
-                    <m:r>
-                      <a:rPr lang="en-US" i="1">
-                        <a:latin typeface="Cambria Math"/>
-                      </a:rPr>
-                      <m:t>.</m:t>
-                    </m:r>
-                    <m:r>
-                      <a:rPr lang="en-US" i="1">
-                        <a:latin typeface="Cambria Math"/>
-                      </a:rPr>
-                      <m:t>625</m:t>
-                    </m:r>
-                    <m:r>
-                      <a:rPr lang="en-US" i="1">
-                        <a:latin typeface="Cambria Math"/>
-                      </a:rPr>
-                      <m:t>×</m:t>
-                    </m:r>
-                    <m:r>
-                      <a:rPr lang="en-US" i="1">
-                        <a:latin typeface="Cambria Math"/>
-                      </a:rPr>
-                      <m:t>2</m:t>
-                    </m:r>
-                    <m:r>
-                      <a:rPr lang="en-US" i="1">
-                        <a:latin typeface="Cambria Math"/>
-                      </a:rPr>
-                      <m:t>=</m:t>
-                    </m:r>
-                    <m:r>
-                      <a:rPr lang="en-US" i="1">
-                        <a:latin typeface="Cambria Math"/>
-                      </a:rPr>
-                      <m:t>1</m:t>
-                    </m:r>
-                    <m:r>
-                      <a:rPr lang="en-US" i="1">
-                        <a:latin typeface="Cambria Math"/>
-                      </a:rPr>
-                      <m:t>.</m:t>
-                    </m:r>
-                    <m:r>
-                      <a:rPr lang="en-US" i="1">
-                        <a:latin typeface="Cambria Math"/>
-                      </a:rPr>
-                      <m:t>25</m:t>
-                    </m:r>
-                    <m:r>
-                      <a:rPr lang="en-US" i="1">
-                        <a:latin typeface="Cambria Math"/>
-                      </a:rPr>
-                      <m:t>=</m:t>
-                    </m:r>
-                    <m:r>
-                      <a:rPr lang="en-US" i="1">
-                        <a:latin typeface="Cambria Math"/>
-                      </a:rPr>
-                      <m:t>1</m:t>
-                    </m:r>
-                    <m:r>
-                      <a:rPr lang="en-US" i="1">
-                        <a:latin typeface="Cambria Math"/>
-                      </a:rPr>
-                      <m:t>+</m:t>
-                    </m:r>
-                    <m:r>
-                      <a:rPr lang="en-US" i="1">
-                        <a:latin typeface="Cambria Math"/>
-                      </a:rPr>
-                      <m:t>0</m:t>
-                    </m:r>
-                    <m:r>
-                      <a:rPr lang="en-US" i="1">
-                        <a:latin typeface="Cambria Math"/>
-                      </a:rPr>
-                      <m:t>.</m:t>
-                    </m:r>
-                    <m:r>
-                      <a:rPr lang="en-US" i="1">
-                        <a:latin typeface="Cambria Math"/>
-                      </a:rPr>
-                      <m:t>25</m:t>
+                      <m:t>0.625×2=1.25=1+0.25</m:t>
                     </m:r>
                   </m:oMath>
                 </a14:m>
@@ -18914,91 +18284,7 @@
                       <a:rPr lang="en-US" i="1">
                         <a:latin typeface="Cambria Math"/>
                       </a:rPr>
-                      <m:t>0</m:t>
-                    </m:r>
-                    <m:r>
-                      <a:rPr lang="en-US" i="1">
-                        <a:latin typeface="Cambria Math"/>
-                      </a:rPr>
-                      <m:t>.</m:t>
-                    </m:r>
-                    <m:r>
-                      <a:rPr lang="en-US" i="1">
-                        <a:latin typeface="Cambria Math"/>
-                      </a:rPr>
-                      <m:t>25</m:t>
-                    </m:r>
-                    <m:r>
-                      <a:rPr lang="en-US" i="1">
-                        <a:latin typeface="Cambria Math"/>
-                      </a:rPr>
-                      <m:t>×</m:t>
-                    </m:r>
-                    <m:r>
-                      <a:rPr lang="en-US" i="1">
-                        <a:latin typeface="Cambria Math"/>
-                      </a:rPr>
-                      <m:t>2</m:t>
-                    </m:r>
-                    <m:r>
-                      <a:rPr lang="en-US" i="1">
-                        <a:latin typeface="Cambria Math"/>
-                      </a:rPr>
-                      <m:t>=</m:t>
-                    </m:r>
-                    <m:r>
-                      <a:rPr lang="en-US" i="1">
-                        <a:latin typeface="Cambria Math"/>
-                      </a:rPr>
-                      <m:t>0</m:t>
-                    </m:r>
-                    <m:r>
-                      <a:rPr lang="en-US" i="1">
-                        <a:latin typeface="Cambria Math"/>
-                      </a:rPr>
-                      <m:t>.</m:t>
-                    </m:r>
-                    <m:r>
-                      <a:rPr lang="en-US" i="1">
-                        <a:latin typeface="Cambria Math"/>
-                      </a:rPr>
-                      <m:t>5</m:t>
-                    </m:r>
-                    <m:r>
-                      <a:rPr lang="en-US" i="1">
-                        <a:latin typeface="Cambria Math"/>
-                      </a:rPr>
-                      <m:t>=</m:t>
-                    </m:r>
-                    <m:r>
-                      <a:rPr lang="en-US" i="1">
-                        <a:latin typeface="Cambria Math"/>
-                      </a:rPr>
-                      <m:t>0</m:t>
-                    </m:r>
-                    <m:r>
-                      <a:rPr lang="en-US" i="1">
-                        <a:latin typeface="Cambria Math"/>
-                      </a:rPr>
-                      <m:t>+</m:t>
-                    </m:r>
-                    <m:r>
-                      <a:rPr lang="en-US" i="1">
-                        <a:latin typeface="Cambria Math"/>
-                      </a:rPr>
-                      <m:t>0</m:t>
-                    </m:r>
-                    <m:r>
-                      <a:rPr lang="en-US" i="1">
-                        <a:latin typeface="Cambria Math"/>
-                      </a:rPr>
-                      <m:t>.</m:t>
-                    </m:r>
-                    <m:r>
-                      <a:rPr lang="en-US" i="1">
-                        <a:latin typeface="Cambria Math"/>
-                      </a:rPr>
-                      <m:t>5</m:t>
+                      <m:t>0.25×2=0.5=0+0.5</m:t>
                     </m:r>
                   </m:oMath>
                 </a14:m>
@@ -19015,43 +18301,7 @@
                       <a:rPr lang="en-US" i="1">
                         <a:latin typeface="Cambria Math"/>
                       </a:rPr>
-                      <m:t>0</m:t>
-                    </m:r>
-                    <m:r>
-                      <a:rPr lang="en-US" i="1">
-                        <a:latin typeface="Cambria Math"/>
-                      </a:rPr>
-                      <m:t>.</m:t>
-                    </m:r>
-                    <m:r>
-                      <a:rPr lang="en-US" i="1">
-                        <a:latin typeface="Cambria Math"/>
-                      </a:rPr>
-                      <m:t>5</m:t>
-                    </m:r>
-                    <m:r>
-                      <a:rPr lang="en-US" i="1">
-                        <a:latin typeface="Cambria Math"/>
-                      </a:rPr>
-                      <m:t>×</m:t>
-                    </m:r>
-                    <m:r>
-                      <a:rPr lang="en-US" i="1">
-                        <a:latin typeface="Cambria Math"/>
-                      </a:rPr>
-                      <m:t>2</m:t>
-                    </m:r>
-                    <m:r>
-                      <a:rPr lang="en-US" i="1">
-                        <a:latin typeface="Cambria Math"/>
-                      </a:rPr>
-                      <m:t>=</m:t>
-                    </m:r>
-                    <m:r>
-                      <a:rPr lang="en-US" i="1">
-                        <a:latin typeface="Cambria Math"/>
-                      </a:rPr>
-                      <m:t>1</m:t>
+                      <m:t>0.5×2=1</m:t>
                     </m:r>
                   </m:oMath>
                 </a14:m>
@@ -20429,8 +19679,8 @@
           </a:p>
         </p:txBody>
       </p:sp>
-      <mc:AlternateContent xmlns:mc="http://schemas.openxmlformats.org/markup-compatibility/2006">
-        <mc:Choice xmlns:a14="http://schemas.microsoft.com/office/drawing/2010/main" Requires="a14">
+      <mc:AlternateContent xmlns:mc="http://schemas.openxmlformats.org/markup-compatibility/2006" xmlns:a14="http://schemas.microsoft.com/office/drawing/2010/main">
+        <mc:Choice Requires="a14">
           <p:sp>
             <p:nvSpPr>
               <p:cNvPr id="4" name="Content Placeholder 3">
@@ -21635,7 +20885,7 @@
             </p:txBody>
           </p:sp>
         </mc:Choice>
-        <mc:Fallback>
+        <mc:Fallback xmlns="">
           <p:sp>
             <p:nvSpPr>
               <p:cNvPr id="4" name="Content Placeholder 3">
@@ -23235,13 +22485,7 @@
                                 <a:rPr lang="en-US" sz="2800">
                                   <a:latin typeface="Cambria Math" panose="02040503050406030204" pitchFamily="18" charset="0"/>
                                 </a:rPr>
-                                <m:t>−</m:t>
-                              </m:r>
-                              <m:r>
-                                <a:rPr lang="en-US" sz="2800">
-                                  <a:latin typeface="Cambria Math" panose="02040503050406030204" pitchFamily="18" charset="0"/>
-                                </a:rPr>
-                                <m:t>1</m:t>
+                                <m:t>−1</m:t>
                               </m:r>
                             </m:e>
                           </m:d>
@@ -23297,16 +22541,7 @@
                               </a:solidFill>
                               <a:latin typeface="Cambria Math" panose="02040503050406030204" pitchFamily="18" charset="0"/>
                             </a:rPr>
-                            <m:t>−</m:t>
-                          </m:r>
-                          <m:r>
-                            <a:rPr lang="en-US" sz="2800">
-                              <a:solidFill>
-                                <a:srgbClr val="FF0000"/>
-                              </a:solidFill>
-                              <a:latin typeface="Cambria Math" panose="02040503050406030204" pitchFamily="18" charset="0"/>
-                            </a:rPr>
-                            <m:t>126</m:t>
+                            <m:t>−126</m:t>
                           </m:r>
                         </m:sup>
                       </m:sSup>
@@ -23409,13 +22644,7 @@
                                 <a:rPr lang="en-US" sz="2800">
                                   <a:latin typeface="Cambria Math" panose="02040503050406030204" pitchFamily="18" charset="0"/>
                                 </a:rPr>
-                                <m:t>−</m:t>
-                              </m:r>
-                              <m:r>
-                                <a:rPr lang="en-US" sz="2800">
-                                  <a:latin typeface="Cambria Math" panose="02040503050406030204" pitchFamily="18" charset="0"/>
-                                </a:rPr>
-                                <m:t>1</m:t>
+                                <m:t>−1</m:t>
                               </m:r>
                             </m:e>
                           </m:d>
@@ -23507,16 +22736,7 @@
                               </a:solidFill>
                               <a:latin typeface="Cambria Math" panose="02040503050406030204" pitchFamily="18" charset="0"/>
                             </a:rPr>
-                            <m:t>−</m:t>
-                          </m:r>
-                          <m:r>
-                            <a:rPr lang="en-US" sz="2800">
-                              <a:solidFill>
-                                <a:srgbClr val="FF0000"/>
-                              </a:solidFill>
-                              <a:latin typeface="Cambria Math" panose="02040503050406030204" pitchFamily="18" charset="0"/>
-                            </a:rPr>
-                            <m:t>12</m:t>
+                            <m:t>−12</m:t>
                           </m:r>
                           <m:r>
                             <a:rPr lang="en-US" sz="2800" i="1">
@@ -23727,19 +22947,7 @@
                             <a:rPr lang="en-US" sz="2400" i="1">
                               <a:latin typeface="Cambria Math"/>
                             </a:rPr>
-                            <m:t>(−</m:t>
-                          </m:r>
-                          <m:r>
-                            <a:rPr lang="en-US" sz="2400" i="1">
-                              <a:latin typeface="Cambria Math"/>
-                            </a:rPr>
-                            <m:t>1</m:t>
-                          </m:r>
-                          <m:r>
-                            <a:rPr lang="en-US" sz="2400" i="1">
-                              <a:latin typeface="Cambria Math"/>
-                            </a:rPr>
-                            <m:t>)</m:t>
+                            <m:t>(−1)</m:t>
                           </m:r>
                         </m:e>
                         <m:sup>
@@ -23770,19 +22978,7 @@
                             <a:rPr lang="en-US" sz="2400" i="1">
                               <a:latin typeface="Cambria Math"/>
                             </a:rPr>
-                            <m:t>1</m:t>
-                          </m:r>
-                          <m:r>
-                            <a:rPr lang="en-US" sz="2400" i="1">
-                              <a:latin typeface="Cambria Math"/>
-                            </a:rPr>
-                            <m:t>+</m:t>
-                          </m:r>
-                          <m:r>
-                            <a:rPr lang="en-US" sz="2400" i="1">
-                              <a:latin typeface="Cambria Math"/>
-                            </a:rPr>
-                            <m:t>0</m:t>
+                            <m:t>1+0</m:t>
                           </m:r>
                         </m:e>
                       </m:d>
@@ -23813,19 +23009,7 @@
                             <a:rPr lang="en-US" sz="2400" i="1">
                               <a:latin typeface="Cambria Math"/>
                             </a:rPr>
-                            <m:t>1</m:t>
-                          </m:r>
-                          <m:r>
-                            <a:rPr lang="en-US" sz="2400" i="1">
-                              <a:latin typeface="Cambria Math"/>
-                            </a:rPr>
-                            <m:t>−</m:t>
-                          </m:r>
-                          <m:r>
-                            <a:rPr lang="en-US" sz="2400" i="1">
-                              <a:latin typeface="Cambria Math"/>
-                            </a:rPr>
-                            <m:t>127</m:t>
+                            <m:t>1−127</m:t>
                           </m:r>
                         </m:sup>
                       </m:sSup>
@@ -23856,13 +23040,7 @@
                             <a:rPr lang="en-US" sz="2400" i="1">
                               <a:latin typeface="Cambria Math"/>
                             </a:rPr>
-                            <m:t>−</m:t>
-                          </m:r>
-                          <m:r>
-                            <a:rPr lang="en-US" sz="2400" i="1">
-                              <a:latin typeface="Cambria Math"/>
-                            </a:rPr>
-                            <m:t>126</m:t>
+                            <m:t>−126</m:t>
                           </m:r>
                         </m:sup>
                       </m:sSup>
@@ -23870,31 +23048,7 @@
                         <a:rPr lang="en-US" sz="2400" i="1">
                           <a:latin typeface="Cambria Math"/>
                         </a:rPr>
-                        <m:t>≈</m:t>
-                      </m:r>
-                      <m:r>
-                        <a:rPr lang="en-US" sz="2400" i="1">
-                          <a:latin typeface="Cambria Math"/>
-                        </a:rPr>
-                        <m:t>1</m:t>
-                      </m:r>
-                      <m:r>
-                        <a:rPr lang="en-US" sz="2400" i="1">
-                          <a:latin typeface="Cambria Math"/>
-                        </a:rPr>
-                        <m:t>.</m:t>
-                      </m:r>
-                      <m:r>
-                        <a:rPr lang="en-US" sz="2400" i="1">
-                          <a:latin typeface="Cambria Math"/>
-                        </a:rPr>
-                        <m:t>18</m:t>
-                      </m:r>
-                      <m:r>
-                        <a:rPr lang="en-US" sz="2400" i="1">
-                          <a:latin typeface="Cambria Math"/>
-                        </a:rPr>
-                        <m:t>×</m:t>
+                        <m:t>≈1.18×</m:t>
                       </m:r>
                       <m:sSup>
                         <m:sSupPr>
@@ -23917,13 +23071,7 @@
                             <a:rPr lang="en-US" sz="2400" i="1">
                               <a:latin typeface="Cambria Math"/>
                             </a:rPr>
-                            <m:t>−</m:t>
-                          </m:r>
-                          <m:r>
-                            <a:rPr lang="en-US" sz="2400" i="1">
-                              <a:latin typeface="Cambria Math"/>
-                            </a:rPr>
-                            <m:t>38</m:t>
+                            <m:t>−38</m:t>
                           </m:r>
                         </m:sup>
                       </m:sSup>
@@ -24203,19 +23351,7 @@
                             <a:rPr lang="en-US" sz="2400" i="1">
                               <a:latin typeface="Cambria Math"/>
                             </a:rPr>
-                            <m:t>(−</m:t>
-                          </m:r>
-                          <m:r>
-                            <a:rPr lang="en-US" sz="2400" i="1">
-                              <a:latin typeface="Cambria Math"/>
-                            </a:rPr>
-                            <m:t>1</m:t>
-                          </m:r>
-                          <m:r>
-                            <a:rPr lang="en-US" sz="2400" i="1">
-                              <a:latin typeface="Cambria Math"/>
-                            </a:rPr>
-                            <m:t>)</m:t>
+                            <m:t>(−1)</m:t>
                           </m:r>
                         </m:e>
                         <m:sup>
@@ -24314,19 +23450,7 @@
                             <a:rPr lang="en-US" sz="2400" i="1">
                               <a:latin typeface="Cambria Math"/>
                             </a:rPr>
-                            <m:t>1</m:t>
-                          </m:r>
-                          <m:r>
-                            <a:rPr lang="en-US" sz="2400" i="1">
-                              <a:latin typeface="Cambria Math"/>
-                            </a:rPr>
-                            <m:t>−</m:t>
-                          </m:r>
-                          <m:r>
-                            <a:rPr lang="en-US" sz="2400" i="1">
-                              <a:latin typeface="Cambria Math"/>
-                            </a:rPr>
-                            <m:t>127</m:t>
+                            <m:t>1−127</m:t>
                           </m:r>
                         </m:sup>
                       </m:sSup>
@@ -24357,13 +23481,7 @@
                             <a:rPr lang="en-US" sz="2400" i="1">
                               <a:latin typeface="Cambria Math"/>
                             </a:rPr>
-                            <m:t>−</m:t>
-                          </m:r>
-                          <m:r>
-                            <a:rPr lang="en-US" sz="2400" i="1">
-                              <a:latin typeface="Cambria Math"/>
-                            </a:rPr>
-                            <m:t>149</m:t>
+                            <m:t>−149</m:t>
                           </m:r>
                         </m:sup>
                       </m:sSup>
@@ -24371,19 +23489,7 @@
                         <a:rPr lang="en-US" sz="2400" i="1">
                           <a:latin typeface="Cambria Math"/>
                         </a:rPr>
-                        <m:t>≈</m:t>
-                      </m:r>
-                      <m:r>
-                        <a:rPr lang="en-US" sz="2400" i="1">
-                          <a:latin typeface="Cambria Math"/>
-                        </a:rPr>
-                        <m:t>1</m:t>
-                      </m:r>
-                      <m:r>
-                        <a:rPr lang="en-US" sz="2400" i="1">
-                          <a:latin typeface="Cambria Math"/>
-                        </a:rPr>
-                        <m:t>.</m:t>
+                        <m:t>≈1.</m:t>
                       </m:r>
                       <m:r>
                         <a:rPr lang="en-US" sz="2400" b="0" i="1" smtClean="0">
@@ -25896,20 +25002,47 @@
         <p:spPr/>
         <p:txBody>
           <a:bodyPr>
-            <a:normAutofit fontScale="92500"/>
+            <a:normAutofit fontScale="92500" lnSpcReduction="20000"/>
           </a:bodyPr>
           <a:lstStyle/>
           <a:p>
             <a:r>
+              <a:rPr lang="en-US" altLang="zh-CN" dirty="0"/>
+              <a:t>Recommended: How Floating-Point Numbers Are Represented</a:t>
+            </a:r>
+          </a:p>
+          <a:p>
+            <a:pPr lvl="1"/>
+            <a:r>
+              <a:rPr lang="en-US" altLang="zh-CN" dirty="0">
+                <a:hlinkClick r:id="rId2"/>
+              </a:rPr>
+              <a:t>https://www.youtube.com/watch?v=bbkcEiUjehk</a:t>
+            </a:r>
+            <a:r>
+              <a:rPr lang="en-US" altLang="zh-CN" dirty="0"/>
+              <a:t> </a:t>
+            </a:r>
+          </a:p>
+          <a:p>
+            <a:r>
+              <a:rPr lang="en-US" altLang="zh-CN"/>
+              <a:t>Recommended:</a:t>
+            </a:r>
+            <a:r>
+              <a:rPr lang="en-US"/>
+              <a:t> </a:t>
+            </a:r>
+            <a:r>
               <a:rPr lang="en-US" dirty="0"/>
-              <a:t>How Floating Point Numbers Work (in 7 minutes!)</a:t>
+              <a:t>Floating Point Numbers Work (in 7 minutes!)</a:t>
             </a:r>
           </a:p>
           <a:p>
             <a:pPr lvl="1"/>
             <a:r>
               <a:rPr lang="en-US" dirty="0">
-                <a:hlinkClick r:id="rId2"/>
+                <a:hlinkClick r:id="rId3"/>
               </a:rPr>
               <a:t>https://www.youtube.com/watch?v=W_Knvo9NuJY</a:t>
             </a:r>
@@ -25925,7 +25058,7 @@
             <a:pPr lvl="1"/>
             <a:r>
               <a:rPr lang="en-US" dirty="0">
-                <a:hlinkClick r:id="rId3"/>
+                <a:hlinkClick r:id="rId4"/>
               </a:rPr>
               <a:t>https://www.youtube.com/watch?v=4DfXdJdaNYs</a:t>
             </a:r>
@@ -25944,7 +25077,7 @@
             <a:pPr lvl="1"/>
             <a:r>
               <a:rPr lang="en-US" dirty="0">
-                <a:hlinkClick r:id="rId4"/>
+                <a:hlinkClick r:id="rId5"/>
               </a:rPr>
               <a:t>https://www.youtube.com/watch?v=2gIxbTn7GSc</a:t>
             </a:r>
@@ -25963,7 +25096,7 @@
             <a:pPr lvl="1"/>
             <a:r>
               <a:rPr lang="en-US" dirty="0">
-                <a:hlinkClick r:id="rId5"/>
+                <a:hlinkClick r:id="rId6"/>
               </a:rPr>
               <a:t>https://www.youtube.com/watch?v=9k5rdPUzij8&amp;list=PL-ftFcielQtGxBUfzkbz9tWlRZb-rlJ2p&amp;index=2</a:t>
             </a:r>
@@ -25982,7 +25115,7 @@
             <a:pPr lvl="1"/>
             <a:r>
               <a:rPr lang="en-US" dirty="0">
-                <a:hlinkClick r:id="rId5"/>
+                <a:hlinkClick r:id="rId6"/>
               </a:rPr>
               <a:t>https://www.youtube.com/watch?v=9k5rdPUzij8&amp;list=PL-ftFcielQtGxBUfzkbz9tWlRZb-rlJ2p&amp;index=2</a:t>
             </a:r>
@@ -27602,13 +26735,7 @@
                           <a:rPr lang="en-US" sz="2000">
                             <a:latin typeface="Cambria Math" panose="02040503050406030204" pitchFamily="18" charset="0"/>
                           </a:rPr>
-                          <m:t>2</m:t>
-                        </m:r>
-                        <m:r>
-                          <a:rPr lang="en-US" sz="2000">
-                            <a:latin typeface="Cambria Math" panose="02040503050406030204" pitchFamily="18" charset="0"/>
-                          </a:rPr>
-                          <m:t> </m:t>
+                          <m:t>2 </m:t>
                         </m:r>
                       </m:sub>
                     </m:sSub>
@@ -27705,13 +26832,7 @@
                           <a:rPr lang="en-US" sz="2000" i="1">
                             <a:latin typeface="Cambria Math"/>
                           </a:rPr>
-                          <m:t>−</m:t>
-                        </m:r>
-                        <m:r>
-                          <a:rPr lang="en-US" sz="2000" i="1">
-                            <a:latin typeface="Cambria Math"/>
-                          </a:rPr>
-                          <m:t>3</m:t>
+                          <m:t>−3</m:t>
                         </m:r>
                       </m:sup>
                     </m:sSup>
@@ -28004,13 +27125,7 @@
                             <a:rPr lang="en-US" sz="2000">
                               <a:latin typeface="Cambria Math" panose="02040503050406030204" pitchFamily="18" charset="0"/>
                             </a:rPr>
-                            <m:t>−</m:t>
-                          </m:r>
-                          <m:r>
-                            <a:rPr lang="en-US" sz="2000">
-                              <a:latin typeface="Cambria Math" panose="02040503050406030204" pitchFamily="18" charset="0"/>
-                            </a:rPr>
-                            <m:t>1</m:t>
+                            <m:t>−1</m:t>
                           </m:r>
                         </m:sup>
                       </m:sSup>
@@ -28056,13 +27171,7 @@
                             <a:rPr lang="en-US" sz="2000">
                               <a:latin typeface="Cambria Math" panose="02040503050406030204" pitchFamily="18" charset="0"/>
                             </a:rPr>
-                            <m:t>−</m:t>
-                          </m:r>
-                          <m:r>
-                            <a:rPr lang="en-US" sz="2000">
-                              <a:latin typeface="Cambria Math" panose="02040503050406030204" pitchFamily="18" charset="0"/>
-                            </a:rPr>
-                            <m:t>2</m:t>
+                            <m:t>−2</m:t>
                           </m:r>
                         </m:sup>
                       </m:sSup>
@@ -28108,13 +27217,7 @@
                             <a:rPr lang="en-US" sz="2000">
                               <a:latin typeface="Cambria Math" panose="02040503050406030204" pitchFamily="18" charset="0"/>
                             </a:rPr>
-                            <m:t>−</m:t>
-                          </m:r>
-                          <m:r>
-                            <a:rPr lang="en-US" sz="2000">
-                              <a:latin typeface="Cambria Math" panose="02040503050406030204" pitchFamily="18" charset="0"/>
-                            </a:rPr>
-                            <m:t>3</m:t>
+                            <m:t>−3</m:t>
                           </m:r>
                         </m:sup>
                       </m:sSup>
@@ -28148,25 +27251,7 @@
                         <a:rPr lang="en-US" sz="2000">
                           <a:latin typeface="Cambria Math"/>
                         </a:rPr>
-                        <m:t>=</m:t>
-                      </m:r>
-                      <m:r>
-                        <a:rPr lang="en-US" sz="2000">
-                          <a:latin typeface="Cambria Math"/>
-                        </a:rPr>
-                        <m:t>21</m:t>
-                      </m:r>
-                      <m:r>
-                        <a:rPr lang="en-US" sz="2000">
-                          <a:latin typeface="Cambria Math"/>
-                        </a:rPr>
-                        <m:t>+</m:t>
-                      </m:r>
-                      <m:r>
-                        <a:rPr lang="en-US" sz="2000">
-                          <a:latin typeface="Cambria Math"/>
-                        </a:rPr>
-                        <m:t>5</m:t>
+                        <m:t>=21+5</m:t>
                       </m:r>
                       <m:r>
                         <a:rPr lang="en-US" sz="2000" i="1">
@@ -28195,13 +27280,7 @@
                             <a:rPr lang="en-US" sz="2000" i="1">
                               <a:latin typeface="Cambria Math"/>
                             </a:rPr>
-                            <m:t>−</m:t>
-                          </m:r>
-                          <m:r>
-                            <a:rPr lang="en-US" sz="2000" i="1">
-                              <a:latin typeface="Cambria Math"/>
-                            </a:rPr>
-                            <m:t>3</m:t>
+                            <m:t>−3</m:t>
                           </m:r>
                         </m:sup>
                       </m:sSup>
@@ -28221,13 +27300,7 @@
                         <a:rPr lang="en-US" sz="2000">
                           <a:latin typeface="Cambria Math" panose="02040503050406030204" pitchFamily="18" charset="0"/>
                         </a:rPr>
-                        <m:t>.</m:t>
-                      </m:r>
-                      <m:r>
-                        <a:rPr lang="en-US" sz="2000">
-                          <a:latin typeface="Cambria Math" panose="02040503050406030204" pitchFamily="18" charset="0"/>
-                        </a:rPr>
-                        <m:t>625</m:t>
+                        <m:t>.625</m:t>
                       </m:r>
                     </m:oMath>
                   </m:oMathPara>
@@ -28548,13 +27621,7 @@
                             <a:rPr lang="en-US" sz="2000">
                               <a:latin typeface="Cambria Math" panose="02040503050406030204" pitchFamily="18" charset="0"/>
                             </a:rPr>
-                            <m:t>2</m:t>
-                          </m:r>
-                          <m:r>
-                            <a:rPr lang="en-US" sz="2000">
-                              <a:latin typeface="Cambria Math" panose="02040503050406030204" pitchFamily="18" charset="0"/>
-                            </a:rPr>
-                            <m:t> </m:t>
+                            <m:t>2 </m:t>
                           </m:r>
                         </m:sub>
                       </m:sSub>
@@ -28662,25 +27729,7 @@
                         <a:rPr lang="en-US" sz="2000" i="1">
                           <a:latin typeface="Cambria Math" panose="02040503050406030204" pitchFamily="18" charset="0"/>
                         </a:rPr>
-                        <m:t>=</m:t>
-                      </m:r>
-                      <m:r>
-                        <a:rPr lang="en-US" sz="2000" i="1">
-                          <a:latin typeface="Cambria Math" panose="02040503050406030204" pitchFamily="18" charset="0"/>
-                        </a:rPr>
-                        <m:t>21</m:t>
-                      </m:r>
-                      <m:r>
-                        <a:rPr lang="en-US" sz="2000" i="1">
-                          <a:latin typeface="Cambria Math" panose="02040503050406030204" pitchFamily="18" charset="0"/>
-                        </a:rPr>
-                        <m:t>.</m:t>
-                      </m:r>
-                      <m:r>
-                        <a:rPr lang="en-US" sz="2000" i="1">
-                          <a:latin typeface="Cambria Math" panose="02040503050406030204" pitchFamily="18" charset="0"/>
-                        </a:rPr>
-                        <m:t>625</m:t>
+                        <m:t>=21.625</m:t>
                       </m:r>
                     </m:oMath>
                   </m:oMathPara>
@@ -35497,34 +34546,7 @@
                         </a:solidFill>
                         <a:latin typeface="Cambria Math" panose="02040503050406030204" pitchFamily="18" charset="0"/>
                       </a:rPr>
-                      <m:t>−</m:t>
-                    </m:r>
-                    <m:r>
-                      <a:rPr lang="en-US" sz="2000" i="1">
-                        <a:solidFill>
-                          <a:srgbClr val="0000FF"/>
-                        </a:solidFill>
-                        <a:latin typeface="Cambria Math" panose="02040503050406030204" pitchFamily="18" charset="0"/>
-                      </a:rPr>
-                      <m:t>12867</m:t>
-                    </m:r>
-                    <m:r>
-                      <a:rPr lang="en-US" sz="2000" i="1">
-                        <a:solidFill>
-                          <a:srgbClr val="0000FF"/>
-                        </a:solidFill>
-                        <a:latin typeface="Cambria Math" panose="02040503050406030204" pitchFamily="18" charset="0"/>
-                      </a:rPr>
-                      <m:t>.</m:t>
-                    </m:r>
-                    <m:r>
-                      <a:rPr lang="en-US" sz="2000" i="1">
-                        <a:solidFill>
-                          <a:srgbClr val="0000FF"/>
-                        </a:solidFill>
-                        <a:latin typeface="Cambria Math" panose="02040503050406030204" pitchFamily="18" charset="0"/>
-                      </a:rPr>
-                      <m:t>964928</m:t>
+                      <m:t>−12867.964928</m:t>
                     </m:r>
                   </m:oMath>
                 </a14:m>
@@ -35565,25 +34587,7 @@
                           <a:rPr lang="en-US" sz="2000" i="1">
                             <a:latin typeface="Cambria Math" panose="02040503050406030204" pitchFamily="18" charset="0"/>
                           </a:rPr>
-                          <m:t>−</m:t>
-                        </m:r>
-                        <m:r>
-                          <a:rPr lang="en-US" sz="2000" i="1">
-                            <a:latin typeface="Cambria Math" panose="02040503050406030204" pitchFamily="18" charset="0"/>
-                          </a:rPr>
-                          <m:t>12867</m:t>
-                        </m:r>
-                        <m:r>
-                          <a:rPr lang="en-US" sz="2000" i="1">
-                            <a:latin typeface="Cambria Math" panose="02040503050406030204" pitchFamily="18" charset="0"/>
-                          </a:rPr>
-                          <m:t>.</m:t>
-                        </m:r>
-                        <m:r>
-                          <a:rPr lang="en-US" sz="2000" i="1">
-                            <a:latin typeface="Cambria Math" panose="02040503050406030204" pitchFamily="18" charset="0"/>
-                          </a:rPr>
-                          <m:t>964928</m:t>
+                          <m:t>−12867.964928</m:t>
                         </m:r>
                         <m:r>
                           <a:rPr lang="en-US" sz="2000">
